--- a/docs/demo/driftwatch-deck.pptx
+++ b/docs/demo/driftwatch-deck.pptx
@@ -9,6 +9,7 @@
     <p:sldId id="257" r:id="rId9"/>
     <p:sldId id="258" r:id="rId10"/>
     <p:sldId id="259" r:id="rId11"/>
+    <p:sldId id="266" r:id="rId18"/>
     <p:sldId id="260" r:id="rId12"/>
     <p:sldId id="261" r:id="rId13"/>
     <p:sldId id="262" r:id="rId14"/>
@@ -4274,6 +4275,129 @@
                   <a:srgbClr val="E8ECF4"/>
                 </a:solidFill>
               </a:rPr>
+              <a:t>How it was built — attributed honestly</a:t>
+            </a:r>
+          </a:p>
+        </p:txBody>
+      </p:sp>
+      <p:sp>
+        <p:nvSpPr>
+          <p:cNvPr id="3" name="Content Placeholder 2"/>
+          <p:cNvSpPr>
+            <a:spLocks noGrp="1"/>
+          </p:cNvSpPr>
+          <p:nvPr>
+            <p:ph idx="1"/>
+          </p:nvPr>
+        </p:nvSpPr>
+        <p:spPr/>
+        <p:txBody>
+          <a:bodyPr/>
+          <a:lstStyle/>
+          <a:p>
+            <a:pPr/>
+            <a:r>
+              <a:rPr sz="2000">
+                <a:solidFill>
+                  <a:srgbClr val="DDE3EC"/>
+                </a:solidFill>
+              </a:rPr>
+              <a:t>Cursor agent CLI drove Tasks 1–2 (session logs retained); free-tier quota exhausted mid-window — blocker posted to HackOS, the announced rule change captured</a:t>
+            </a:r>
+          </a:p>
+          <a:p>
+            <a:pPr/>
+            <a:r>
+              <a:rPr sz="2000">
+                <a:solidFill>
+                  <a:srgbClr val="DDE3EC"/>
+                </a:solidFill>
+              </a:rPr>
+              <a:t>Hermes agent drove Tasks 3–6 with TDD throughout; per-task attribution lives in the committed build log</a:t>
+            </a:r>
+          </a:p>
+          <a:p>
+            <a:pPr/>
+            <a:r>
+              <a:rPr sz="2000">
+                <a:solidFill>
+                  <a:srgbClr val="94A3B8"/>
+                </a:solidFill>
+              </a:rPr>
+              <a:t>Every mutating step on the live Zetaris instance went through a dry-run approval package first — recorded in decisions.md</a:t>
+            </a:r>
+          </a:p>
+          <a:p>
+            <a:pPr/>
+            <a:r>
+              <a:rPr sz="2000">
+                <a:solidFill>
+                  <a:srgbClr val="DDE3EC"/>
+                </a:solidFill>
+              </a:rPr>
+              <a:t>NVIDIA: model path is provider-agnostic (OpenAI-compatible, Nemotron-capable endpoints unconfirmed) — stated as-is</a:t>
+            </a:r>
+          </a:p>
+          <a:p>
+            <a:pPr/>
+            <a:r>
+              <a:rPr sz="2000">
+                <a:solidFill>
+                  <a:srgbClr val="DDE3EC"/>
+                </a:solidFill>
+              </a:rPr>
+              <a:t>Meterless: World Model engine implemented in app/world_model/ and consumed by Scout and Skeptic, with generated offline acceptance; Nightshift provider implemented and contract-tested, never served a live request (vendor Mac build fails Gatekeeper) — stated as-is</a:t>
+            </a:r>
+          </a:p>
+        </p:txBody>
+      </p:sp>
+    </p:spTree>
+  </p:cSld>
+  <p:clrMapOvr>
+    <a:masterClrMapping/>
+  </p:clrMapOvr>
+</p:sld>
+</file>
+
+<file path=ppt/slides/slide11.xml><?xml version="1.0" encoding="utf-8"?>
+<p:sld xmlns:a="http://schemas.openxmlformats.org/drawingml/2006/main" xmlns:p="http://schemas.openxmlformats.org/presentationml/2006/main" xmlns:r="http://schemas.openxmlformats.org/officeDocument/2006/relationships">
+  <p:cSld>
+    <p:bg>
+      <p:bgPr>
+        <a:solidFill>
+          <a:srgbClr val="151A23"/>
+        </a:solidFill>
+        <a:effectLst/>
+      </p:bgPr>
+    </p:bg>
+    <p:spTree>
+      <p:nvGrpSpPr>
+        <p:cNvPr id="1" name=""/>
+        <p:cNvGrpSpPr/>
+        <p:nvPr/>
+      </p:nvGrpSpPr>
+      <p:grpSpPr/>
+      <p:sp>
+        <p:nvSpPr>
+          <p:cNvPr id="2" name="Title 1"/>
+          <p:cNvSpPr>
+            <a:spLocks noGrp="1"/>
+          </p:cNvSpPr>
+          <p:nvPr>
+            <p:ph type="title"/>
+          </p:nvPr>
+        </p:nvSpPr>
+        <p:spPr/>
+        <p:txBody>
+          <a:bodyPr/>
+          <a:lstStyle/>
+          <a:p>
+            <a:r>
+              <a:rPr>
+                <a:solidFill>
+                  <a:srgbClr val="E8ECF4"/>
+                </a:solidFill>
+              </a:rPr>
               <a:t>Run it yourself — no keys required</a:t>
             </a:r>
           </a:p>
@@ -4585,7 +4709,7 @@
                   <a:srgbClr val="94A3B8"/>
                 </a:solidFill>
               </a:rPr>
-              <a:t>Hand-rolled, no orchestration framework — 259 tests instead of a dependency tree</a:t>
+              <a:t>Hand-rolled, no orchestration framework — 456 tests instead of a dependency tree</a:t>
             </a:r>
           </a:p>
         </p:txBody>
@@ -4724,6 +4848,121 @@
 <file path=ppt/slides/slide5.xml><?xml version="1.0" encoding="utf-8"?>
 <p:sld xmlns:a="http://schemas.openxmlformats.org/drawingml/2006/main" xmlns:p="http://schemas.openxmlformats.org/presentationml/2006/main" xmlns:r="http://schemas.openxmlformats.org/officeDocument/2006/relationships">
   <p:cSld>
+    <p:spTree>
+      <p:nvGrpSpPr>
+        <p:cNvPr id="1" name=""/>
+        <p:cNvGrpSpPr/>
+        <p:nvPr/>
+      </p:nvGrpSpPr>
+      <p:grpSpPr/>
+      <p:sp>
+        <p:nvSpPr>
+          <p:cNvPr id="2" name="Title 1"/>
+          <p:cNvSpPr>
+            <a:spLocks noGrp="1"/>
+          </p:cNvSpPr>
+          <p:nvPr>
+            <p:ph type="title"/>
+          </p:nvPr>
+        </p:nvSpPr>
+        <p:spPr/>
+        <p:txBody>
+          <a:bodyPr/>
+          <a:lstStyle/>
+          <a:p>
+            <a:r>
+              <a:rPr>
+                <a:solidFill>
+                  <a:srgbClr val="E8ECF4"/>
+                </a:solidFill>
+              </a:rPr>
+              <a:t>Meterless: the engine is load-bearing, the provider is honest</a:t>
+            </a:r>
+          </a:p>
+        </p:txBody>
+      </p:sp>
+      <p:sp>
+        <p:nvSpPr>
+          <p:cNvPr id="3" name="Content Placeholder 2"/>
+          <p:cNvSpPr>
+            <a:spLocks noGrp="1"/>
+          </p:cNvSpPr>
+          <p:nvPr>
+            <p:ph idx="1"/>
+          </p:nvPr>
+        </p:nvSpPr>
+        <p:spPr/>
+        <p:txBody>
+          <a:bodyPr/>
+          <a:lstStyle/>
+          <a:p>
+            <a:pPr/>
+            <a:r>
+              <a:rPr sz="1700">
+                <a:solidFill>
+                  <a:srgbClr val="DDE3EC"/>
+                </a:solidFill>
+              </a:rPr>
+              <a:t>World Model engine in app/world_model/ — immutable observation store, validated ingestion, context pinned to one exact run</a:t>
+            </a:r>
+          </a:p>
+          <a:p>
+            <a:pPr/>
+            <a:r>
+              <a:rPr sz="1700">
+                <a:solidFill>
+                  <a:srgbClr val="DDE3EC"/>
+                </a:solidFill>
+              </a:rPr>
+              <a:t>Scout and Skeptic both read through it; every finding carries the provenance of the observation behind it</a:t>
+            </a:r>
+          </a:p>
+          <a:p>
+            <a:pPr/>
+            <a:r>
+              <a:rPr sz="1700">
+                <a:solidFill>
+                  <a:srgbClr val="7DD3FC"/>
+                </a:solidFill>
+              </a:rPr>
+              <a:t>Acceptance is generated, not written: verify_world_model.py rebuilds the proof offline, with no credentials</a:t>
+            </a:r>
+          </a:p>
+          <a:p>
+            <a:pPr/>
+            <a:r>
+              <a:rPr sz="1700">
+                <a:solidFill>
+                  <a:srgbClr val="DDE3EC"/>
+                </a:solidFill>
+              </a:rPr>
+              <a:t>Nightshift is wired to the documented contract — bearer auth, /v1/models discovery, 60s budget, redirects refused — and contract-tested</a:t>
+            </a:r>
+          </a:p>
+          <a:p>
+            <a:pPr/>
+            <a:r>
+              <a:rPr sz="1700" i="1">
+                <a:solidFill>
+                  <a:srgbClr val="94A3B8"/>
+                </a:solidFill>
+              </a:rPr>
+              <a:t>Not yet live: the vendor's Mac build fails Gatekeeper and we did not bypass it, so the report says not_used</a:t>
+            </a:r>
+          </a:p>
+        </p:txBody>
+      </p:sp>
+    </p:spTree>
+  </p:cSld>
+  <p:clrMapOvr>
+    <a:masterClrMapping/>
+  </p:clrMapOvr>
+</p:sld>
+</file>
+
+<file path=ppt/slides/slide6.xml><?xml version="1.0" encoding="utf-8"?>
+<p:sld xmlns:a="http://schemas.openxmlformats.org/drawingml/2006/main" xmlns:p="http://schemas.openxmlformats.org/presentationml/2006/main" xmlns:r="http://schemas.openxmlformats.org/officeDocument/2006/relationships">
+  <p:cSld>
     <p:bg>
       <p:bgPr>
         <a:solidFill>
@@ -4773,7 +5012,7 @@
 </p:sld>
 </file>
 
-<file path=ppt/slides/slide6.xml><?xml version="1.0" encoding="utf-8"?>
+<file path=ppt/slides/slide7.xml><?xml version="1.0" encoding="utf-8"?>
 <p:sld xmlns:a="http://schemas.openxmlformats.org/drawingml/2006/main" xmlns:p="http://schemas.openxmlformats.org/presentationml/2006/main" xmlns:r="http://schemas.openxmlformats.org/officeDocument/2006/relationships">
   <p:cSld>
     <p:spTree>
@@ -5182,118 +5421,6 @@
 </p:sld>
 </file>
 
-<file path=ppt/slides/slide7.xml><?xml version="1.0" encoding="utf-8"?>
-<p:sld xmlns:a="http://schemas.openxmlformats.org/drawingml/2006/main" xmlns:p="http://schemas.openxmlformats.org/presentationml/2006/main" xmlns:r="http://schemas.openxmlformats.org/officeDocument/2006/relationships">
-  <p:cSld>
-    <p:bg>
-      <p:bgPr>
-        <a:solidFill>
-          <a:srgbClr val="151A23"/>
-        </a:solidFill>
-        <a:effectLst/>
-      </p:bgPr>
-    </p:bg>
-    <p:spTree>
-      <p:nvGrpSpPr>
-        <p:cNvPr id="1" name=""/>
-        <p:cNvGrpSpPr/>
-        <p:nvPr/>
-      </p:nvGrpSpPr>
-      <p:grpSpPr/>
-      <p:sp>
-        <p:nvSpPr>
-          <p:cNvPr id="2" name="Title 1"/>
-          <p:cNvSpPr>
-            <a:spLocks noGrp="1"/>
-          </p:cNvSpPr>
-          <p:nvPr>
-            <p:ph type="title"/>
-          </p:nvPr>
-        </p:nvSpPr>
-        <p:spPr/>
-        <p:txBody>
-          <a:bodyPr/>
-          <a:lstStyle/>
-          <a:p>
-            <a:r>
-              <a:rPr>
-                <a:solidFill>
-                  <a:srgbClr val="E8ECF4"/>
-                </a:solidFill>
-              </a:rPr>
-              <a:t>Our guard caught a supplier bug in production</a:t>
-            </a:r>
-          </a:p>
-        </p:txBody>
-      </p:sp>
-      <p:sp>
-        <p:nvSpPr>
-          <p:cNvPr id="3" name="Content Placeholder 2"/>
-          <p:cNvSpPr>
-            <a:spLocks noGrp="1"/>
-          </p:cNvSpPr>
-          <p:nvPr>
-            <p:ph idx="1"/>
-          </p:nvPr>
-        </p:nvSpPr>
-        <p:spPr/>
-        <p:txBody>
-          <a:bodyPr/>
-          <a:lstStyle/>
-          <a:p>
-            <a:pPr/>
-            <a:r>
-              <a:rPr sz="2000">
-                <a:solidFill>
-                  <a:srgbClr val="DDE3EC"/>
-                </a:solidFill>
-              </a:rPr>
-              <a:t>The live engine’s CSV parser silently truncates cells at embedded quotes — row counts and headers looked fine</a:t>
-            </a:r>
-          </a:p>
-          <a:p>
-            <a:pPr/>
-            <a:r>
-              <a:rPr sz="2000" b="1">
-                <a:solidFill>
-                  <a:srgbClr val="7DD3FC"/>
-                </a:solidFill>
-              </a:rPr>
-              <a:t>Our content-digest check rejected every fetch; the run degraded to fixture data honestly — no corrupted rule ever reached an agent</a:t>
-            </a:r>
-          </a:p>
-          <a:p>
-            <a:pPr/>
-            <a:r>
-              <a:rPr sz="2000">
-                <a:solidFill>
-                  <a:srgbClr val="DDE3EC"/>
-                </a:solidFill>
-              </a:rPr>
-              <a:t>Response: quote-safe re-export (digests unchanged), new immutable snapshots, v1 revoked and dropped, supplier defect report written up</a:t>
-            </a:r>
-          </a:p>
-          <a:p>
-            <a:pPr/>
-            <a:r>
-              <a:rPr sz="2000" i="1">
-                <a:solidFill>
-                  <a:srgbClr val="FBBF24"/>
-                </a:solidFill>
-              </a:rPr>
-              <a:t>“A connector’s happy path is not its contract — validate the payload after the wire, not just the status code.”</a:t>
-            </a:r>
-          </a:p>
-        </p:txBody>
-      </p:sp>
-    </p:spTree>
-  </p:cSld>
-  <p:clrMapOvr>
-    <a:masterClrMapping/>
-  </p:clrMapOvr>
-</p:sld>
-</file>
-
 <file path=ppt/slides/slide8.xml><?xml version="1.0" encoding="utf-8"?>
 <p:sld xmlns:a="http://schemas.openxmlformats.org/drawingml/2006/main" xmlns:p="http://schemas.openxmlformats.org/presentationml/2006/main" xmlns:r="http://schemas.openxmlformats.org/officeDocument/2006/relationships">
   <p:cSld>
@@ -5333,7 +5460,7 @@
                   <a:srgbClr val="E8ECF4"/>
                 </a:solidFill>
               </a:rPr>
-              <a:t>Measured, not promised</a:t>
+              <a:t>Our guard caught a supplier bug in production</a:t>
             </a:r>
           </a:p>
         </p:txBody>
@@ -5355,12 +5482,23 @@
           <a:p>
             <a:pPr/>
             <a:r>
+              <a:rPr sz="2000">
+                <a:solidFill>
+                  <a:srgbClr val="DDE3EC"/>
+                </a:solidFill>
+              </a:rPr>
+              <a:t>The live engine’s CSV parser silently truncates cells at embedded quotes — row counts and headers looked fine</a:t>
+            </a:r>
+          </a:p>
+          <a:p>
+            <a:pPr/>
+            <a:r>
               <a:rPr sz="2000" b="1">
                 <a:solidFill>
                   <a:srgbClr val="7DD3FC"/>
                 </a:solidFill>
               </a:rPr>
-              <a:t>3 curated scenarios: precision 1.0 · recall 1.0 · verdict accuracy 1.0 · deterministic</a:t>
+              <a:t>Our content-digest check rejected every fetch; the run degraded to fixture data honestly — no corrupted rule ever reached an agent</a:t>
             </a:r>
           </a:p>
           <a:p>
@@ -5371,40 +5509,18 @@
                   <a:srgbClr val="DDE3EC"/>
                 </a:solidFill>
               </a:rPr>
-              <a:t>10 held-out generated tenancies: same scores — and the generator exposed two real defects the curated set missed; both fixed, both now guarded by tests</a:t>
+              <a:t>Response: quote-safe re-export (digests unchanged), new immutable snapshots, v1 revoked and dropped, supplier defect report written up</a:t>
             </a:r>
           </a:p>
           <a:p>
             <a:pPr/>
             <a:r>
-              <a:rPr sz="2000">
-                <a:solidFill>
-                  <a:srgbClr val="DDE3EC"/>
+              <a:rPr sz="2000" i="1">
+                <a:solidFill>
+                  <a:srgbClr val="FBBF24"/>
                 </a:solidFill>
               </a:rPr>
-              <a:t>259 tests; sample-mode isolation enforced by blocking sockets and subprocess creation with sponsor vars present and absent</a:t>
-            </a:r>
-          </a:p>
-          <a:p>
-            <a:pPr/>
-            <a:r>
-              <a:rPr sz="2000">
-                <a:solidFill>
-                  <a:srgbClr val="DDE3EC"/>
-                </a:solidFill>
-              </a:rPr>
-              <a:t>Packaging verified from fresh clone, in containers on x86 and arm64, via POST /run — JSON in, JSON out, no UI needed</a:t>
-            </a:r>
-          </a:p>
-          <a:p>
-            <a:pPr/>
-            <a:r>
-              <a:rPr sz="2000">
-                <a:solidFill>
-                  <a:srgbClr val="94A3B8"/>
-                </a:solidFill>
-              </a:rPr>
-              <a:t>Every external call has a timeout; every loop has a cap; a run finishes in minutes</a:t>
+              <a:t>“A connector’s happy path is not its contract — validate the payload after the wire, not just the status code.”</a:t>
             </a:r>
           </a:p>
         </p:txBody>
@@ -5456,7 +5572,7 @@
                   <a:srgbClr val="E8ECF4"/>
                 </a:solidFill>
               </a:rPr>
-              <a:t>How it was built — attributed honestly</a:t>
+              <a:t>Measured, not promised</a:t>
             </a:r>
           </a:p>
         </p:txBody>
@@ -5478,12 +5594,23 @@
           <a:p>
             <a:pPr/>
             <a:r>
+              <a:rPr sz="2000" b="1">
+                <a:solidFill>
+                  <a:srgbClr val="7DD3FC"/>
+                </a:solidFill>
+              </a:rPr>
+              <a:t>3 curated scenarios: precision 1.0 · recall 1.0 · verdict accuracy 1.0 · deterministic</a:t>
+            </a:r>
+          </a:p>
+          <a:p>
+            <a:pPr/>
+            <a:r>
               <a:rPr sz="2000">
                 <a:solidFill>
                   <a:srgbClr val="DDE3EC"/>
                 </a:solidFill>
               </a:rPr>
-              <a:t>Cursor agent CLI drove Tasks 1–2 (session logs retained); free-tier quota exhausted mid-window — blocker posted to HackOS, the announced rule change captured</a:t>
+              <a:t>10 held-out generated tenancies: same scores — and the generator exposed two real defects the curated set missed; both fixed, both now guarded by tests</a:t>
             </a:r>
           </a:p>
           <a:p>
@@ -5494,7 +5621,7 @@
                   <a:srgbClr val="DDE3EC"/>
                 </a:solidFill>
               </a:rPr>
-              <a:t>Hermes agent drove Tasks 3–6 with TDD throughout; per-task attribution lives in the committed build log</a:t>
+              <a:t>456 tests; sample-mode isolation enforced by blocking sockets and subprocess creation with sponsor vars present and absent</a:t>
             </a:r>
           </a:p>
           <a:p>
@@ -5502,32 +5629,21 @@
             <a:r>
               <a:rPr sz="2000">
                 <a:solidFill>
+                  <a:srgbClr val="DDE3EC"/>
+                </a:solidFill>
+              </a:rPr>
+              <a:t>Packaging verified from fresh clone, in containers on x86 and arm64, via POST /run — JSON in, JSON out, no UI needed</a:t>
+            </a:r>
+          </a:p>
+          <a:p>
+            <a:pPr/>
+            <a:r>
+              <a:rPr sz="2000">
+                <a:solidFill>
                   <a:srgbClr val="94A3B8"/>
                 </a:solidFill>
               </a:rPr>
-              <a:t>Every mutating step on the live Zetaris instance went through a dry-run approval package first — recorded in decisions.md</a:t>
-            </a:r>
-          </a:p>
-          <a:p>
-            <a:pPr/>
-            <a:r>
-              <a:rPr sz="2000">
-                <a:solidFill>
-                  <a:srgbClr val="DDE3EC"/>
-                </a:solidFill>
-              </a:rPr>
-              <a:t>NVIDIA: model path is provider-agnostic (OpenAI-compatible, Nemotron-capable endpoints unconfirmed) — stated as-is</a:t>
-            </a:r>
-          </a:p>
-          <a:p>
-            <a:pPr/>
-            <a:r>
-              <a:rPr sz="2000">
-                <a:solidFill>
-                  <a:srgbClr val="DDE3EC"/>
-                </a:solidFill>
-              </a:rPr>
-              <a:t>Meterless: honestly unmounted; the bounded loop implements the same discipline the engine specs describe</a:t>
+              <a:t>Every external call has a timeout; every loop has a cap; a run finishes in minutes</a:t>
             </a:r>
           </a:p>
         </p:txBody>

--- a/docs/demo/driftwatch-deck.pptx
+++ b/docs/demo/driftwatch-deck.pptx
@@ -9,13 +9,13 @@
     <p:sldId id="257" r:id="rId9"/>
     <p:sldId id="258" r:id="rId10"/>
     <p:sldId id="259" r:id="rId11"/>
-    <p:sldId id="266" r:id="rId18"/>
     <p:sldId id="260" r:id="rId12"/>
     <p:sldId id="261" r:id="rId13"/>
     <p:sldId id="262" r:id="rId14"/>
     <p:sldId id="263" r:id="rId15"/>
     <p:sldId id="264" r:id="rId16"/>
     <p:sldId id="265" r:id="rId17"/>
+    <p:sldId id="266" r:id="rId18"/>
   </p:sldIdLst>
   <p:sldSz cx="12191695" cy="6858000" type="screen4x3"/>
   <p:notesSz cx="6858000" cy="9144000"/>
@@ -512,7 +512,7 @@
           <a:lstStyle/>
           <a:p>
             <a:r>
-              <a:t>One-liner: an agent that audits an OCI tenancy for cost waste and shadow infrastructure — and can prove, line by line, how every verdict was reached. Everything in this deck is backed by committed artifacts in the repo.</a:t>
+              <a:t>Driftwatch audits an OCI tenancy for cost waste and shadow infrastructure. Four agents, one bounded loop, and every artefact comes out of the run itself.</a:t>
             </a:r>
           </a:p>
         </p:txBody>
@@ -582,7 +582,77 @@
           <a:lstStyle/>
           <a:p>
             <a:r>
-              <a:t>Closing beat: the judges' own reproducibility is part of the product. Point to output_examples/zetaris_acceptance_2026-10-22/ if asked 'did the sponsor integration actually do anything?' — acceptance.json answers with computed diffs.</a:t>
+              <a:t>Attribution is a rule, not a courtesy. This slide lists what each tool actually did.</a:t>
+            </a:r>
+          </a:p>
+        </p:txBody>
+      </p:sp>
+      <p:sp>
+        <p:nvSpPr>
+          <p:cNvPr id="4" name="Slide Number Placeholder 3"/>
+          <p:cNvSpPr>
+            <a:spLocks noGrp="1"/>
+          </p:cNvSpPr>
+          <p:nvPr>
+            <p:ph type="sldNum" idx="5" sz="quarter"/>
+          </p:nvPr>
+        </p:nvSpPr>
+        <p:spPr/>
+      </p:sp>
+    </p:spTree>
+  </p:cSld>
+  <p:clrMapOvr>
+    <a:masterClrMapping/>
+  </p:clrMapOvr>
+</p:notes>
+</file>
+
+<file path=ppt/notesSlides/notesSlide11.xml><?xml version="1.0" encoding="utf-8"?>
+<p:notes xmlns:a="http://schemas.openxmlformats.org/drawingml/2006/main" xmlns:p="http://schemas.openxmlformats.org/presentationml/2006/main" xmlns:r="http://schemas.openxmlformats.org/officeDocument/2006/relationships">
+  <p:cSld>
+    <p:spTree>
+      <p:nvGrpSpPr>
+        <p:cNvPr id="1" name=""/>
+        <p:cNvGrpSpPr/>
+        <p:nvPr/>
+      </p:nvGrpSpPr>
+      <p:grpSpPr>
+        <a:xfrm>
+          <a:off x="0" y="0"/>
+          <a:ext cx="0" cy="0"/>
+          <a:chOff x="0" y="0"/>
+          <a:chExt cx="0" cy="0"/>
+        </a:xfrm>
+      </p:grpSpPr>
+      <p:sp>
+        <p:nvSpPr>
+          <p:cNvPr id="2" name="Slide Image Placeholder 1"/>
+          <p:cNvSpPr>
+            <a:spLocks noGrp="1"/>
+          </p:cNvSpPr>
+          <p:nvPr>
+            <p:ph type="sldImg" idx="2"/>
+          </p:nvPr>
+        </p:nvSpPr>
+        <p:spPr/>
+      </p:sp>
+      <p:sp>
+        <p:nvSpPr>
+          <p:cNvPr id="3" name="Notes Placeholder 2"/>
+          <p:cNvSpPr>
+            <a:spLocks noGrp="1"/>
+          </p:cNvSpPr>
+          <p:nvPr>
+            <p:ph type="body" idx="3" sz="quarter"/>
+          </p:nvPr>
+        </p:nvSpPr>
+        <p:spPr/>
+        <p:txBody>
+          <a:bodyPr/>
+          <a:lstStyle/>
+          <a:p>
+            <a:r>
+              <a:t>A judge can clone and run this in two commands. Nothing installs at run time.</a:t>
             </a:r>
           </a:p>
         </p:txBody>
@@ -652,7 +722,7 @@
           <a:lstStyle/>
           <a:p>
             <a:r>
-              <a:t>Set up the stakes. Cost waste is a money problem; unattributed infra is a security problem; unprovable reasoning is a trust problem. Driftwatch attacks all three in one loop.</a:t>
+              <a:t>The pitch is not 'an LLM reads your cloud bill'. It is auditability: every claim traceable to a source, and a critique step that can throw a finding away.</a:t>
             </a:r>
           </a:p>
         </p:txBody>
@@ -722,7 +792,7 @@
           <a:lstStyle/>
           <a:p>
             <a:r>
-              <a:t>Why hand-rolled: the loop is the thesis, not plumbing. The bounds are load-bearing: capped agent loops are the #1 defence against a hung run in front of a judge.</a:t>
+              <a:t>The loop is deliberately boring: four names, explicit handoffs, hard caps. Everything it does is in the trace.</a:t>
             </a:r>
           </a:p>
         </p:txBody>
@@ -792,7 +862,7 @@
           <a:lstStyle/>
           <a:p>
             <a:r>
-              <a:t>This is the required integration, and it is load-bearing: the rules that drive findings come FROM Zetaris, verified through transport. The runbook is in docs/zetaris-policy-operations.md with a full execution record.</a:t>
+              <a:t>Zetaris is the governed-data seam. The causal proof: removing one rule removes exactly the one finding that rule produced.</a:t>
             </a:r>
           </a:p>
         </p:txBody>
@@ -862,7 +932,7 @@
           <a:lstStyle/>
           <a:p>
             <a:r>
-              <a:t>The strongest one-slide proof of the sponsor integration.</a:t>
+              <a:t>This is the part a judge can verify without any sponsor credentials: run the script, read the acceptance JSON.</a:t>
             </a:r>
           </a:p>
         </p:txBody>
@@ -932,7 +1002,7 @@
           <a:lstStyle/>
           <a:p>
             <a:r>
-              <a:t>We republished the policy WITHOUT rule R-1 as a new immutable snapshot and ran the identical audit. Exactly one finding disappeared — the one R-1 produces — and nothing else moved, computed through the full loop with provider=zetaris lineage in the trace. The right half is the real terminal frame from the committed acceptance run.</a:t>
+              <a:t>This slide is deliberately unflattering. A configured provider with zero attempts is not an integration success, and the report says so.</a:t>
             </a:r>
           </a:p>
         </p:txBody>
@@ -1002,7 +1072,7 @@
           <a:lstStyle/>
           <a:p>
             <a:r>
-              <a:t>Judges should note the sequence: capability probe first (ephemeral session table), permanent registration only after, validation after transport, degradation labeled in the report. Found on day one of the live run; notes/zetaris-engine-defects-2026-10-22.md.</a:t>
+              <a:t>Two runs, one rule removed. The delta is one finding, and the guards are shown failing closed rather than silently succeeding.</a:t>
             </a:r>
           </a:p>
         </p:txBody>
@@ -1072,7 +1142,7 @@
           <a:lstStyle/>
           <a:p>
             <a:r>
-              <a:t>The held-out generator matters most: hand-written tests only measure how well you predicted yourself. Seeded generation samples the space — and earned its keep immediately.</a:t>
+              <a:t>This is the credibility slide: the guard that was built to catch our own bad data caught the vendor's.</a:t>
             </a:r>
           </a:p>
         </p:txBody>
@@ -1142,7 +1212,7 @@
           <a:lstStyle/>
           <a:p>
             <a:r>
-              <a:t>A hackathon with mandatory tooling and a dead quota is still an honesty test. The build log says exactly who did what — that transparency is itself an AI-usage-policy answer.</a:t>
+              <a:t>Numbers on a slide are cheap. These are the ones the repo can reproduce, including the two defects the held-out generator found.</a:t>
             </a:r>
           </a:p>
         </p:txBody>
@@ -4144,7 +4214,7 @@
     <p:bg>
       <p:bgPr>
         <a:solidFill>
-          <a:srgbClr val="0F1219"/>
+          <a:srgbClr val="14161C"/>
         </a:solidFill>
         <a:effectLst/>
       </p:bgPr>
@@ -4158,24 +4228,76 @@
       <p:grpSpPr/>
       <p:sp>
         <p:nvSpPr>
-          <p:cNvPr id="2" name="Title 1"/>
-          <p:cNvSpPr>
-            <a:spLocks noGrp="1"/>
-          </p:cNvSpPr>
-          <p:nvPr>
-            <p:ph type="ctrTitle"/>
-          </p:nvPr>
-        </p:nvSpPr>
-        <p:spPr/>
-        <p:txBody>
-          <a:bodyPr/>
-          <a:lstStyle/>
-          <a:p>
-            <a:r>
-              <a:rPr>
-                <a:solidFill>
-                  <a:srgbClr val="E8ECF4"/>
-                </a:solidFill>
+          <p:cNvPr id="2" name="TextBox 1"/>
+          <p:cNvSpPr txBox="1"/>
+          <p:nvPr/>
+        </p:nvSpPr>
+        <p:spPr>
+          <a:xfrm>
+            <a:off x="914400" y="1417320"/>
+            <a:ext cx="8778240" cy="320040"/>
+          </a:xfrm>
+          <a:prstGeom prst="rect">
+            <a:avLst/>
+          </a:prstGeom>
+          <a:noFill/>
+        </p:spPr>
+        <p:txBody>
+          <a:bodyPr wrap="square" anchor="t" lIns="0" rIns="0" tIns="0" bIns="0">
+            <a:spAutoFit/>
+          </a:bodyPr>
+          <a:lstStyle/>
+          <a:p>
+            <a:pPr algn="l">
+              <a:lnSpc>
+                <a:spcPct val="118000"/>
+              </a:lnSpc>
+            </a:pPr>
+            <a:r>
+              <a:rPr sz="1100" b="1">
+                <a:solidFill>
+                  <a:srgbClr val="4FD1C5"/>
+                </a:solidFill>
+                <a:latin typeface="Arial"/>
+              </a:rPr>
+              <a:t>OPEN AGENT HACKATHON 2026  ·  WILDCARD [TINKERER]</a:t>
+            </a:r>
+          </a:p>
+        </p:txBody>
+      </p:sp>
+      <p:sp>
+        <p:nvSpPr>
+          <p:cNvPr id="3" name="TextBox 2"/>
+          <p:cNvSpPr txBox="1"/>
+          <p:nvPr/>
+        </p:nvSpPr>
+        <p:spPr>
+          <a:xfrm>
+            <a:off x="914400" y="1847088"/>
+            <a:ext cx="10058400" cy="1097280"/>
+          </a:xfrm>
+          <a:prstGeom prst="rect">
+            <a:avLst/>
+          </a:prstGeom>
+          <a:noFill/>
+        </p:spPr>
+        <p:txBody>
+          <a:bodyPr wrap="square" anchor="t" lIns="0" rIns="0" tIns="0" bIns="0">
+            <a:spAutoFit/>
+          </a:bodyPr>
+          <a:lstStyle/>
+          <a:p>
+            <a:pPr algn="l">
+              <a:lnSpc>
+                <a:spcPct val="95000"/>
+              </a:lnSpc>
+            </a:pPr>
+            <a:r>
+              <a:rPr sz="6400" b="1">
+                <a:solidFill>
+                  <a:srgbClr val="EDEFF4"/>
+                </a:solidFill>
+                <a:latin typeface="Arial"/>
               </a:rPr>
               <a:t>Driftwatch</a:t>
             </a:r>
@@ -4184,46 +4306,208 @@
       </p:sp>
       <p:sp>
         <p:nvSpPr>
-          <p:cNvPr id="3" name="Subtitle 2"/>
-          <p:cNvSpPr>
-            <a:spLocks noGrp="1"/>
-          </p:cNvSpPr>
-          <p:nvPr>
-            <p:ph type="subTitle" idx="1"/>
-          </p:nvPr>
-        </p:nvSpPr>
-        <p:spPr/>
-        <p:txBody>
-          <a:bodyPr/>
-          <a:lstStyle/>
-          <a:p>
-            <a:r>
-              <a:rPr>
-                <a:solidFill>
-                  <a:srgbClr val="E8ECF4"/>
-                </a:solidFill>
-              </a:rPr>
-              <a:t>The cloud-audit agent that shows its work</a:t>
-            </a:r>
-          </a:p>
-          <a:p>
-            <a:r>
-              <a:rPr>
-                <a:solidFill>
-                  <a:srgbClr val="E8ECF4"/>
-                </a:solidFill>
-              </a:rPr>
-              <a:t>Evidence lineage · adversarial critique · a live sponsor data plane</a:t>
-            </a:r>
-          </a:p>
-          <a:p>
-            <a:r>
-              <a:rPr>
-                <a:solidFill>
-                  <a:srgbClr val="E8ECF4"/>
-                </a:solidFill>
-              </a:rPr>
-              <a:t>Open Agent Hackathon 2026 · Wildcard [Tinkerer] · solo build</a:t>
+          <p:cNvPr id="4" name="TextBox 3"/>
+          <p:cNvSpPr txBox="1"/>
+          <p:nvPr/>
+        </p:nvSpPr>
+        <p:spPr>
+          <a:xfrm>
+            <a:off x="914400" y="3035808"/>
+            <a:ext cx="8961120" cy="822960"/>
+          </a:xfrm>
+          <a:prstGeom prst="rect">
+            <a:avLst/>
+          </a:prstGeom>
+          <a:noFill/>
+        </p:spPr>
+        <p:txBody>
+          <a:bodyPr wrap="square" anchor="t" lIns="0" rIns="0" tIns="0" bIns="0">
+            <a:spAutoFit/>
+          </a:bodyPr>
+          <a:lstStyle/>
+          <a:p>
+            <a:pPr algn="l">
+              <a:lnSpc>
+                <a:spcPct val="115000"/>
+              </a:lnSpc>
+            </a:pPr>
+            <a:r>
+              <a:rPr sz="2500" b="0">
+                <a:solidFill>
+                  <a:srgbClr val="EDEFF4"/>
+                </a:solidFill>
+                <a:latin typeface="Arial"/>
+              </a:rPr>
+              <a:t>An OCI tenancy auditor that argues with itself</a:t>
+            </a:r>
+          </a:p>
+        </p:txBody>
+      </p:sp>
+      <p:sp>
+        <p:nvSpPr>
+          <p:cNvPr id="5" name="TextBox 4"/>
+          <p:cNvSpPr txBox="1"/>
+          <p:nvPr/>
+        </p:nvSpPr>
+        <p:spPr>
+          <a:xfrm>
+            <a:off x="914400" y="3913632"/>
+            <a:ext cx="8961120" cy="548640"/>
+          </a:xfrm>
+          <a:prstGeom prst="rect">
+            <a:avLst/>
+          </a:prstGeom>
+          <a:noFill/>
+        </p:spPr>
+        <p:txBody>
+          <a:bodyPr wrap="square" anchor="t" lIns="0" rIns="0" tIns="0" bIns="0">
+            <a:spAutoFit/>
+          </a:bodyPr>
+          <a:lstStyle/>
+          <a:p>
+            <a:pPr algn="l">
+              <a:lnSpc>
+                <a:spcPct val="118000"/>
+              </a:lnSpc>
+            </a:pPr>
+            <a:r>
+              <a:rPr sz="1400" b="0">
+                <a:solidFill>
+                  <a:srgbClr val="9BA6B8"/>
+                </a:solidFill>
+                <a:latin typeface="Arial"/>
+              </a:rPr>
+              <a:t>Evidence lineage  ·  adversarial critique  ·  a live sponsor data plane</a:t>
+            </a:r>
+          </a:p>
+        </p:txBody>
+      </p:sp>
+      <p:cxnSp>
+        <p:nvCxnSpPr>
+          <p:cNvPr id="6" name="Connector 5"/>
+          <p:cNvCxnSpPr/>
+          <p:nvPr/>
+        </p:nvCxnSpPr>
+        <p:spPr>
+          <a:xfrm>
+            <a:off x="914400" y="4892040"/>
+            <a:ext cx="10362895" cy="0"/>
+          </a:xfrm>
+          <a:prstGeom prst="line">
+            <a:avLst/>
+          </a:prstGeom>
+          <a:ln w="12700">
+            <a:solidFill>
+              <a:srgbClr val="2A3040"/>
+            </a:solidFill>
+          </a:ln>
+        </p:spPr>
+        <p:style>
+          <a:lnRef idx="2">
+            <a:schemeClr val="accent1"/>
+          </a:lnRef>
+          <a:fillRef idx="0">
+            <a:schemeClr val="accent1"/>
+          </a:fillRef>
+          <a:effectRef idx="1">
+            <a:schemeClr val="accent1"/>
+          </a:effectRef>
+          <a:fontRef idx="minor">
+            <a:schemeClr val="tx1"/>
+          </a:fontRef>
+        </p:style>
+      </p:cxnSp>
+      <p:sp>
+        <p:nvSpPr>
+          <p:cNvPr id="7" name="TextBox 6"/>
+          <p:cNvSpPr txBox="1"/>
+          <p:nvPr/>
+        </p:nvSpPr>
+        <p:spPr>
+          <a:xfrm>
+            <a:off x="914400" y="5102352"/>
+            <a:ext cx="5852160" cy="1097280"/>
+          </a:xfrm>
+          <a:prstGeom prst="rect">
+            <a:avLst/>
+          </a:prstGeom>
+          <a:noFill/>
+        </p:spPr>
+        <p:txBody>
+          <a:bodyPr wrap="square" anchor="t" lIns="0" rIns="0" tIns="0" bIns="0">
+            <a:spAutoFit/>
+          </a:bodyPr>
+          <a:lstStyle/>
+          <a:p>
+            <a:pPr algn="l">
+              <a:lnSpc>
+                <a:spcPct val="135000"/>
+              </a:lnSpc>
+            </a:pPr>
+            <a:r>
+              <a:rPr sz="1300" b="0">
+                <a:solidFill>
+                  <a:srgbClr val="9BA6B8"/>
+                </a:solidFill>
+                <a:latin typeface="Arial"/>
+              </a:rPr>
+              <a:t>Four agents, one bounded loop. Every finding carries the evidence
+that produced it — and can be retracted when the evidence disagrees.</a:t>
+            </a:r>
+          </a:p>
+        </p:txBody>
+      </p:sp>
+      <p:sp>
+        <p:nvSpPr>
+          <p:cNvPr id="8" name="TextBox 7"/>
+          <p:cNvSpPr txBox="1"/>
+          <p:nvPr/>
+        </p:nvSpPr>
+        <p:spPr>
+          <a:xfrm>
+            <a:off x="8442655" y="5102352"/>
+            <a:ext cx="2834640" cy="1097280"/>
+          </a:xfrm>
+          <a:prstGeom prst="rect">
+            <a:avLst/>
+          </a:prstGeom>
+          <a:noFill/>
+        </p:spPr>
+        <p:txBody>
+          <a:bodyPr wrap="square" anchor="t" lIns="0" rIns="0" tIns="0" bIns="0">
+            <a:spAutoFit/>
+          </a:bodyPr>
+          <a:lstStyle/>
+          <a:p>
+            <a:pPr algn="r">
+              <a:lnSpc>
+                <a:spcPct val="135000"/>
+              </a:lnSpc>
+            </a:pPr>
+            <a:r>
+              <a:rPr sz="1300" b="0">
+                <a:solidFill>
+                  <a:srgbClr val="9BA6B8"/>
+                </a:solidFill>
+                <a:latin typeface="Arial"/>
+              </a:rPr>
+              <a:t>solo build</a:t>
+            </a:r>
+          </a:p>
+          <a:p>
+            <a:pPr algn="r">
+              <a:lnSpc>
+                <a:spcPct val="135000"/>
+              </a:lnSpc>
+            </a:pPr>
+            <a:r>
+              <a:rPr sz="1300" b="0">
+                <a:solidFill>
+                  <a:srgbClr val="9BA6B8"/>
+                </a:solidFill>
+                <a:latin typeface="Arial"/>
+              </a:rPr>
+              <a:t>Zetaris + Meterless</a:t>
             </a:r>
           </a:p>
         </p:txBody>
@@ -4242,7 +4526,7 @@
     <p:bg>
       <p:bgPr>
         <a:solidFill>
-          <a:srgbClr val="151A23"/>
+          <a:srgbClr val="14161C"/>
         </a:solidFill>
         <a:effectLst/>
       </p:bgPr>
@@ -4256,97 +4540,298 @@
       <p:grpSpPr/>
       <p:sp>
         <p:nvSpPr>
-          <p:cNvPr id="2" name="Title 1"/>
-          <p:cNvSpPr>
-            <a:spLocks noGrp="1"/>
-          </p:cNvSpPr>
-          <p:nvPr>
-            <p:ph type="title"/>
-          </p:nvPr>
-        </p:nvSpPr>
-        <p:spPr/>
-        <p:txBody>
-          <a:bodyPr/>
-          <a:lstStyle/>
-          <a:p>
-            <a:r>
-              <a:rPr>
-                <a:solidFill>
-                  <a:srgbClr val="E8ECF4"/>
-                </a:solidFill>
+          <p:cNvPr id="2" name="TextBox 1"/>
+          <p:cNvSpPr txBox="1"/>
+          <p:nvPr/>
+        </p:nvSpPr>
+        <p:spPr>
+          <a:xfrm>
+            <a:off x="914400" y="420624"/>
+            <a:ext cx="10362895" cy="274320"/>
+          </a:xfrm>
+          <a:prstGeom prst="rect">
+            <a:avLst/>
+          </a:prstGeom>
+          <a:noFill/>
+        </p:spPr>
+        <p:txBody>
+          <a:bodyPr wrap="square" anchor="t" lIns="0" rIns="0" tIns="0" bIns="0">
+            <a:spAutoFit/>
+          </a:bodyPr>
+          <a:lstStyle/>
+          <a:p>
+            <a:pPr algn="l">
+              <a:lnSpc>
+                <a:spcPct val="118000"/>
+              </a:lnSpc>
+            </a:pPr>
+            <a:r>
+              <a:rPr sz="1050" b="1">
+                <a:solidFill>
+                  <a:srgbClr val="4FD1C5"/>
+                </a:solidFill>
+                <a:latin typeface="Arial"/>
+              </a:rPr>
+              <a:t>DISCLOSURE</a:t>
+            </a:r>
+          </a:p>
+        </p:txBody>
+      </p:sp>
+      <p:sp>
+        <p:nvSpPr>
+          <p:cNvPr id="3" name="TextBox 2"/>
+          <p:cNvSpPr txBox="1"/>
+          <p:nvPr/>
+        </p:nvSpPr>
+        <p:spPr>
+          <a:xfrm>
+            <a:off x="914400" y="713232"/>
+            <a:ext cx="10362895" cy="914400"/>
+          </a:xfrm>
+          <a:prstGeom prst="rect">
+            <a:avLst/>
+          </a:prstGeom>
+          <a:noFill/>
+        </p:spPr>
+        <p:txBody>
+          <a:bodyPr wrap="square" anchor="t" lIns="0" rIns="0" tIns="0" bIns="0">
+            <a:spAutoFit/>
+          </a:bodyPr>
+          <a:lstStyle/>
+          <a:p>
+            <a:pPr algn="l">
+              <a:lnSpc>
+                <a:spcPct val="105000"/>
+              </a:lnSpc>
+            </a:pPr>
+            <a:r>
+              <a:rPr sz="2900" b="1">
+                <a:solidFill>
+                  <a:srgbClr val="EDEFF4"/>
+                </a:solidFill>
+                <a:latin typeface="Arial"/>
               </a:rPr>
               <a:t>How it was built — attributed honestly</a:t>
             </a:r>
           </a:p>
         </p:txBody>
       </p:sp>
-      <p:sp>
-        <p:nvSpPr>
-          <p:cNvPr id="3" name="Content Placeholder 2"/>
-          <p:cNvSpPr>
-            <a:spLocks noGrp="1"/>
-          </p:cNvSpPr>
-          <p:nvPr>
-            <p:ph idx="1"/>
-          </p:nvPr>
-        </p:nvSpPr>
-        <p:spPr/>
-        <p:txBody>
-          <a:bodyPr/>
-          <a:lstStyle/>
-          <a:p>
-            <a:pPr/>
-            <a:r>
-              <a:rPr sz="2000">
-                <a:solidFill>
-                  <a:srgbClr val="DDE3EC"/>
-                </a:solidFill>
-              </a:rPr>
-              <a:t>Cursor agent CLI drove Tasks 1–2 (session logs retained); free-tier quota exhausted mid-window — blocker posted to HackOS, the announced rule change captured</a:t>
-            </a:r>
-          </a:p>
-          <a:p>
-            <a:pPr/>
-            <a:r>
-              <a:rPr sz="2000">
-                <a:solidFill>
-                  <a:srgbClr val="DDE3EC"/>
-                </a:solidFill>
-              </a:rPr>
-              <a:t>Hermes agent drove Tasks 3–6 with TDD throughout; per-task attribution lives in the committed build log</a:t>
-            </a:r>
-          </a:p>
-          <a:p>
-            <a:pPr/>
-            <a:r>
-              <a:rPr sz="2000">
-                <a:solidFill>
-                  <a:srgbClr val="94A3B8"/>
-                </a:solidFill>
-              </a:rPr>
-              <a:t>Every mutating step on the live Zetaris instance went through a dry-run approval package first — recorded in decisions.md</a:t>
-            </a:r>
-          </a:p>
-          <a:p>
-            <a:pPr/>
-            <a:r>
-              <a:rPr sz="2000">
-                <a:solidFill>
-                  <a:srgbClr val="DDE3EC"/>
-                </a:solidFill>
-              </a:rPr>
-              <a:t>NVIDIA: model path is provider-agnostic (OpenAI-compatible, Nemotron-capable endpoints unconfirmed) — stated as-is</a:t>
-            </a:r>
-          </a:p>
-          <a:p>
-            <a:pPr/>
-            <a:r>
-              <a:rPr sz="2000">
-                <a:solidFill>
-                  <a:srgbClr val="DDE3EC"/>
-                </a:solidFill>
-              </a:rPr>
-              <a:t>Meterless: World Model engine implemented in app/world_model/ and consumed by Scout and Skeptic, with generated offline acceptance; Nightshift provider implemented and contract-tested, never served a live request (vendor Mac build fails Gatekeeper) — stated as-is</a:t>
+      <p:cxnSp>
+        <p:nvCxnSpPr>
+          <p:cNvPr id="4" name="Connector 3"/>
+          <p:cNvCxnSpPr/>
+          <p:nvPr/>
+        </p:nvCxnSpPr>
+        <p:spPr>
+          <a:xfrm>
+            <a:off x="914400" y="1627632"/>
+            <a:ext cx="1371600" cy="0"/>
+          </a:xfrm>
+          <a:prstGeom prst="line">
+            <a:avLst/>
+          </a:prstGeom>
+          <a:ln w="31750">
+            <a:solidFill>
+              <a:srgbClr val="4FD1C5"/>
+            </a:solidFill>
+          </a:ln>
+        </p:spPr>
+        <p:style>
+          <a:lnRef idx="2">
+            <a:schemeClr val="accent1"/>
+          </a:lnRef>
+          <a:fillRef idx="0">
+            <a:schemeClr val="accent1"/>
+          </a:fillRef>
+          <a:effectRef idx="1">
+            <a:schemeClr val="accent1"/>
+          </a:effectRef>
+          <a:fontRef idx="minor">
+            <a:schemeClr val="tx1"/>
+          </a:fontRef>
+        </p:style>
+      </p:cxnSp>
+      <p:sp>
+        <p:nvSpPr>
+          <p:cNvPr id="5" name="TextBox 4"/>
+          <p:cNvSpPr txBox="1"/>
+          <p:nvPr/>
+        </p:nvSpPr>
+        <p:spPr>
+          <a:xfrm>
+            <a:off x="914400" y="6291072"/>
+            <a:ext cx="7315200" cy="256032"/>
+          </a:xfrm>
+          <a:prstGeom prst="rect">
+            <a:avLst/>
+          </a:prstGeom>
+          <a:noFill/>
+        </p:spPr>
+        <p:txBody>
+          <a:bodyPr wrap="square" anchor="t" lIns="0" rIns="0" tIns="0" bIns="0">
+            <a:spAutoFit/>
+          </a:bodyPr>
+          <a:lstStyle/>
+          <a:p>
+            <a:pPr algn="l">
+              <a:lnSpc>
+                <a:spcPct val="118000"/>
+              </a:lnSpc>
+            </a:pPr>
+            <a:r>
+              <a:rPr sz="900" b="0">
+                <a:solidFill>
+                  <a:srgbClr val="9BA6B8"/>
+                </a:solidFill>
+                <a:latin typeface="Arial"/>
+              </a:rPr>
+              <a:t>Driftwatch  ·  Open Agent Hackathon 2026  ·  Wildcard [Tinkerer]</a:t>
+            </a:r>
+          </a:p>
+        </p:txBody>
+      </p:sp>
+      <p:sp>
+        <p:nvSpPr>
+          <p:cNvPr id="6" name="TextBox 5"/>
+          <p:cNvSpPr txBox="1"/>
+          <p:nvPr/>
+        </p:nvSpPr>
+        <p:spPr>
+          <a:xfrm>
+            <a:off x="10728655" y="6291072"/>
+            <a:ext cx="548640" cy="256032"/>
+          </a:xfrm>
+          <a:prstGeom prst="rect">
+            <a:avLst/>
+          </a:prstGeom>
+          <a:noFill/>
+        </p:spPr>
+        <p:txBody>
+          <a:bodyPr wrap="square" anchor="t" lIns="0" rIns="0" tIns="0" bIns="0">
+            <a:spAutoFit/>
+          </a:bodyPr>
+          <a:lstStyle/>
+          <a:p>
+            <a:pPr algn="r">
+              <a:lnSpc>
+                <a:spcPct val="118000"/>
+              </a:lnSpc>
+            </a:pPr>
+            <a:r>
+              <a:rPr sz="900" b="0">
+                <a:solidFill>
+                  <a:srgbClr val="9BA6B8"/>
+                </a:solidFill>
+                <a:latin typeface="Arial"/>
+              </a:rPr>
+              <a:t>10</a:t>
+            </a:r>
+          </a:p>
+        </p:txBody>
+      </p:sp>
+      <p:sp>
+        <p:nvSpPr>
+          <p:cNvPr id="7" name="TextBox 6"/>
+          <p:cNvSpPr txBox="1"/>
+          <p:nvPr/>
+        </p:nvSpPr>
+        <p:spPr>
+          <a:xfrm>
+            <a:off x="914400" y="1874519"/>
+            <a:ext cx="10362895" cy="4114800"/>
+          </a:xfrm>
+          <a:prstGeom prst="rect">
+            <a:avLst/>
+          </a:prstGeom>
+          <a:noFill/>
+        </p:spPr>
+        <p:txBody>
+          <a:bodyPr wrap="square" anchor="ctr" lIns="0" rIns="0" tIns="0" bIns="0">
+            <a:spAutoFit/>
+          </a:bodyPr>
+          <a:lstStyle/>
+          <a:p>
+            <a:pPr algn="l" marL="274320" indent="-274320">
+              <a:lnSpc>
+                <a:spcPct val="122000"/>
+              </a:lnSpc>
+              <a:spcAft>
+                <a:spcPts val="1300"/>
+              </a:spcAft>
+              <a:buFont typeface="Arial"/>
+              <a:buChar char="—"/>
+            </a:pPr>
+            <a:r>
+              <a:rPr sz="1700" b="0">
+                <a:solidFill>
+                  <a:srgbClr val="EDEFF4"/>
+                </a:solidFill>
+                <a:latin typeface="Arial"/>
+              </a:rPr>
+              <a:t>Cursor drove the first two tasks before its free-tier quota ran out; the blocker was posted and the sessions are retained.</a:t>
+            </a:r>
+          </a:p>
+          <a:p>
+            <a:pPr algn="l" marL="274320" indent="-274320">
+              <a:lnSpc>
+                <a:spcPct val="122000"/>
+              </a:lnSpc>
+              <a:spcAft>
+                <a:spcPts val="1300"/>
+              </a:spcAft>
+              <a:buFont typeface="Arial"/>
+              <a:buChar char="—"/>
+            </a:pPr>
+            <a:r>
+              <a:rPr sz="1700" b="0">
+                <a:solidFill>
+                  <a:srgbClr val="EDEFF4"/>
+                </a:solidFill>
+                <a:latin typeface="Arial"/>
+              </a:rPr>
+              <a:t>Hermes drove the remaining tasks with tests first; per-task attribution lives in the committed build log.</a:t>
+            </a:r>
+          </a:p>
+          <a:p>
+            <a:pPr algn="l" marL="274320" indent="-274320">
+              <a:lnSpc>
+                <a:spcPct val="122000"/>
+              </a:lnSpc>
+              <a:spcAft>
+                <a:spcPts val="1300"/>
+              </a:spcAft>
+              <a:buFont typeface="Arial"/>
+              <a:buChar char="—"/>
+            </a:pPr>
+            <a:r>
+              <a:rPr sz="1700" b="0">
+                <a:solidFill>
+                  <a:srgbClr val="EDEFF4"/>
+                </a:solidFill>
+                <a:latin typeface="Arial"/>
+              </a:rPr>
+              <a:t>Every mutating step on the live Zetaris instance went through a dry-run approval package first — recorded in decisions.md.</a:t>
+            </a:r>
+          </a:p>
+          <a:p>
+            <a:pPr algn="l" marL="274320" indent="-274320">
+              <a:lnSpc>
+                <a:spcPct val="122000"/>
+              </a:lnSpc>
+              <a:spcAft>
+                <a:spcPts val="1300"/>
+              </a:spcAft>
+              <a:buFont typeface="Arial"/>
+              <a:buChar char="—"/>
+            </a:pPr>
+            <a:r>
+              <a:rPr sz="1700" b="0">
+                <a:solidFill>
+                  <a:srgbClr val="EDEFF4"/>
+                </a:solidFill>
+                <a:latin typeface="Arial"/>
+              </a:rPr>
+              <a:t>Pre-existing components are declared in the submission form; the build window work is scored separately.</a:t>
             </a:r>
           </a:p>
         </p:txBody>
@@ -4365,7 +4850,7 @@
     <p:bg>
       <p:bgPr>
         <a:solidFill>
-          <a:srgbClr val="151A23"/>
+          <a:srgbClr val="14161C"/>
         </a:solidFill>
         <a:effectLst/>
       </p:bgPr>
@@ -4379,102 +4864,431 @@
       <p:grpSpPr/>
       <p:sp>
         <p:nvSpPr>
-          <p:cNvPr id="2" name="Title 1"/>
-          <p:cNvSpPr>
-            <a:spLocks noGrp="1"/>
-          </p:cNvSpPr>
-          <p:nvPr>
-            <p:ph type="title"/>
-          </p:nvPr>
-        </p:nvSpPr>
-        <p:spPr/>
-        <p:txBody>
-          <a:bodyPr/>
-          <a:lstStyle/>
-          <a:p>
-            <a:r>
-              <a:rPr>
-                <a:solidFill>
-                  <a:srgbClr val="E8ECF4"/>
-                </a:solidFill>
+          <p:cNvPr id="2" name="TextBox 1"/>
+          <p:cNvSpPr txBox="1"/>
+          <p:nvPr/>
+        </p:nvSpPr>
+        <p:spPr>
+          <a:xfrm>
+            <a:off x="914400" y="420624"/>
+            <a:ext cx="10362895" cy="274320"/>
+          </a:xfrm>
+          <a:prstGeom prst="rect">
+            <a:avLst/>
+          </a:prstGeom>
+          <a:noFill/>
+        </p:spPr>
+        <p:txBody>
+          <a:bodyPr wrap="square" anchor="t" lIns="0" rIns="0" tIns="0" bIns="0">
+            <a:spAutoFit/>
+          </a:bodyPr>
+          <a:lstStyle/>
+          <a:p>
+            <a:pPr algn="l">
+              <a:lnSpc>
+                <a:spcPct val="118000"/>
+              </a:lnSpc>
+            </a:pPr>
+            <a:r>
+              <a:rPr sz="1050" b="1">
+                <a:solidFill>
+                  <a:srgbClr val="4FD1C5"/>
+                </a:solidFill>
+                <a:latin typeface="Arial"/>
+              </a:rPr>
+              <a:t>REPRODUCE</a:t>
+            </a:r>
+          </a:p>
+        </p:txBody>
+      </p:sp>
+      <p:sp>
+        <p:nvSpPr>
+          <p:cNvPr id="3" name="TextBox 2"/>
+          <p:cNvSpPr txBox="1"/>
+          <p:nvPr/>
+        </p:nvSpPr>
+        <p:spPr>
+          <a:xfrm>
+            <a:off x="914400" y="713232"/>
+            <a:ext cx="10362895" cy="914400"/>
+          </a:xfrm>
+          <a:prstGeom prst="rect">
+            <a:avLst/>
+          </a:prstGeom>
+          <a:noFill/>
+        </p:spPr>
+        <p:txBody>
+          <a:bodyPr wrap="square" anchor="t" lIns="0" rIns="0" tIns="0" bIns="0">
+            <a:spAutoFit/>
+          </a:bodyPr>
+          <a:lstStyle/>
+          <a:p>
+            <a:pPr algn="l">
+              <a:lnSpc>
+                <a:spcPct val="105000"/>
+              </a:lnSpc>
+            </a:pPr>
+            <a:r>
+              <a:rPr sz="2900" b="1">
+                <a:solidFill>
+                  <a:srgbClr val="EDEFF4"/>
+                </a:solidFill>
+                <a:latin typeface="Arial"/>
               </a:rPr>
               <a:t>Run it yourself — no keys required</a:t>
             </a:r>
           </a:p>
         </p:txBody>
       </p:sp>
-      <p:sp>
-        <p:nvSpPr>
-          <p:cNvPr id="3" name="Content Placeholder 2"/>
-          <p:cNvSpPr>
-            <a:spLocks noGrp="1"/>
-          </p:cNvSpPr>
-          <p:nvPr>
-            <p:ph idx="1"/>
-          </p:nvPr>
-        </p:nvSpPr>
-        <p:spPr/>
-        <p:txBody>
-          <a:bodyPr/>
-          <a:lstStyle/>
-          <a:p>
-            <a:pPr/>
-            <a:r>
-              <a:rPr sz="2200">
-                <a:solidFill>
-                  <a:srgbClr val="7DD3FC"/>
+      <p:cxnSp>
+        <p:nvCxnSpPr>
+          <p:cNvPr id="4" name="Connector 3"/>
+          <p:cNvCxnSpPr/>
+          <p:nvPr/>
+        </p:nvCxnSpPr>
+        <p:spPr>
+          <a:xfrm>
+            <a:off x="914400" y="1627632"/>
+            <a:ext cx="1371600" cy="0"/>
+          </a:xfrm>
+          <a:prstGeom prst="line">
+            <a:avLst/>
+          </a:prstGeom>
+          <a:ln w="31750">
+            <a:solidFill>
+              <a:srgbClr val="4FD1C5"/>
+            </a:solidFill>
+          </a:ln>
+        </p:spPr>
+        <p:style>
+          <a:lnRef idx="2">
+            <a:schemeClr val="accent1"/>
+          </a:lnRef>
+          <a:fillRef idx="0">
+            <a:schemeClr val="accent1"/>
+          </a:fillRef>
+          <a:effectRef idx="1">
+            <a:schemeClr val="accent1"/>
+          </a:effectRef>
+          <a:fontRef idx="minor">
+            <a:schemeClr val="tx1"/>
+          </a:fontRef>
+        </p:style>
+      </p:cxnSp>
+      <p:sp>
+        <p:nvSpPr>
+          <p:cNvPr id="5" name="TextBox 4"/>
+          <p:cNvSpPr txBox="1"/>
+          <p:nvPr/>
+        </p:nvSpPr>
+        <p:spPr>
+          <a:xfrm>
+            <a:off x="914400" y="6291072"/>
+            <a:ext cx="7315200" cy="256032"/>
+          </a:xfrm>
+          <a:prstGeom prst="rect">
+            <a:avLst/>
+          </a:prstGeom>
+          <a:noFill/>
+        </p:spPr>
+        <p:txBody>
+          <a:bodyPr wrap="square" anchor="t" lIns="0" rIns="0" tIns="0" bIns="0">
+            <a:spAutoFit/>
+          </a:bodyPr>
+          <a:lstStyle/>
+          <a:p>
+            <a:pPr algn="l">
+              <a:lnSpc>
+                <a:spcPct val="118000"/>
+              </a:lnSpc>
+            </a:pPr>
+            <a:r>
+              <a:rPr sz="900" b="0">
+                <a:solidFill>
+                  <a:srgbClr val="9BA6B8"/>
+                </a:solidFill>
+                <a:latin typeface="Arial"/>
+              </a:rPr>
+              <a:t>Driftwatch  ·  Open Agent Hackathon 2026  ·  Wildcard [Tinkerer]</a:t>
+            </a:r>
+          </a:p>
+        </p:txBody>
+      </p:sp>
+      <p:sp>
+        <p:nvSpPr>
+          <p:cNvPr id="6" name="TextBox 5"/>
+          <p:cNvSpPr txBox="1"/>
+          <p:nvPr/>
+        </p:nvSpPr>
+        <p:spPr>
+          <a:xfrm>
+            <a:off x="10728655" y="6291072"/>
+            <a:ext cx="548640" cy="256032"/>
+          </a:xfrm>
+          <a:prstGeom prst="rect">
+            <a:avLst/>
+          </a:prstGeom>
+          <a:noFill/>
+        </p:spPr>
+        <p:txBody>
+          <a:bodyPr wrap="square" anchor="t" lIns="0" rIns="0" tIns="0" bIns="0">
+            <a:spAutoFit/>
+          </a:bodyPr>
+          <a:lstStyle/>
+          <a:p>
+            <a:pPr algn="r">
+              <a:lnSpc>
+                <a:spcPct val="118000"/>
+              </a:lnSpc>
+            </a:pPr>
+            <a:r>
+              <a:rPr sz="900" b="0">
+                <a:solidFill>
+                  <a:srgbClr val="9BA6B8"/>
+                </a:solidFill>
+                <a:latin typeface="Arial"/>
+              </a:rPr>
+              <a:t>11</a:t>
+            </a:r>
+          </a:p>
+        </p:txBody>
+      </p:sp>
+      <p:sp>
+        <p:nvSpPr>
+          <p:cNvPr id="7" name="Rounded Rectangle 6"/>
+          <p:cNvSpPr/>
+          <p:nvPr/>
+        </p:nvSpPr>
+        <p:spPr>
+          <a:xfrm>
+            <a:off x="914400" y="1874519"/>
+            <a:ext cx="10362895" cy="2487168"/>
+          </a:xfrm>
+          <a:prstGeom prst="roundRect">
+            <a:avLst>
+              <a:gd name="adj" fmla="val 6000"/>
+            </a:avLst>
+          </a:prstGeom>
+          <a:solidFill>
+            <a:srgbClr val="1E222C"/>
+          </a:solidFill>
+          <a:ln>
+            <a:noFill/>
+          </a:ln>
+          <a:effectLst/>
+        </p:spPr>
+        <p:txBody>
+          <a:bodyPr rtlCol="0" anchor="t" wrap="square" lIns="274320" rIns="164592" tIns="237744" bIns="91440"/>
+          <a:lstStyle/>
+          <a:p>
+            <a:pPr algn="l">
+              <a:lnSpc>
+                <a:spcPct val="145000"/>
+              </a:lnSpc>
+              <a:spcAft>
+                <a:spcPts val="0"/>
+              </a:spcAft>
+            </a:pPr>
+            <a:r>
+              <a:rPr sz="1300" b="0">
+                <a:solidFill>
+                  <a:srgbClr val="4FD1C5"/>
                 </a:solidFill>
                 <a:latin typeface="Menlo"/>
-                <a:hlinkClick r:id="rId2"/>
               </a:rPr>
               <a:t>git clone https://github.com/antnoumous/antynomoushackathon26</a:t>
             </a:r>
           </a:p>
           <a:p>
-            <a:pPr/>
-            <a:r>
-              <a:rPr sz="2000">
-                <a:solidFill>
-                  <a:srgbClr val="DDE3EC"/>
+            <a:pPr algn="l">
+              <a:lnSpc>
+                <a:spcPct val="145000"/>
+              </a:lnSpc>
+              <a:spcAft>
+                <a:spcPts val="0"/>
+              </a:spcAft>
+            </a:pPr>
+            <a:r>
+              <a:rPr sz="1300" b="0">
+                <a:solidFill>
+                  <a:srgbClr val="4FD1C5"/>
                 </a:solidFill>
                 <a:latin typeface="Menlo"/>
               </a:rPr>
-              <a:t>python3.11 -m venv .venv &amp;&amp; .venv/bin/pip install -r requirements.txt</a:t>
-            </a:r>
-          </a:p>
-          <a:p>
-            <a:pPr/>
-            <a:r>
-              <a:rPr sz="2000">
-                <a:solidFill>
-                  <a:srgbClr val="DDE3EC"/>
+              <a:t>cd antynomoushackathon26</a:t>
+            </a:r>
+          </a:p>
+          <a:p>
+            <a:pPr algn="l">
+              <a:lnSpc>
+                <a:spcPct val="145000"/>
+              </a:lnSpc>
+              <a:spcAft>
+                <a:spcPts val="0"/>
+              </a:spcAft>
+            </a:pPr>
+            <a:r>
+              <a:rPr sz="1300" b="0">
+                <a:solidFill>
+                  <a:srgbClr val="4FD1C5"/>
                 </a:solidFill>
                 <a:latin typeface="Menlo"/>
               </a:rPr>
-              <a:t>python run.py                      # full agent on cached data, credential-free</a:t>
-            </a:r>
-          </a:p>
-          <a:p>
-            <a:pPr/>
-            <a:r>
-              <a:rPr sz="2000">
-                <a:solidFill>
-                  <a:srgbClr val="DDE3EC"/>
+              <a:t>python3.11 -m venv .venv &amp;&amp; . .venv/bin/activate</a:t>
+            </a:r>
+          </a:p>
+          <a:p>
+            <a:pPr algn="l">
+              <a:lnSpc>
+                <a:spcPct val="145000"/>
+              </a:lnSpc>
+              <a:spcAft>
+                <a:spcPts val="0"/>
+              </a:spcAft>
+            </a:pPr>
+            <a:r>
+              <a:rPr sz="1300" b="0">
+                <a:solidFill>
+                  <a:srgbClr val="4FD1C5"/>
                 </a:solidFill>
                 <a:latin typeface="Menlo"/>
               </a:rPr>
-              <a:t>python -m evals.run_eval         # precision / recall / determinism, in seconds</a:t>
-            </a:r>
-          </a:p>
-          <a:p>
-            <a:pPr/>
-            <a:r>
-              <a:rPr sz="2200" b="1">
-                <a:solidFill>
-                  <a:srgbClr val="FBBF24"/>
-                </a:solidFill>
-              </a:rPr>
-              <a:t>Driftwatch: every claim traces to evidence — every failure degrades honestly.</a:t>
+              <a:t>pip install -r requirements.txt</a:t>
+            </a:r>
+          </a:p>
+          <a:p>
+            <a:pPr algn="l">
+              <a:lnSpc>
+                <a:spcPct val="145000"/>
+              </a:lnSpc>
+              <a:spcAft>
+                <a:spcPts val="0"/>
+              </a:spcAft>
+            </a:pPr>
+            <a:r>
+              <a:rPr sz="1300" b="0">
+                <a:solidFill>
+                  <a:srgbClr val="4FD1C5"/>
+                </a:solidFill>
+                <a:latin typeface="Menlo"/>
+              </a:rPr>
+              <a:t> </a:t>
+            </a:r>
+          </a:p>
+          <a:p>
+            <a:pPr algn="l">
+              <a:lnSpc>
+                <a:spcPct val="145000"/>
+              </a:lnSpc>
+              <a:spcAft>
+                <a:spcPts val="0"/>
+              </a:spcAft>
+            </a:pPr>
+            <a:r>
+              <a:rPr sz="1300" b="0">
+                <a:solidFill>
+                  <a:srgbClr val="EDEFF4"/>
+                </a:solidFill>
+                <a:latin typeface="Menlo"/>
+              </a:rPr>
+              <a:t>python run.py             # full agent, cached data, no credentials</a:t>
+            </a:r>
+          </a:p>
+          <a:p>
+            <a:pPr algn="l">
+              <a:lnSpc>
+                <a:spcPct val="145000"/>
+              </a:lnSpc>
+              <a:spcAft>
+                <a:spcPts val="0"/>
+              </a:spcAft>
+            </a:pPr>
+            <a:r>
+              <a:rPr sz="1300" b="0">
+                <a:solidFill>
+                  <a:srgbClr val="EDEFF4"/>
+                </a:solidFill>
+                <a:latin typeface="Menlo"/>
+              </a:rPr>
+              <a:t>python -m evals.run_eval  # precision / recall / determinism</a:t>
+            </a:r>
+          </a:p>
+        </p:txBody>
+      </p:sp>
+      <p:sp>
+        <p:nvSpPr>
+          <p:cNvPr id="8" name="TextBox 7"/>
+          <p:cNvSpPr txBox="1"/>
+          <p:nvPr/>
+        </p:nvSpPr>
+        <p:spPr>
+          <a:xfrm>
+            <a:off x="914400" y="4572000"/>
+            <a:ext cx="10362895" cy="822960"/>
+          </a:xfrm>
+          <a:prstGeom prst="rect">
+            <a:avLst/>
+          </a:prstGeom>
+          <a:noFill/>
+        </p:spPr>
+        <p:txBody>
+          <a:bodyPr wrap="square" anchor="t" lIns="0" rIns="0" tIns="0" bIns="0">
+            <a:spAutoFit/>
+          </a:bodyPr>
+          <a:lstStyle/>
+          <a:p>
+            <a:pPr algn="l">
+              <a:lnSpc>
+                <a:spcPct val="130000"/>
+              </a:lnSpc>
+            </a:pPr>
+            <a:r>
+              <a:rPr sz="1400" b="0">
+                <a:solidFill>
+                  <a:srgbClr val="9BA6B8"/>
+                </a:solidFill>
+                <a:latin typeface="Arial"/>
+              </a:rPr>
+              <a:t>Sample mode needs no credentials, no network and no model. Sponsor settings are read only after sample mode is selected.</a:t>
+            </a:r>
+          </a:p>
+        </p:txBody>
+      </p:sp>
+      <p:sp>
+        <p:nvSpPr>
+          <p:cNvPr id="9" name="TextBox 8"/>
+          <p:cNvSpPr txBox="1"/>
+          <p:nvPr/>
+        </p:nvSpPr>
+        <p:spPr>
+          <a:xfrm>
+            <a:off x="914400" y="5486400"/>
+            <a:ext cx="10362895" cy="548640"/>
+          </a:xfrm>
+          <a:prstGeom prst="rect">
+            <a:avLst/>
+          </a:prstGeom>
+          <a:noFill/>
+        </p:spPr>
+        <p:txBody>
+          <a:bodyPr wrap="square" anchor="t" lIns="0" rIns="0" tIns="0" bIns="0">
+            <a:spAutoFit/>
+          </a:bodyPr>
+          <a:lstStyle/>
+          <a:p>
+            <a:pPr algn="l">
+              <a:lnSpc>
+                <a:spcPct val="118000"/>
+              </a:lnSpc>
+            </a:pPr>
+            <a:r>
+              <a:rPr sz="1700" b="1">
+                <a:solidFill>
+                  <a:srgbClr val="EDEFF4"/>
+                </a:solidFill>
+                <a:latin typeface="Arial"/>
+              </a:rPr>
+              <a:t>Every claim traces to evidence — every failure degrades honestly.</a:t>
             </a:r>
           </a:p>
         </p:txBody>
@@ -4493,7 +5307,7 @@
     <p:bg>
       <p:bgPr>
         <a:solidFill>
-          <a:srgbClr val="151A23"/>
+          <a:srgbClr val="14161C"/>
         </a:solidFill>
         <a:effectLst/>
       </p:bgPr>
@@ -4507,86 +5321,298 @@
       <p:grpSpPr/>
       <p:sp>
         <p:nvSpPr>
-          <p:cNvPr id="2" name="Title 1"/>
-          <p:cNvSpPr>
-            <a:spLocks noGrp="1"/>
-          </p:cNvSpPr>
-          <p:nvPr>
-            <p:ph type="title"/>
-          </p:nvPr>
-        </p:nvSpPr>
-        <p:spPr/>
-        <p:txBody>
-          <a:bodyPr/>
-          <a:lstStyle/>
-          <a:p>
-            <a:r>
-              <a:rPr>
-                <a:solidFill>
-                  <a:srgbClr val="E8ECF4"/>
-                </a:solidFill>
-              </a:rPr>
-              <a:t>The problem: confident verdicts, no receipts</a:t>
-            </a:r>
-          </a:p>
-        </p:txBody>
-      </p:sp>
-      <p:sp>
-        <p:nvSpPr>
-          <p:cNvPr id="3" name="Content Placeholder 2"/>
-          <p:cNvSpPr>
-            <a:spLocks noGrp="1"/>
-          </p:cNvSpPr>
-          <p:nvPr>
-            <p:ph idx="1"/>
-          </p:nvPr>
-        </p:nvSpPr>
-        <p:spPr/>
-        <p:txBody>
-          <a:bodyPr/>
-          <a:lstStyle/>
-          <a:p>
-            <a:pPr/>
-            <a:r>
-              <a:rPr sz="2000">
-                <a:solidFill>
-                  <a:srgbClr val="DDE3EC"/>
-                </a:solidFill>
-              </a:rPr>
-              <a:t>Cloud tenancies quietly accumulate waste and unattributed “shadow” resources</a:t>
-            </a:r>
-          </a:p>
-          <a:p>
-            <a:pPr/>
-            <a:r>
-              <a:rPr sz="2000">
-                <a:solidFill>
-                  <a:srgbClr val="DDE3EC"/>
-                </a:solidFill>
-              </a:rPr>
-              <a:t>LLM audit demos produce confident findings with no way to check how they were derived</a:t>
-            </a:r>
-          </a:p>
-          <a:p>
-            <a:pPr/>
-            <a:r>
-              <a:rPr sz="2000" b="1">
-                <a:solidFill>
-                  <a:srgbClr val="7DD3FC"/>
-                </a:solidFill>
-              </a:rPr>
-              <a:t>Trust needs three things — evidence for every claim, a critic that can reject findings, and a reproducible record of the reasoning</a:t>
-            </a:r>
-          </a:p>
-          <a:p>
-            <a:pPr/>
-            <a:r>
-              <a:rPr sz="2000">
-                <a:solidFill>
-                  <a:srgbClr val="DDE3EC"/>
-                </a:solidFill>
-              </a:rPr>
-              <a:t>And the auditor should consume governed data where governance lives — not a scraped summary</a:t>
+          <p:cNvPr id="2" name="TextBox 1"/>
+          <p:cNvSpPr txBox="1"/>
+          <p:nvPr/>
+        </p:nvSpPr>
+        <p:spPr>
+          <a:xfrm>
+            <a:off x="914400" y="420624"/>
+            <a:ext cx="10362895" cy="274320"/>
+          </a:xfrm>
+          <a:prstGeom prst="rect">
+            <a:avLst/>
+          </a:prstGeom>
+          <a:noFill/>
+        </p:spPr>
+        <p:txBody>
+          <a:bodyPr wrap="square" anchor="t" lIns="0" rIns="0" tIns="0" bIns="0">
+            <a:spAutoFit/>
+          </a:bodyPr>
+          <a:lstStyle/>
+          <a:p>
+            <a:pPr algn="l">
+              <a:lnSpc>
+                <a:spcPct val="118000"/>
+              </a:lnSpc>
+            </a:pPr>
+            <a:r>
+              <a:rPr sz="1050" b="1">
+                <a:solidFill>
+                  <a:srgbClr val="4FD1C5"/>
+                </a:solidFill>
+                <a:latin typeface="Arial"/>
+              </a:rPr>
+              <a:t>THE PROBLEM</a:t>
+            </a:r>
+          </a:p>
+        </p:txBody>
+      </p:sp>
+      <p:sp>
+        <p:nvSpPr>
+          <p:cNvPr id="3" name="TextBox 2"/>
+          <p:cNvSpPr txBox="1"/>
+          <p:nvPr/>
+        </p:nvSpPr>
+        <p:spPr>
+          <a:xfrm>
+            <a:off x="914400" y="713232"/>
+            <a:ext cx="10362895" cy="914400"/>
+          </a:xfrm>
+          <a:prstGeom prst="rect">
+            <a:avLst/>
+          </a:prstGeom>
+          <a:noFill/>
+        </p:spPr>
+        <p:txBody>
+          <a:bodyPr wrap="square" anchor="t" lIns="0" rIns="0" tIns="0" bIns="0">
+            <a:spAutoFit/>
+          </a:bodyPr>
+          <a:lstStyle/>
+          <a:p>
+            <a:pPr algn="l">
+              <a:lnSpc>
+                <a:spcPct val="105000"/>
+              </a:lnSpc>
+            </a:pPr>
+            <a:r>
+              <a:rPr sz="2900" b="1">
+                <a:solidFill>
+                  <a:srgbClr val="EDEFF4"/>
+                </a:solidFill>
+                <a:latin typeface="Arial"/>
+              </a:rPr>
+              <a:t>Confident verdicts, no receipts</a:t>
+            </a:r>
+          </a:p>
+        </p:txBody>
+      </p:sp>
+      <p:cxnSp>
+        <p:nvCxnSpPr>
+          <p:cNvPr id="4" name="Connector 3"/>
+          <p:cNvCxnSpPr/>
+          <p:nvPr/>
+        </p:nvCxnSpPr>
+        <p:spPr>
+          <a:xfrm>
+            <a:off x="914400" y="1627632"/>
+            <a:ext cx="1371600" cy="0"/>
+          </a:xfrm>
+          <a:prstGeom prst="line">
+            <a:avLst/>
+          </a:prstGeom>
+          <a:ln w="31750">
+            <a:solidFill>
+              <a:srgbClr val="4FD1C5"/>
+            </a:solidFill>
+          </a:ln>
+        </p:spPr>
+        <p:style>
+          <a:lnRef idx="2">
+            <a:schemeClr val="accent1"/>
+          </a:lnRef>
+          <a:fillRef idx="0">
+            <a:schemeClr val="accent1"/>
+          </a:fillRef>
+          <a:effectRef idx="1">
+            <a:schemeClr val="accent1"/>
+          </a:effectRef>
+          <a:fontRef idx="minor">
+            <a:schemeClr val="tx1"/>
+          </a:fontRef>
+        </p:style>
+      </p:cxnSp>
+      <p:sp>
+        <p:nvSpPr>
+          <p:cNvPr id="5" name="TextBox 4"/>
+          <p:cNvSpPr txBox="1"/>
+          <p:nvPr/>
+        </p:nvSpPr>
+        <p:spPr>
+          <a:xfrm>
+            <a:off x="914400" y="6291072"/>
+            <a:ext cx="7315200" cy="256032"/>
+          </a:xfrm>
+          <a:prstGeom prst="rect">
+            <a:avLst/>
+          </a:prstGeom>
+          <a:noFill/>
+        </p:spPr>
+        <p:txBody>
+          <a:bodyPr wrap="square" anchor="t" lIns="0" rIns="0" tIns="0" bIns="0">
+            <a:spAutoFit/>
+          </a:bodyPr>
+          <a:lstStyle/>
+          <a:p>
+            <a:pPr algn="l">
+              <a:lnSpc>
+                <a:spcPct val="118000"/>
+              </a:lnSpc>
+            </a:pPr>
+            <a:r>
+              <a:rPr sz="900" b="0">
+                <a:solidFill>
+                  <a:srgbClr val="9BA6B8"/>
+                </a:solidFill>
+                <a:latin typeface="Arial"/>
+              </a:rPr>
+              <a:t>Driftwatch  ·  Open Agent Hackathon 2026  ·  Wildcard [Tinkerer]</a:t>
+            </a:r>
+          </a:p>
+        </p:txBody>
+      </p:sp>
+      <p:sp>
+        <p:nvSpPr>
+          <p:cNvPr id="6" name="TextBox 5"/>
+          <p:cNvSpPr txBox="1"/>
+          <p:nvPr/>
+        </p:nvSpPr>
+        <p:spPr>
+          <a:xfrm>
+            <a:off x="10728655" y="6291072"/>
+            <a:ext cx="548640" cy="256032"/>
+          </a:xfrm>
+          <a:prstGeom prst="rect">
+            <a:avLst/>
+          </a:prstGeom>
+          <a:noFill/>
+        </p:spPr>
+        <p:txBody>
+          <a:bodyPr wrap="square" anchor="t" lIns="0" rIns="0" tIns="0" bIns="0">
+            <a:spAutoFit/>
+          </a:bodyPr>
+          <a:lstStyle/>
+          <a:p>
+            <a:pPr algn="r">
+              <a:lnSpc>
+                <a:spcPct val="118000"/>
+              </a:lnSpc>
+            </a:pPr>
+            <a:r>
+              <a:rPr sz="900" b="0">
+                <a:solidFill>
+                  <a:srgbClr val="9BA6B8"/>
+                </a:solidFill>
+                <a:latin typeface="Arial"/>
+              </a:rPr>
+              <a:t>2</a:t>
+            </a:r>
+          </a:p>
+        </p:txBody>
+      </p:sp>
+      <p:sp>
+        <p:nvSpPr>
+          <p:cNvPr id="7" name="TextBox 6"/>
+          <p:cNvSpPr txBox="1"/>
+          <p:nvPr/>
+        </p:nvSpPr>
+        <p:spPr>
+          <a:xfrm>
+            <a:off x="914400" y="1874519"/>
+            <a:ext cx="10362895" cy="4114800"/>
+          </a:xfrm>
+          <a:prstGeom prst="rect">
+            <a:avLst/>
+          </a:prstGeom>
+          <a:noFill/>
+        </p:spPr>
+        <p:txBody>
+          <a:bodyPr wrap="square" anchor="ctr" lIns="0" rIns="0" tIns="0" bIns="0">
+            <a:spAutoFit/>
+          </a:bodyPr>
+          <a:lstStyle/>
+          <a:p>
+            <a:pPr algn="l" marL="274320" indent="-274320">
+              <a:lnSpc>
+                <a:spcPct val="122000"/>
+              </a:lnSpc>
+              <a:spcAft>
+                <a:spcPts val="1300"/>
+              </a:spcAft>
+              <a:buFont typeface="Arial"/>
+              <a:buChar char="—"/>
+            </a:pPr>
+            <a:r>
+              <a:rPr sz="1700" b="0">
+                <a:solidFill>
+                  <a:srgbClr val="EDEFF4"/>
+                </a:solidFill>
+                <a:latin typeface="Arial"/>
+              </a:rPr>
+              <a:t>Cloud tenancies accumulate waste and unattributed “shadow” resources that nobody declared and nobody owns.</a:t>
+            </a:r>
+          </a:p>
+          <a:p>
+            <a:pPr algn="l" marL="274320" indent="-274320">
+              <a:lnSpc>
+                <a:spcPct val="122000"/>
+              </a:lnSpc>
+              <a:spcAft>
+                <a:spcPts val="1300"/>
+              </a:spcAft>
+              <a:buFont typeface="Arial"/>
+              <a:buChar char="—"/>
+            </a:pPr>
+            <a:r>
+              <a:rPr sz="1700" b="0">
+                <a:solidFill>
+                  <a:srgbClr val="EDEFF4"/>
+                </a:solidFill>
+                <a:latin typeface="Arial"/>
+              </a:rPr>
+              <a:t>LLM audit demos produce confident findings with no way to check how they were derived — and no way to disagree with them.</a:t>
+            </a:r>
+          </a:p>
+          <a:p>
+            <a:pPr algn="l" marL="274320" indent="-274320">
+              <a:lnSpc>
+                <a:spcPct val="122000"/>
+              </a:lnSpc>
+              <a:spcAft>
+                <a:spcPts val="1300"/>
+              </a:spcAft>
+              <a:buFont typeface="Arial"/>
+              <a:buChar char="—"/>
+            </a:pPr>
+            <a:r>
+              <a:rPr sz="1700" b="0">
+                <a:solidFill>
+                  <a:srgbClr val="EDEFF4"/>
+                </a:solidFill>
+                <a:latin typeface="Arial"/>
+              </a:rPr>
+              <a:t>Trust needs three things: evidence for every claim, a critic that can reject a finding, and a reproducible record of the reasoning.</a:t>
+            </a:r>
+          </a:p>
+          <a:p>
+            <a:pPr algn="l" marL="274320" indent="-274320">
+              <a:lnSpc>
+                <a:spcPct val="122000"/>
+              </a:lnSpc>
+              <a:spcAft>
+                <a:spcPts val="1300"/>
+              </a:spcAft>
+              <a:buFont typeface="Arial"/>
+              <a:buChar char="—"/>
+            </a:pPr>
+            <a:r>
+              <a:rPr sz="1700" b="0">
+                <a:solidFill>
+                  <a:srgbClr val="EDEFF4"/>
+                </a:solidFill>
+                <a:latin typeface="Arial"/>
+              </a:rPr>
+              <a:t>And the auditor should consume governed data where governance already lives — not a scraped summary of it.</a:t>
             </a:r>
           </a:p>
         </p:txBody>
@@ -4605,7 +5631,7 @@
     <p:bg>
       <p:bgPr>
         <a:solidFill>
-          <a:srgbClr val="151A23"/>
+          <a:srgbClr val="14161C"/>
         </a:solidFill>
         <a:effectLst/>
       </p:bgPr>
@@ -4619,97 +5645,546 @@
       <p:grpSpPr/>
       <p:sp>
         <p:nvSpPr>
-          <p:cNvPr id="2" name="Title 1"/>
-          <p:cNvSpPr>
-            <a:spLocks noGrp="1"/>
-          </p:cNvSpPr>
-          <p:nvPr>
-            <p:ph type="title"/>
-          </p:nvPr>
-        </p:nvSpPr>
-        <p:spPr/>
-        <p:txBody>
-          <a:bodyPr/>
-          <a:lstStyle/>
-          <a:p>
-            <a:r>
-              <a:rPr>
-                <a:solidFill>
-                  <a:srgbClr val="E8ECF4"/>
-                </a:solidFill>
+          <p:cNvPr id="2" name="TextBox 1"/>
+          <p:cNvSpPr txBox="1"/>
+          <p:nvPr/>
+        </p:nvSpPr>
+        <p:spPr>
+          <a:xfrm>
+            <a:off x="914400" y="420624"/>
+            <a:ext cx="10362895" cy="274320"/>
+          </a:xfrm>
+          <a:prstGeom prst="rect">
+            <a:avLst/>
+          </a:prstGeom>
+          <a:noFill/>
+        </p:spPr>
+        <p:txBody>
+          <a:bodyPr wrap="square" anchor="t" lIns="0" rIns="0" tIns="0" bIns="0">
+            <a:spAutoFit/>
+          </a:bodyPr>
+          <a:lstStyle/>
+          <a:p>
+            <a:pPr algn="l">
+              <a:lnSpc>
+                <a:spcPct val="118000"/>
+              </a:lnSpc>
+            </a:pPr>
+            <a:r>
+              <a:rPr sz="1050" b="1">
+                <a:solidFill>
+                  <a:srgbClr val="4FD1C5"/>
+                </a:solidFill>
+                <a:latin typeface="Arial"/>
+              </a:rPr>
+              <a:t>HOW IT WORKS</a:t>
+            </a:r>
+          </a:p>
+        </p:txBody>
+      </p:sp>
+      <p:sp>
+        <p:nvSpPr>
+          <p:cNvPr id="3" name="TextBox 2"/>
+          <p:cNvSpPr txBox="1"/>
+          <p:nvPr/>
+        </p:nvSpPr>
+        <p:spPr>
+          <a:xfrm>
+            <a:off x="914400" y="713232"/>
+            <a:ext cx="10362895" cy="914400"/>
+          </a:xfrm>
+          <a:prstGeom prst="rect">
+            <a:avLst/>
+          </a:prstGeom>
+          <a:noFill/>
+        </p:spPr>
+        <p:txBody>
+          <a:bodyPr wrap="square" anchor="t" lIns="0" rIns="0" tIns="0" bIns="0">
+            <a:spAutoFit/>
+          </a:bodyPr>
+          <a:lstStyle/>
+          <a:p>
+            <a:pPr algn="l">
+              <a:lnSpc>
+                <a:spcPct val="105000"/>
+              </a:lnSpc>
+            </a:pPr>
+            <a:r>
+              <a:rPr sz="2900" b="1">
+                <a:solidFill>
+                  <a:srgbClr val="EDEFF4"/>
+                </a:solidFill>
+                <a:latin typeface="Arial"/>
               </a:rPr>
               <a:t>Four named agents, one bounded loop</a:t>
             </a:r>
           </a:p>
         </p:txBody>
       </p:sp>
-      <p:sp>
-        <p:nvSpPr>
-          <p:cNvPr id="3" name="Content Placeholder 2"/>
-          <p:cNvSpPr>
-            <a:spLocks noGrp="1"/>
-          </p:cNvSpPr>
-          <p:nvPr>
-            <p:ph idx="1"/>
-          </p:nvPr>
-        </p:nvSpPr>
-        <p:spPr/>
-        <p:txBody>
-          <a:bodyPr/>
-          <a:lstStyle/>
-          <a:p>
-            <a:pPr/>
-            <a:r>
-              <a:rPr sz="2000">
-                <a:solidFill>
-                  <a:srgbClr val="DDE3EC"/>
-                </a:solidFill>
-              </a:rPr>
-              <a:t>Planner → Scout → Skeptic → Writer — handoffs traced to JSONL, every event</a:t>
-            </a:r>
-          </a:p>
-          <a:p>
-            <a:pPr/>
-            <a:r>
-              <a:rPr sz="2000">
-                <a:solidFill>
-                  <a:srgbClr val="DDE3EC"/>
-                </a:solidFill>
-              </a:rPr>
-              <a:t>The Skeptic can reject a finding and force a re-investigation — rejection is as visible as acceptance</a:t>
-            </a:r>
-          </a:p>
-          <a:p>
-            <a:pPr/>
-            <a:r>
-              <a:rPr sz="2000">
-                <a:solidFill>
-                  <a:srgbClr val="7DD3FC"/>
-                </a:solidFill>
-              </a:rPr>
-              <a:t>A figures guard refuses any number in the report that no evidence item supports</a:t>
-            </a:r>
-          </a:p>
-          <a:p>
-            <a:pPr/>
-            <a:r>
-              <a:rPr sz="2000">
-                <a:solidFill>
-                  <a:srgbClr val="DDE3EC"/>
-                </a:solidFill>
-              </a:rPr>
-              <a:t>Hard caps: rounds, per-source deadlines, total budget — no unbounded debate, runs finish in minutes</a:t>
-            </a:r>
-          </a:p>
-          <a:p>
-            <a:pPr/>
-            <a:r>
-              <a:rPr sz="2000" i="1">
-                <a:solidFill>
-                  <a:srgbClr val="94A3B8"/>
-                </a:solidFill>
-              </a:rPr>
-              <a:t>Hand-rolled, no orchestration framework — 456 tests instead of a dependency tree</a:t>
+      <p:cxnSp>
+        <p:nvCxnSpPr>
+          <p:cNvPr id="4" name="Connector 3"/>
+          <p:cNvCxnSpPr/>
+          <p:nvPr/>
+        </p:nvCxnSpPr>
+        <p:spPr>
+          <a:xfrm>
+            <a:off x="914400" y="1627632"/>
+            <a:ext cx="1371600" cy="0"/>
+          </a:xfrm>
+          <a:prstGeom prst="line">
+            <a:avLst/>
+          </a:prstGeom>
+          <a:ln w="31750">
+            <a:solidFill>
+              <a:srgbClr val="4FD1C5"/>
+            </a:solidFill>
+          </a:ln>
+        </p:spPr>
+        <p:style>
+          <a:lnRef idx="2">
+            <a:schemeClr val="accent1"/>
+          </a:lnRef>
+          <a:fillRef idx="0">
+            <a:schemeClr val="accent1"/>
+          </a:fillRef>
+          <a:effectRef idx="1">
+            <a:schemeClr val="accent1"/>
+          </a:effectRef>
+          <a:fontRef idx="minor">
+            <a:schemeClr val="tx1"/>
+          </a:fontRef>
+        </p:style>
+      </p:cxnSp>
+      <p:sp>
+        <p:nvSpPr>
+          <p:cNvPr id="5" name="TextBox 4"/>
+          <p:cNvSpPr txBox="1"/>
+          <p:nvPr/>
+        </p:nvSpPr>
+        <p:spPr>
+          <a:xfrm>
+            <a:off x="914400" y="6291072"/>
+            <a:ext cx="7315200" cy="256032"/>
+          </a:xfrm>
+          <a:prstGeom prst="rect">
+            <a:avLst/>
+          </a:prstGeom>
+          <a:noFill/>
+        </p:spPr>
+        <p:txBody>
+          <a:bodyPr wrap="square" anchor="t" lIns="0" rIns="0" tIns="0" bIns="0">
+            <a:spAutoFit/>
+          </a:bodyPr>
+          <a:lstStyle/>
+          <a:p>
+            <a:pPr algn="l">
+              <a:lnSpc>
+                <a:spcPct val="118000"/>
+              </a:lnSpc>
+            </a:pPr>
+            <a:r>
+              <a:rPr sz="900" b="0">
+                <a:solidFill>
+                  <a:srgbClr val="9BA6B8"/>
+                </a:solidFill>
+                <a:latin typeface="Arial"/>
+              </a:rPr>
+              <a:t>Driftwatch  ·  Open Agent Hackathon 2026  ·  Wildcard [Tinkerer]</a:t>
+            </a:r>
+          </a:p>
+        </p:txBody>
+      </p:sp>
+      <p:sp>
+        <p:nvSpPr>
+          <p:cNvPr id="6" name="TextBox 5"/>
+          <p:cNvSpPr txBox="1"/>
+          <p:nvPr/>
+        </p:nvSpPr>
+        <p:spPr>
+          <a:xfrm>
+            <a:off x="10728655" y="6291072"/>
+            <a:ext cx="548640" cy="256032"/>
+          </a:xfrm>
+          <a:prstGeom prst="rect">
+            <a:avLst/>
+          </a:prstGeom>
+          <a:noFill/>
+        </p:spPr>
+        <p:txBody>
+          <a:bodyPr wrap="square" anchor="t" lIns="0" rIns="0" tIns="0" bIns="0">
+            <a:spAutoFit/>
+          </a:bodyPr>
+          <a:lstStyle/>
+          <a:p>
+            <a:pPr algn="r">
+              <a:lnSpc>
+                <a:spcPct val="118000"/>
+              </a:lnSpc>
+            </a:pPr>
+            <a:r>
+              <a:rPr sz="900" b="0">
+                <a:solidFill>
+                  <a:srgbClr val="9BA6B8"/>
+                </a:solidFill>
+                <a:latin typeface="Arial"/>
+              </a:rPr>
+              <a:t>3</a:t>
+            </a:r>
+          </a:p>
+        </p:txBody>
+      </p:sp>
+      <p:sp>
+        <p:nvSpPr>
+          <p:cNvPr id="7" name="Rounded Rectangle 6"/>
+          <p:cNvSpPr/>
+          <p:nvPr/>
+        </p:nvSpPr>
+        <p:spPr>
+          <a:xfrm>
+            <a:off x="914400" y="1874519"/>
+            <a:ext cx="2395728" cy="1170432"/>
+          </a:xfrm>
+          <a:prstGeom prst="roundRect">
+            <a:avLst>
+              <a:gd name="adj" fmla="val 6000"/>
+            </a:avLst>
+          </a:prstGeom>
+          <a:solidFill>
+            <a:srgbClr val="1E222C"/>
+          </a:solidFill>
+          <a:ln>
+            <a:noFill/>
+          </a:ln>
+          <a:effectLst/>
+        </p:spPr>
+        <p:txBody>
+          <a:bodyPr rtlCol="0" anchor="ctr" wrap="square" lIns="164592" rIns="164592" tIns="91440" bIns="91440"/>
+          <a:lstStyle/>
+          <a:p>
+            <a:pPr algn="ctr">
+              <a:lnSpc>
+                <a:spcPct val="100000"/>
+              </a:lnSpc>
+            </a:pPr>
+            <a:r>
+              <a:rPr sz="1600" b="1">
+                <a:solidFill>
+                  <a:srgbClr val="EDEFF4"/>
+                </a:solidFill>
+                <a:latin typeface="Arial"/>
+              </a:rPr>
+              <a:t>Planner</a:t>
+            </a:r>
+          </a:p>
+          <a:p>
+            <a:pPr algn="ctr">
+              <a:lnSpc>
+                <a:spcPct val="115000"/>
+              </a:lnSpc>
+            </a:pPr>
+            <a:r>
+              <a:rPr sz="1100" b="0">
+                <a:solidFill>
+                  <a:srgbClr val="9BA6B8"/>
+                </a:solidFill>
+                <a:latin typeface="Arial"/>
+              </a:rPr>
+              <a:t>asks the
+question</a:t>
+            </a:r>
+          </a:p>
+        </p:txBody>
+      </p:sp>
+      <p:sp>
+        <p:nvSpPr>
+          <p:cNvPr id="8" name="Rounded Rectangle 7"/>
+          <p:cNvSpPr/>
+          <p:nvPr/>
+        </p:nvSpPr>
+        <p:spPr>
+          <a:xfrm>
+            <a:off x="3639312" y="1874519"/>
+            <a:ext cx="2395728" cy="1170432"/>
+          </a:xfrm>
+          <a:prstGeom prst="roundRect">
+            <a:avLst>
+              <a:gd name="adj" fmla="val 6000"/>
+            </a:avLst>
+          </a:prstGeom>
+          <a:solidFill>
+            <a:srgbClr val="1E222C"/>
+          </a:solidFill>
+          <a:ln>
+            <a:noFill/>
+          </a:ln>
+          <a:effectLst/>
+        </p:spPr>
+        <p:txBody>
+          <a:bodyPr rtlCol="0" anchor="ctr" wrap="square" lIns="164592" rIns="164592" tIns="91440" bIns="91440"/>
+          <a:lstStyle/>
+          <a:p>
+            <a:pPr algn="ctr">
+              <a:lnSpc>
+                <a:spcPct val="100000"/>
+              </a:lnSpc>
+            </a:pPr>
+            <a:r>
+              <a:rPr sz="1600" b="1">
+                <a:solidFill>
+                  <a:srgbClr val="4FD1C5"/>
+                </a:solidFill>
+                <a:latin typeface="Arial"/>
+              </a:rPr>
+              <a:t>Scout</a:t>
+            </a:r>
+          </a:p>
+          <a:p>
+            <a:pPr algn="ctr">
+              <a:lnSpc>
+                <a:spcPct val="115000"/>
+              </a:lnSpc>
+            </a:pPr>
+            <a:r>
+              <a:rPr sz="1100" b="0">
+                <a:solidFill>
+                  <a:srgbClr val="9BA6B8"/>
+                </a:solidFill>
+                <a:latin typeface="Arial"/>
+              </a:rPr>
+              <a:t>gathers
+evidence</a:t>
+            </a:r>
+          </a:p>
+        </p:txBody>
+      </p:sp>
+      <p:sp>
+        <p:nvSpPr>
+          <p:cNvPr id="9" name="Rounded Rectangle 8"/>
+          <p:cNvSpPr/>
+          <p:nvPr/>
+        </p:nvSpPr>
+        <p:spPr>
+          <a:xfrm>
+            <a:off x="6364224" y="1874519"/>
+            <a:ext cx="2395728" cy="1170432"/>
+          </a:xfrm>
+          <a:prstGeom prst="roundRect">
+            <a:avLst>
+              <a:gd name="adj" fmla="val 6000"/>
+            </a:avLst>
+          </a:prstGeom>
+          <a:solidFill>
+            <a:srgbClr val="1E222C"/>
+          </a:solidFill>
+          <a:ln>
+            <a:noFill/>
+          </a:ln>
+          <a:effectLst/>
+        </p:spPr>
+        <p:txBody>
+          <a:bodyPr rtlCol="0" anchor="ctr" wrap="square" lIns="164592" rIns="164592" tIns="91440" bIns="91440"/>
+          <a:lstStyle/>
+          <a:p>
+            <a:pPr algn="ctr">
+              <a:lnSpc>
+                <a:spcPct val="100000"/>
+              </a:lnSpc>
+            </a:pPr>
+            <a:r>
+              <a:rPr sz="1600" b="1">
+                <a:solidFill>
+                  <a:srgbClr val="4FD1C5"/>
+                </a:solidFill>
+                <a:latin typeface="Arial"/>
+              </a:rPr>
+              <a:t>Skeptic</a:t>
+            </a:r>
+          </a:p>
+          <a:p>
+            <a:pPr algn="ctr">
+              <a:lnSpc>
+                <a:spcPct val="115000"/>
+              </a:lnSpc>
+            </a:pPr>
+            <a:r>
+              <a:rPr sz="1100" b="0">
+                <a:solidFill>
+                  <a:srgbClr val="9BA6B8"/>
+                </a:solidFill>
+                <a:latin typeface="Arial"/>
+              </a:rPr>
+              <a:t>attacks
+the claim</a:t>
+            </a:r>
+          </a:p>
+        </p:txBody>
+      </p:sp>
+      <p:sp>
+        <p:nvSpPr>
+          <p:cNvPr id="10" name="Rounded Rectangle 9"/>
+          <p:cNvSpPr/>
+          <p:nvPr/>
+        </p:nvSpPr>
+        <p:spPr>
+          <a:xfrm>
+            <a:off x="9089136" y="1874519"/>
+            <a:ext cx="2395728" cy="1170432"/>
+          </a:xfrm>
+          <a:prstGeom prst="roundRect">
+            <a:avLst>
+              <a:gd name="adj" fmla="val 6000"/>
+            </a:avLst>
+          </a:prstGeom>
+          <a:solidFill>
+            <a:srgbClr val="1E222C"/>
+          </a:solidFill>
+          <a:ln>
+            <a:noFill/>
+          </a:ln>
+          <a:effectLst/>
+        </p:spPr>
+        <p:txBody>
+          <a:bodyPr rtlCol="0" anchor="ctr" wrap="square" lIns="164592" rIns="164592" tIns="91440" bIns="91440"/>
+          <a:lstStyle/>
+          <a:p>
+            <a:pPr algn="ctr">
+              <a:lnSpc>
+                <a:spcPct val="100000"/>
+              </a:lnSpc>
+            </a:pPr>
+            <a:r>
+              <a:rPr sz="1600" b="1">
+                <a:solidFill>
+                  <a:srgbClr val="EDEFF4"/>
+                </a:solidFill>
+                <a:latin typeface="Arial"/>
+              </a:rPr>
+              <a:t>Writer</a:t>
+            </a:r>
+          </a:p>
+          <a:p>
+            <a:pPr algn="ctr">
+              <a:lnSpc>
+                <a:spcPct val="115000"/>
+              </a:lnSpc>
+            </a:pPr>
+            <a:r>
+              <a:rPr sz="1100" b="0">
+                <a:solidFill>
+                  <a:srgbClr val="9BA6B8"/>
+                </a:solidFill>
+                <a:latin typeface="Arial"/>
+              </a:rPr>
+              <a:t>synthesises
+what survives</a:t>
+            </a:r>
+          </a:p>
+        </p:txBody>
+      </p:sp>
+      <p:sp>
+        <p:nvSpPr>
+          <p:cNvPr id="11" name="TextBox 10"/>
+          <p:cNvSpPr txBox="1"/>
+          <p:nvPr/>
+        </p:nvSpPr>
+        <p:spPr>
+          <a:xfrm>
+            <a:off x="914400" y="3401568"/>
+            <a:ext cx="10362895" cy="2587751"/>
+          </a:xfrm>
+          <a:prstGeom prst="rect">
+            <a:avLst/>
+          </a:prstGeom>
+          <a:noFill/>
+        </p:spPr>
+        <p:txBody>
+          <a:bodyPr wrap="square" anchor="ctr" lIns="0" rIns="0" tIns="0" bIns="0">
+            <a:spAutoFit/>
+          </a:bodyPr>
+          <a:lstStyle/>
+          <a:p>
+            <a:pPr algn="l" marL="274320" indent="-274320">
+              <a:lnSpc>
+                <a:spcPct val="122000"/>
+              </a:lnSpc>
+              <a:spcAft>
+                <a:spcPts val="900"/>
+              </a:spcAft>
+              <a:buFont typeface="Arial"/>
+              <a:buChar char="—"/>
+            </a:pPr>
+            <a:r>
+              <a:rPr sz="1550" b="0">
+                <a:solidFill>
+                  <a:srgbClr val="EDEFF4"/>
+                </a:solidFill>
+                <a:latin typeface="Arial"/>
+              </a:rPr>
+              <a:t>Handoffs, critique and retries are written to JSONL: which agent acted, on what input, with what status.</a:t>
+            </a:r>
+          </a:p>
+          <a:p>
+            <a:pPr algn="l" marL="274320" indent="-274320">
+              <a:lnSpc>
+                <a:spcPct val="122000"/>
+              </a:lnSpc>
+              <a:spcAft>
+                <a:spcPts val="900"/>
+              </a:spcAft>
+              <a:buFont typeface="Arial"/>
+              <a:buChar char="—"/>
+            </a:pPr>
+            <a:r>
+              <a:rPr sz="1550" b="0">
+                <a:solidFill>
+                  <a:srgbClr val="EDEFF4"/>
+                </a:solidFill>
+                <a:latin typeface="Arial"/>
+              </a:rPr>
+              <a:t>The Skeptic can reject a finding and force re-investigation — rejection is as visible as acceptance.</a:t>
+            </a:r>
+          </a:p>
+          <a:p>
+            <a:pPr algn="l" marL="274320" indent="-274320">
+              <a:lnSpc>
+                <a:spcPct val="122000"/>
+              </a:lnSpc>
+              <a:spcAft>
+                <a:spcPts val="900"/>
+              </a:spcAft>
+              <a:buFont typeface="Arial"/>
+              <a:buChar char="—"/>
+            </a:pPr>
+            <a:r>
+              <a:rPr sz="1550" b="0">
+                <a:solidFill>
+                  <a:srgbClr val="EDEFF4"/>
+                </a:solidFill>
+                <a:latin typeface="Arial"/>
+              </a:rPr>
+              <a:t>A figures guard refuses any number in the report that no evidence item supports.</a:t>
+            </a:r>
+          </a:p>
+          <a:p>
+            <a:pPr algn="l" marL="274320" indent="-274320">
+              <a:lnSpc>
+                <a:spcPct val="122000"/>
+              </a:lnSpc>
+              <a:spcAft>
+                <a:spcPts val="900"/>
+              </a:spcAft>
+              <a:buFont typeface="Arial"/>
+              <a:buChar char="—"/>
+            </a:pPr>
+            <a:r>
+              <a:rPr sz="1550" b="0">
+                <a:solidFill>
+                  <a:srgbClr val="EDEFF4"/>
+                </a:solidFill>
+                <a:latin typeface="Arial"/>
+              </a:rPr>
+              <a:t>Hand-rolled, no orchestration framework: rounds, per-source deadlines and a total budget are all capped.</a:t>
             </a:r>
           </a:p>
         </p:txBody>
@@ -4728,7 +6203,7 @@
     <p:bg>
       <p:bgPr>
         <a:solidFill>
-          <a:srgbClr val="151A23"/>
+          <a:srgbClr val="14161C"/>
         </a:solidFill>
         <a:effectLst/>
       </p:bgPr>
@@ -4742,97 +6217,420 @@
       <p:grpSpPr/>
       <p:sp>
         <p:nvSpPr>
-          <p:cNvPr id="2" name="Title 1"/>
-          <p:cNvSpPr>
-            <a:spLocks noGrp="1"/>
-          </p:cNvSpPr>
-          <p:nvPr>
-            <p:ph type="title"/>
-          </p:nvPr>
-        </p:nvSpPr>
-        <p:spPr/>
-        <p:txBody>
-          <a:bodyPr/>
-          <a:lstStyle/>
-          <a:p>
-            <a:r>
-              <a:rPr>
-                <a:solidFill>
-                  <a:srgbClr val="E8ECF4"/>
-                </a:solidFill>
-              </a:rPr>
-              <a:t>Zetaris: the data plane, live and least-privileged</a:t>
-            </a:r>
-          </a:p>
-        </p:txBody>
-      </p:sp>
-      <p:sp>
-        <p:nvSpPr>
-          <p:cNvPr id="3" name="Content Placeholder 2"/>
-          <p:cNvSpPr>
-            <a:spLocks noGrp="1"/>
-          </p:cNvSpPr>
-          <p:nvPr>
-            <p:ph idx="1"/>
-          </p:nvPr>
-        </p:nvSpPr>
-        <p:spPr/>
-        <p:txBody>
-          <a:bodyPr/>
-          <a:lstStyle/>
-          <a:p>
-            <a:pPr/>
-            <a:r>
-              <a:rPr sz="2000">
-                <a:solidFill>
-                  <a:srgbClr val="DDE3EC"/>
-                </a:solidFill>
-              </a:rPr>
-              <a:t>Policy snapshots published as immutable filestore tables on the live Zetaris gateway (synthetic data, real engine)</a:t>
-            </a:r>
-          </a:p>
-          <a:p>
-            <a:pPr/>
-            <a:r>
-              <a:rPr sz="2000" b="1">
-                <a:solidFill>
-                  <a:srgbClr val="7DD3FC"/>
-                </a:solidFill>
-              </a:rPr>
-              <a:t>The agent fetches policy via two pinned SELECTs — then re-verifies row count, content digest and scope hash after transport, before any agent touches a rule</a:t>
-            </a:r>
-          </a:p>
-          <a:p>
-            <a:pPr/>
-            <a:r>
-              <a:rPr sz="2000">
-                <a:solidFill>
-                  <a:srgbClr val="DDE3EC"/>
-                </a:solidFill>
-              </a:rPr>
-              <a:t>Runtime identity is a SELECT-only user; the refusal of CREATE/GRANT is recorded evidence, not a promise</a:t>
-            </a:r>
-          </a:p>
-          <a:p>
-            <a:pPr/>
-            <a:r>
-              <a:rPr sz="2000">
-                <a:solidFill>
-                  <a:srgbClr val="DDE3EC"/>
-                </a:solidFill>
-              </a:rPr>
-              <a:t>Full operations runbook: staged checksums, ephemeral capability probe first, one statement per request, scripted rollback</a:t>
-            </a:r>
-          </a:p>
-          <a:p>
-            <a:pPr/>
-            <a:r>
-              <a:rPr sz="2000">
-                <a:solidFill>
-                  <a:srgbClr val="94A3B8"/>
-                </a:solidFill>
-              </a:rPr>
-              <a:t>Sample mode never reads sponsor env at all — credentials-free and network-free by test</a:t>
+          <p:cNvPr id="2" name="TextBox 1"/>
+          <p:cNvSpPr txBox="1"/>
+          <p:nvPr/>
+        </p:nvSpPr>
+        <p:spPr>
+          <a:xfrm>
+            <a:off x="914400" y="420624"/>
+            <a:ext cx="10362895" cy="274320"/>
+          </a:xfrm>
+          <a:prstGeom prst="rect">
+            <a:avLst/>
+          </a:prstGeom>
+          <a:noFill/>
+        </p:spPr>
+        <p:txBody>
+          <a:bodyPr wrap="square" anchor="t" lIns="0" rIns="0" tIns="0" bIns="0">
+            <a:spAutoFit/>
+          </a:bodyPr>
+          <a:lstStyle/>
+          <a:p>
+            <a:pPr algn="l">
+              <a:lnSpc>
+                <a:spcPct val="118000"/>
+              </a:lnSpc>
+            </a:pPr>
+            <a:r>
+              <a:rPr sz="1050" b="1">
+                <a:solidFill>
+                  <a:srgbClr val="4FD1C5"/>
+                </a:solidFill>
+                <a:latin typeface="Arial"/>
+              </a:rPr>
+              <a:t>SPONSOR · ZETARIS</a:t>
+            </a:r>
+          </a:p>
+        </p:txBody>
+      </p:sp>
+      <p:sp>
+        <p:nvSpPr>
+          <p:cNvPr id="3" name="TextBox 2"/>
+          <p:cNvSpPr txBox="1"/>
+          <p:nvPr/>
+        </p:nvSpPr>
+        <p:spPr>
+          <a:xfrm>
+            <a:off x="914400" y="713232"/>
+            <a:ext cx="10362895" cy="914400"/>
+          </a:xfrm>
+          <a:prstGeom prst="rect">
+            <a:avLst/>
+          </a:prstGeom>
+          <a:noFill/>
+        </p:spPr>
+        <p:txBody>
+          <a:bodyPr wrap="square" anchor="t" lIns="0" rIns="0" tIns="0" bIns="0">
+            <a:spAutoFit/>
+          </a:bodyPr>
+          <a:lstStyle/>
+          <a:p>
+            <a:pPr algn="l">
+              <a:lnSpc>
+                <a:spcPct val="105000"/>
+              </a:lnSpc>
+            </a:pPr>
+            <a:r>
+              <a:rPr sz="2900" b="1">
+                <a:solidFill>
+                  <a:srgbClr val="EDEFF4"/>
+                </a:solidFill>
+                <a:latin typeface="Arial"/>
+              </a:rPr>
+              <a:t>The data plane, live and least-privileged</a:t>
+            </a:r>
+          </a:p>
+        </p:txBody>
+      </p:sp>
+      <p:cxnSp>
+        <p:nvCxnSpPr>
+          <p:cNvPr id="4" name="Connector 3"/>
+          <p:cNvCxnSpPr/>
+          <p:nvPr/>
+        </p:nvCxnSpPr>
+        <p:spPr>
+          <a:xfrm>
+            <a:off x="914400" y="1627632"/>
+            <a:ext cx="1371600" cy="0"/>
+          </a:xfrm>
+          <a:prstGeom prst="line">
+            <a:avLst/>
+          </a:prstGeom>
+          <a:ln w="31750">
+            <a:solidFill>
+              <a:srgbClr val="4FD1C5"/>
+            </a:solidFill>
+          </a:ln>
+        </p:spPr>
+        <p:style>
+          <a:lnRef idx="2">
+            <a:schemeClr val="accent1"/>
+          </a:lnRef>
+          <a:fillRef idx="0">
+            <a:schemeClr val="accent1"/>
+          </a:fillRef>
+          <a:effectRef idx="1">
+            <a:schemeClr val="accent1"/>
+          </a:effectRef>
+          <a:fontRef idx="minor">
+            <a:schemeClr val="tx1"/>
+          </a:fontRef>
+        </p:style>
+      </p:cxnSp>
+      <p:sp>
+        <p:nvSpPr>
+          <p:cNvPr id="5" name="TextBox 4"/>
+          <p:cNvSpPr txBox="1"/>
+          <p:nvPr/>
+        </p:nvSpPr>
+        <p:spPr>
+          <a:xfrm>
+            <a:off x="914400" y="6291072"/>
+            <a:ext cx="7315200" cy="256032"/>
+          </a:xfrm>
+          <a:prstGeom prst="rect">
+            <a:avLst/>
+          </a:prstGeom>
+          <a:noFill/>
+        </p:spPr>
+        <p:txBody>
+          <a:bodyPr wrap="square" anchor="t" lIns="0" rIns="0" tIns="0" bIns="0">
+            <a:spAutoFit/>
+          </a:bodyPr>
+          <a:lstStyle/>
+          <a:p>
+            <a:pPr algn="l">
+              <a:lnSpc>
+                <a:spcPct val="118000"/>
+              </a:lnSpc>
+            </a:pPr>
+            <a:r>
+              <a:rPr sz="900" b="0">
+                <a:solidFill>
+                  <a:srgbClr val="9BA6B8"/>
+                </a:solidFill>
+                <a:latin typeface="Arial"/>
+              </a:rPr>
+              <a:t>Driftwatch  ·  Open Agent Hackathon 2026  ·  Wildcard [Tinkerer]</a:t>
+            </a:r>
+          </a:p>
+        </p:txBody>
+      </p:sp>
+      <p:sp>
+        <p:nvSpPr>
+          <p:cNvPr id="6" name="TextBox 5"/>
+          <p:cNvSpPr txBox="1"/>
+          <p:nvPr/>
+        </p:nvSpPr>
+        <p:spPr>
+          <a:xfrm>
+            <a:off x="10728655" y="6291072"/>
+            <a:ext cx="548640" cy="256032"/>
+          </a:xfrm>
+          <a:prstGeom prst="rect">
+            <a:avLst/>
+          </a:prstGeom>
+          <a:noFill/>
+        </p:spPr>
+        <p:txBody>
+          <a:bodyPr wrap="square" anchor="t" lIns="0" rIns="0" tIns="0" bIns="0">
+            <a:spAutoFit/>
+          </a:bodyPr>
+          <a:lstStyle/>
+          <a:p>
+            <a:pPr algn="r">
+              <a:lnSpc>
+                <a:spcPct val="118000"/>
+              </a:lnSpc>
+            </a:pPr>
+            <a:r>
+              <a:rPr sz="900" b="0">
+                <a:solidFill>
+                  <a:srgbClr val="9BA6B8"/>
+                </a:solidFill>
+                <a:latin typeface="Arial"/>
+              </a:rPr>
+              <a:t>4</a:t>
+            </a:r>
+          </a:p>
+        </p:txBody>
+      </p:sp>
+      <p:sp>
+        <p:nvSpPr>
+          <p:cNvPr id="7" name="TextBox 6"/>
+          <p:cNvSpPr txBox="1"/>
+          <p:nvPr/>
+        </p:nvSpPr>
+        <p:spPr>
+          <a:xfrm>
+            <a:off x="914400" y="1874519"/>
+            <a:ext cx="7223760" cy="4114800"/>
+          </a:xfrm>
+          <a:prstGeom prst="rect">
+            <a:avLst/>
+          </a:prstGeom>
+          <a:noFill/>
+        </p:spPr>
+        <p:txBody>
+          <a:bodyPr wrap="square" anchor="ctr" lIns="0" rIns="0" tIns="0" bIns="0">
+            <a:spAutoFit/>
+          </a:bodyPr>
+          <a:lstStyle/>
+          <a:p>
+            <a:pPr algn="l" marL="274320" indent="-274320">
+              <a:lnSpc>
+                <a:spcPct val="122000"/>
+              </a:lnSpc>
+              <a:spcAft>
+                <a:spcPts val="1300"/>
+              </a:spcAft>
+              <a:buFont typeface="Arial"/>
+              <a:buChar char="—"/>
+            </a:pPr>
+            <a:r>
+              <a:rPr sz="1700" b="0">
+                <a:solidFill>
+                  <a:srgbClr val="EDEFF4"/>
+                </a:solidFill>
+                <a:latin typeface="Arial"/>
+              </a:rPr>
+              <a:t>Policy snapshots are published as immutable tables on the live Zetaris AI Data Gateway (synthetic data, real engine).</a:t>
+            </a:r>
+          </a:p>
+          <a:p>
+            <a:pPr algn="l" marL="274320" indent="-274320">
+              <a:lnSpc>
+                <a:spcPct val="122000"/>
+              </a:lnSpc>
+              <a:spcAft>
+                <a:spcPts val="1300"/>
+              </a:spcAft>
+              <a:buFont typeface="Arial"/>
+              <a:buChar char="—"/>
+            </a:pPr>
+            <a:r>
+              <a:rPr sz="1700" b="0">
+                <a:solidFill>
+                  <a:srgbClr val="EDEFF4"/>
+                </a:solidFill>
+                <a:latin typeface="Arial"/>
+              </a:rPr>
+              <a:t>The agent fetches them through two pinned SELECTs, then re-verifies row count, content digest and scope hash after transport — before any agent sees a rule.</a:t>
+            </a:r>
+          </a:p>
+          <a:p>
+            <a:pPr algn="l" marL="274320" indent="-274320">
+              <a:lnSpc>
+                <a:spcPct val="122000"/>
+              </a:lnSpc>
+              <a:spcAft>
+                <a:spcPts val="1300"/>
+              </a:spcAft>
+              <a:buFont typeface="Arial"/>
+              <a:buChar char="—"/>
+            </a:pPr>
+            <a:r>
+              <a:rPr sz="1700" b="0">
+                <a:solidFill>
+                  <a:srgbClr val="EDEFF4"/>
+                </a:solidFill>
+                <a:latin typeface="Arial"/>
+              </a:rPr>
+              <a:t>The runtime identity is SELECT-only; the refusal of CREATE and GRANT is recorded evidence, not a promise.</a:t>
+            </a:r>
+          </a:p>
+          <a:p>
+            <a:pPr algn="l" marL="274320" indent="-274320">
+              <a:lnSpc>
+                <a:spcPct val="122000"/>
+              </a:lnSpc>
+              <a:spcAft>
+                <a:spcPts val="1300"/>
+              </a:spcAft>
+              <a:buFont typeface="Arial"/>
+              <a:buChar char="—"/>
+            </a:pPr>
+            <a:r>
+              <a:rPr sz="1700" b="0">
+                <a:solidFill>
+                  <a:srgbClr val="EDEFF4"/>
+                </a:solidFill>
+                <a:latin typeface="Arial"/>
+              </a:rPr>
+              <a:t>A failed digest degrades explicitly to the file source. It never silently serves a rule it could not verify.</a:t>
+            </a:r>
+          </a:p>
+        </p:txBody>
+      </p:sp>
+      <p:sp>
+        <p:nvSpPr>
+          <p:cNvPr id="8" name="Rounded Rectangle 7"/>
+          <p:cNvSpPr/>
+          <p:nvPr/>
+        </p:nvSpPr>
+        <p:spPr>
+          <a:xfrm>
+            <a:off x="8549640" y="1965960"/>
+            <a:ext cx="2724912" cy="1645920"/>
+          </a:xfrm>
+          <a:prstGeom prst="roundRect">
+            <a:avLst>
+              <a:gd name="adj" fmla="val 6000"/>
+            </a:avLst>
+          </a:prstGeom>
+          <a:solidFill>
+            <a:srgbClr val="1E222C"/>
+          </a:solidFill>
+          <a:ln>
+            <a:noFill/>
+          </a:ln>
+          <a:effectLst/>
+        </p:spPr>
+        <p:txBody>
+          <a:bodyPr rtlCol="0" anchor="t" wrap="square" lIns="164592" rIns="164592" tIns="91440" bIns="91440"/>
+          <a:lstStyle/>
+          <a:p>
+            <a:pPr algn="l">
+              <a:lnSpc>
+                <a:spcPct val="100000"/>
+              </a:lnSpc>
+            </a:pPr>
+            <a:r>
+              <a:rPr sz="3400" b="1">
+                <a:solidFill>
+                  <a:srgbClr val="4FD1C5"/>
+                </a:solidFill>
+                <a:latin typeface="Arial"/>
+              </a:rPr>
+              <a:t>1 → 0</a:t>
+            </a:r>
+          </a:p>
+          <a:p>
+            <a:pPr algn="l">
+              <a:lnSpc>
+                <a:spcPct val="120000"/>
+              </a:lnSpc>
+            </a:pPr>
+            <a:r>
+              <a:rPr sz="1150" b="0">
+                <a:solidFill>
+                  <a:srgbClr val="9BA6B8"/>
+                </a:solidFill>
+                <a:latin typeface="Arial"/>
+              </a:rPr>
+              <a:t>Republish without rule R-1: exactly one finding disappears, everything else is unchanged</a:t>
+            </a:r>
+          </a:p>
+        </p:txBody>
+      </p:sp>
+      <p:sp>
+        <p:nvSpPr>
+          <p:cNvPr id="9" name="Rounded Rectangle 8"/>
+          <p:cNvSpPr/>
+          <p:nvPr/>
+        </p:nvSpPr>
+        <p:spPr>
+          <a:xfrm>
+            <a:off x="8549640" y="3840480"/>
+            <a:ext cx="2724912" cy="1645920"/>
+          </a:xfrm>
+          <a:prstGeom prst="roundRect">
+            <a:avLst>
+              <a:gd name="adj" fmla="val 6000"/>
+            </a:avLst>
+          </a:prstGeom>
+          <a:solidFill>
+            <a:srgbClr val="1E222C"/>
+          </a:solidFill>
+          <a:ln>
+            <a:noFill/>
+          </a:ln>
+          <a:effectLst/>
+        </p:spPr>
+        <p:txBody>
+          <a:bodyPr rtlCol="0" anchor="t" wrap="square" lIns="164592" rIns="164592" tIns="91440" bIns="91440"/>
+          <a:lstStyle/>
+          <a:p>
+            <a:pPr algn="l">
+              <a:lnSpc>
+                <a:spcPct val="100000"/>
+              </a:lnSpc>
+            </a:pPr>
+            <a:r>
+              <a:rPr sz="3400" b="1">
+                <a:solidFill>
+                  <a:srgbClr val="F2B36B"/>
+                </a:solidFill>
+                <a:latin typeface="Arial"/>
+              </a:rPr>
+              <a:t>2 SELECTs</a:t>
+            </a:r>
+          </a:p>
+          <a:p>
+            <a:pPr algn="l">
+              <a:lnSpc>
+                <a:spcPct val="120000"/>
+              </a:lnSpc>
+            </a:pPr>
+            <a:r>
+              <a:rPr sz="1150" b="0">
+                <a:solidFill>
+                  <a:srgbClr val="9BA6B8"/>
+                </a:solidFill>
+                <a:latin typeface="Arial"/>
+              </a:rPr>
+              <a:t>Pinned queries, digest and scope re-validated after the wire</a:t>
             </a:r>
           </a:p>
         </p:txBody>
@@ -4848,6 +6646,14 @@
 <file path=ppt/slides/slide5.xml><?xml version="1.0" encoding="utf-8"?>
 <p:sld xmlns:a="http://schemas.openxmlformats.org/drawingml/2006/main" xmlns:p="http://schemas.openxmlformats.org/presentationml/2006/main" xmlns:r="http://schemas.openxmlformats.org/officeDocument/2006/relationships">
   <p:cSld>
+    <p:bg>
+      <p:bgPr>
+        <a:solidFill>
+          <a:srgbClr val="14161C"/>
+        </a:solidFill>
+        <a:effectLst/>
+      </p:bgPr>
+    </p:bg>
     <p:spTree>
       <p:nvGrpSpPr>
         <p:cNvPr id="1" name=""/>
@@ -4857,97 +6663,420 @@
       <p:grpSpPr/>
       <p:sp>
         <p:nvSpPr>
-          <p:cNvPr id="2" name="Title 1"/>
-          <p:cNvSpPr>
-            <a:spLocks noGrp="1"/>
-          </p:cNvSpPr>
-          <p:nvPr>
-            <p:ph type="title"/>
-          </p:nvPr>
-        </p:nvSpPr>
-        <p:spPr/>
-        <p:txBody>
-          <a:bodyPr/>
-          <a:lstStyle/>
-          <a:p>
-            <a:r>
-              <a:rPr>
-                <a:solidFill>
-                  <a:srgbClr val="E8ECF4"/>
-                </a:solidFill>
-              </a:rPr>
-              <a:t>Meterless: the engine is load-bearing, the provider is honest</a:t>
-            </a:r>
-          </a:p>
-        </p:txBody>
-      </p:sp>
-      <p:sp>
-        <p:nvSpPr>
-          <p:cNvPr id="3" name="Content Placeholder 2"/>
-          <p:cNvSpPr>
-            <a:spLocks noGrp="1"/>
-          </p:cNvSpPr>
-          <p:nvPr>
-            <p:ph idx="1"/>
-          </p:nvPr>
-        </p:nvSpPr>
-        <p:spPr/>
-        <p:txBody>
-          <a:bodyPr/>
-          <a:lstStyle/>
-          <a:p>
-            <a:pPr/>
-            <a:r>
-              <a:rPr sz="1700">
-                <a:solidFill>
-                  <a:srgbClr val="DDE3EC"/>
-                </a:solidFill>
-              </a:rPr>
-              <a:t>World Model engine in app/world_model/ — immutable observation store, validated ingestion, context pinned to one exact run</a:t>
-            </a:r>
-          </a:p>
-          <a:p>
-            <a:pPr/>
-            <a:r>
-              <a:rPr sz="1700">
-                <a:solidFill>
-                  <a:srgbClr val="DDE3EC"/>
-                </a:solidFill>
-              </a:rPr>
-              <a:t>Scout and Skeptic both read through it; every finding carries the provenance of the observation behind it</a:t>
-            </a:r>
-          </a:p>
-          <a:p>
-            <a:pPr/>
-            <a:r>
-              <a:rPr sz="1700">
-                <a:solidFill>
-                  <a:srgbClr val="7DD3FC"/>
-                </a:solidFill>
-              </a:rPr>
-              <a:t>Acceptance is generated, not written: verify_world_model.py rebuilds the proof offline, with no credentials</a:t>
-            </a:r>
-          </a:p>
-          <a:p>
-            <a:pPr/>
-            <a:r>
-              <a:rPr sz="1700">
-                <a:solidFill>
-                  <a:srgbClr val="DDE3EC"/>
-                </a:solidFill>
-              </a:rPr>
-              <a:t>Nightshift is wired to the documented contract — bearer auth, /v1/models discovery, 60s budget, redirects refused — and contract-tested</a:t>
-            </a:r>
-          </a:p>
-          <a:p>
-            <a:pPr/>
-            <a:r>
-              <a:rPr sz="1700" i="1">
-                <a:solidFill>
-                  <a:srgbClr val="94A3B8"/>
-                </a:solidFill>
-              </a:rPr>
-              <a:t>Not yet live: the vendor's Mac build fails Gatekeeper and we did not bypass it, so the report says not_used</a:t>
+          <p:cNvPr id="2" name="TextBox 1"/>
+          <p:cNvSpPr txBox="1"/>
+          <p:nvPr/>
+        </p:nvSpPr>
+        <p:spPr>
+          <a:xfrm>
+            <a:off x="914400" y="420624"/>
+            <a:ext cx="10362895" cy="274320"/>
+          </a:xfrm>
+          <a:prstGeom prst="rect">
+            <a:avLst/>
+          </a:prstGeom>
+          <a:noFill/>
+        </p:spPr>
+        <p:txBody>
+          <a:bodyPr wrap="square" anchor="t" lIns="0" rIns="0" tIns="0" bIns="0">
+            <a:spAutoFit/>
+          </a:bodyPr>
+          <a:lstStyle/>
+          <a:p>
+            <a:pPr algn="l">
+              <a:lnSpc>
+                <a:spcPct val="118000"/>
+              </a:lnSpc>
+            </a:pPr>
+            <a:r>
+              <a:rPr sz="1050" b="1">
+                <a:solidFill>
+                  <a:srgbClr val="4FD1C5"/>
+                </a:solidFill>
+                <a:latin typeface="Arial"/>
+              </a:rPr>
+              <a:t>SPONSOR · METERLESS ENGINE</a:t>
+            </a:r>
+          </a:p>
+        </p:txBody>
+      </p:sp>
+      <p:sp>
+        <p:nvSpPr>
+          <p:cNvPr id="3" name="TextBox 2"/>
+          <p:cNvSpPr txBox="1"/>
+          <p:nvPr/>
+        </p:nvSpPr>
+        <p:spPr>
+          <a:xfrm>
+            <a:off x="914400" y="713232"/>
+            <a:ext cx="10362895" cy="914400"/>
+          </a:xfrm>
+          <a:prstGeom prst="rect">
+            <a:avLst/>
+          </a:prstGeom>
+          <a:noFill/>
+        </p:spPr>
+        <p:txBody>
+          <a:bodyPr wrap="square" anchor="t" lIns="0" rIns="0" tIns="0" bIns="0">
+            <a:spAutoFit/>
+          </a:bodyPr>
+          <a:lstStyle/>
+          <a:p>
+            <a:pPr algn="l">
+              <a:lnSpc>
+                <a:spcPct val="105000"/>
+              </a:lnSpc>
+            </a:pPr>
+            <a:r>
+              <a:rPr sz="2900" b="1">
+                <a:solidFill>
+                  <a:srgbClr val="EDEFF4"/>
+                </a:solidFill>
+                <a:latin typeface="Arial"/>
+              </a:rPr>
+              <a:t>The World Model is load-bearing</a:t>
+            </a:r>
+          </a:p>
+        </p:txBody>
+      </p:sp>
+      <p:cxnSp>
+        <p:nvCxnSpPr>
+          <p:cNvPr id="4" name="Connector 3"/>
+          <p:cNvCxnSpPr/>
+          <p:nvPr/>
+        </p:nvCxnSpPr>
+        <p:spPr>
+          <a:xfrm>
+            <a:off x="914400" y="1627632"/>
+            <a:ext cx="1371600" cy="0"/>
+          </a:xfrm>
+          <a:prstGeom prst="line">
+            <a:avLst/>
+          </a:prstGeom>
+          <a:ln w="31750">
+            <a:solidFill>
+              <a:srgbClr val="4FD1C5"/>
+            </a:solidFill>
+          </a:ln>
+        </p:spPr>
+        <p:style>
+          <a:lnRef idx="2">
+            <a:schemeClr val="accent1"/>
+          </a:lnRef>
+          <a:fillRef idx="0">
+            <a:schemeClr val="accent1"/>
+          </a:fillRef>
+          <a:effectRef idx="1">
+            <a:schemeClr val="accent1"/>
+          </a:effectRef>
+          <a:fontRef idx="minor">
+            <a:schemeClr val="tx1"/>
+          </a:fontRef>
+        </p:style>
+      </p:cxnSp>
+      <p:sp>
+        <p:nvSpPr>
+          <p:cNvPr id="5" name="TextBox 4"/>
+          <p:cNvSpPr txBox="1"/>
+          <p:nvPr/>
+        </p:nvSpPr>
+        <p:spPr>
+          <a:xfrm>
+            <a:off x="914400" y="6291072"/>
+            <a:ext cx="7315200" cy="256032"/>
+          </a:xfrm>
+          <a:prstGeom prst="rect">
+            <a:avLst/>
+          </a:prstGeom>
+          <a:noFill/>
+        </p:spPr>
+        <p:txBody>
+          <a:bodyPr wrap="square" anchor="t" lIns="0" rIns="0" tIns="0" bIns="0">
+            <a:spAutoFit/>
+          </a:bodyPr>
+          <a:lstStyle/>
+          <a:p>
+            <a:pPr algn="l">
+              <a:lnSpc>
+                <a:spcPct val="118000"/>
+              </a:lnSpc>
+            </a:pPr>
+            <a:r>
+              <a:rPr sz="900" b="0">
+                <a:solidFill>
+                  <a:srgbClr val="9BA6B8"/>
+                </a:solidFill>
+                <a:latin typeface="Arial"/>
+              </a:rPr>
+              <a:t>Driftwatch  ·  Open Agent Hackathon 2026  ·  Wildcard [Tinkerer]</a:t>
+            </a:r>
+          </a:p>
+        </p:txBody>
+      </p:sp>
+      <p:sp>
+        <p:nvSpPr>
+          <p:cNvPr id="6" name="TextBox 5"/>
+          <p:cNvSpPr txBox="1"/>
+          <p:nvPr/>
+        </p:nvSpPr>
+        <p:spPr>
+          <a:xfrm>
+            <a:off x="10728655" y="6291072"/>
+            <a:ext cx="548640" cy="256032"/>
+          </a:xfrm>
+          <a:prstGeom prst="rect">
+            <a:avLst/>
+          </a:prstGeom>
+          <a:noFill/>
+        </p:spPr>
+        <p:txBody>
+          <a:bodyPr wrap="square" anchor="t" lIns="0" rIns="0" tIns="0" bIns="0">
+            <a:spAutoFit/>
+          </a:bodyPr>
+          <a:lstStyle/>
+          <a:p>
+            <a:pPr algn="r">
+              <a:lnSpc>
+                <a:spcPct val="118000"/>
+              </a:lnSpc>
+            </a:pPr>
+            <a:r>
+              <a:rPr sz="900" b="0">
+                <a:solidFill>
+                  <a:srgbClr val="9BA6B8"/>
+                </a:solidFill>
+                <a:latin typeface="Arial"/>
+              </a:rPr>
+              <a:t>5</a:t>
+            </a:r>
+          </a:p>
+        </p:txBody>
+      </p:sp>
+      <p:sp>
+        <p:nvSpPr>
+          <p:cNvPr id="7" name="TextBox 6"/>
+          <p:cNvSpPr txBox="1"/>
+          <p:nvPr/>
+        </p:nvSpPr>
+        <p:spPr>
+          <a:xfrm>
+            <a:off x="914400" y="1874519"/>
+            <a:ext cx="7223760" cy="4114800"/>
+          </a:xfrm>
+          <a:prstGeom prst="rect">
+            <a:avLst/>
+          </a:prstGeom>
+          <a:noFill/>
+        </p:spPr>
+        <p:txBody>
+          <a:bodyPr wrap="square" anchor="ctr" lIns="0" rIns="0" tIns="0" bIns="0">
+            <a:spAutoFit/>
+          </a:bodyPr>
+          <a:lstStyle/>
+          <a:p>
+            <a:pPr algn="l" marL="274320" indent="-274320">
+              <a:lnSpc>
+                <a:spcPct val="122000"/>
+              </a:lnSpc>
+              <a:spcAft>
+                <a:spcPts val="1300"/>
+              </a:spcAft>
+              <a:buFont typeface="Arial"/>
+              <a:buChar char="—"/>
+            </a:pPr>
+            <a:r>
+              <a:rPr sz="1700" b="0">
+                <a:solidFill>
+                  <a:srgbClr val="EDEFF4"/>
+                </a:solidFill>
+                <a:latin typeface="Arial"/>
+              </a:rPr>
+              <a:t>An engine in app/world_model/: an immutable observation store, validated ingestion, and a context builder whose selections pin one exact run and source revision.</a:t>
+            </a:r>
+          </a:p>
+          <a:p>
+            <a:pPr algn="l" marL="274320" indent="-274320">
+              <a:lnSpc>
+                <a:spcPct val="122000"/>
+              </a:lnSpc>
+              <a:spcAft>
+                <a:spcPts val="1300"/>
+              </a:spcAft>
+              <a:buFont typeface="Arial"/>
+              <a:buChar char="—"/>
+            </a:pPr>
+            <a:r>
+              <a:rPr sz="1700" b="0">
+                <a:solidFill>
+                  <a:srgbClr val="EDEFF4"/>
+                </a:solidFill>
+                <a:latin typeface="Arial"/>
+              </a:rPr>
+              <a:t>Scout and Skeptic both read their context through it. Every finding carries the provenance of the observation behind it.</a:t>
+            </a:r>
+          </a:p>
+          <a:p>
+            <a:pPr algn="l" marL="274320" indent="-274320">
+              <a:lnSpc>
+                <a:spcPct val="122000"/>
+              </a:lnSpc>
+              <a:spcAft>
+                <a:spcPts val="1300"/>
+              </a:spcAft>
+              <a:buFont typeface="Arial"/>
+              <a:buChar char="—"/>
+            </a:pPr>
+            <a:r>
+              <a:rPr sz="1700" b="0">
+                <a:solidFill>
+                  <a:srgbClr val="EDEFF4"/>
+                </a:solidFill>
+                <a:latin typeface="Arial"/>
+              </a:rPr>
+              <a:t>Observations cannot be rewritten in place; a later snapshot cannot retro-fit an earlier candidate.</a:t>
+            </a:r>
+          </a:p>
+          <a:p>
+            <a:pPr algn="l" marL="274320" indent="-274320">
+              <a:lnSpc>
+                <a:spcPct val="122000"/>
+              </a:lnSpc>
+              <a:spcAft>
+                <a:spcPts val="1300"/>
+              </a:spcAft>
+              <a:buFont typeface="Arial"/>
+              <a:buChar char="—"/>
+            </a:pPr>
+            <a:r>
+              <a:rPr sz="1700" b="0">
+                <a:solidFill>
+                  <a:srgbClr val="EDEFF4"/>
+                </a:solidFill>
+                <a:latin typeface="Arial"/>
+              </a:rPr>
+              <a:t>Acceptance is generated, not written: scripts/verify_world_model.py regenerates the proof offline, with no credentials and no network.</a:t>
+            </a:r>
+          </a:p>
+        </p:txBody>
+      </p:sp>
+      <p:sp>
+        <p:nvSpPr>
+          <p:cNvPr id="8" name="Rounded Rectangle 7"/>
+          <p:cNvSpPr/>
+          <p:nvPr/>
+        </p:nvSpPr>
+        <p:spPr>
+          <a:xfrm>
+            <a:off x="8549640" y="1965960"/>
+            <a:ext cx="2724912" cy="1645920"/>
+          </a:xfrm>
+          <a:prstGeom prst="roundRect">
+            <a:avLst>
+              <a:gd name="adj" fmla="val 6000"/>
+            </a:avLst>
+          </a:prstGeom>
+          <a:solidFill>
+            <a:srgbClr val="1E222C"/>
+          </a:solidFill>
+          <a:ln>
+            <a:noFill/>
+          </a:ln>
+          <a:effectLst/>
+        </p:spPr>
+        <p:txBody>
+          <a:bodyPr rtlCol="0" anchor="t" wrap="square" lIns="164592" rIns="164592" tIns="91440" bIns="91440"/>
+          <a:lstStyle/>
+          <a:p>
+            <a:pPr algn="l">
+              <a:lnSpc>
+                <a:spcPct val="100000"/>
+              </a:lnSpc>
+            </a:pPr>
+            <a:r>
+              <a:rPr sz="3400" b="1">
+                <a:solidFill>
+                  <a:srgbClr val="4FD1C5"/>
+                </a:solidFill>
+                <a:latin typeface="Arial"/>
+              </a:rPr>
+              <a:t>2 agents</a:t>
+            </a:r>
+          </a:p>
+          <a:p>
+            <a:pPr algn="l">
+              <a:lnSpc>
+                <a:spcPct val="120000"/>
+              </a:lnSpc>
+            </a:pPr>
+            <a:r>
+              <a:rPr sz="1150" b="0">
+                <a:solidFill>
+                  <a:srgbClr val="9BA6B8"/>
+                </a:solidFill>
+                <a:latin typeface="Arial"/>
+              </a:rPr>
+              <a:t>Scout and Skeptic both read their context through it — not renamed state, not an unused store</a:t>
+            </a:r>
+          </a:p>
+        </p:txBody>
+      </p:sp>
+      <p:sp>
+        <p:nvSpPr>
+          <p:cNvPr id="9" name="Rounded Rectangle 8"/>
+          <p:cNvSpPr/>
+          <p:nvPr/>
+        </p:nvSpPr>
+        <p:spPr>
+          <a:xfrm>
+            <a:off x="8549640" y="3840480"/>
+            <a:ext cx="2724912" cy="1645920"/>
+          </a:xfrm>
+          <a:prstGeom prst="roundRect">
+            <a:avLst>
+              <a:gd name="adj" fmla="val 6000"/>
+            </a:avLst>
+          </a:prstGeom>
+          <a:solidFill>
+            <a:srgbClr val="1E222C"/>
+          </a:solidFill>
+          <a:ln>
+            <a:noFill/>
+          </a:ln>
+          <a:effectLst/>
+        </p:spPr>
+        <p:txBody>
+          <a:bodyPr rtlCol="0" anchor="t" wrap="square" lIns="164592" rIns="164592" tIns="91440" bIns="91440"/>
+          <a:lstStyle/>
+          <a:p>
+            <a:pPr algn="l">
+              <a:lnSpc>
+                <a:spcPct val="100000"/>
+              </a:lnSpc>
+            </a:pPr>
+            <a:r>
+              <a:rPr sz="3400" b="1">
+                <a:solidFill>
+                  <a:srgbClr val="F2B36B"/>
+                </a:solidFill>
+                <a:latin typeface="Arial"/>
+              </a:rPr>
+              <a:t>offline</a:t>
+            </a:r>
+          </a:p>
+          <a:p>
+            <a:pPr algn="l">
+              <a:lnSpc>
+                <a:spcPct val="120000"/>
+              </a:lnSpc>
+            </a:pPr>
+            <a:r>
+              <a:rPr sz="1150" b="0">
+                <a:solidFill>
+                  <a:srgbClr val="9BA6B8"/>
+                </a:solidFill>
+                <a:latin typeface="Arial"/>
+              </a:rPr>
+              <a:t>Proof regenerated locally; no sponsor runtime required to check it</a:t>
             </a:r>
           </a:p>
         </p:txBody>
@@ -4966,7 +7095,7 @@
     <p:bg>
       <p:bgPr>
         <a:solidFill>
-          <a:srgbClr val="151A23"/>
+          <a:srgbClr val="14161C"/>
         </a:solidFill>
         <a:effectLst/>
       </p:bgPr>
@@ -4980,26 +7109,445 @@
       <p:grpSpPr/>
       <p:sp>
         <p:nvSpPr>
-          <p:cNvPr id="2" name="Title 1"/>
-          <p:cNvSpPr>
-            <a:spLocks noGrp="1"/>
-          </p:cNvSpPr>
-          <p:nvPr>
-            <p:ph type="title"/>
-          </p:nvPr>
-        </p:nvSpPr>
-        <p:spPr/>
-        <p:txBody>
-          <a:bodyPr/>
-          <a:lstStyle/>
-          <a:p>
-            <a:r>
-              <a:rPr>
-                <a:solidFill>
-                  <a:srgbClr val="E8ECF4"/>
-                </a:solidFill>
-              </a:rPr>
-              <a:t>The causal experiment — not a demo branch</a:t>
+          <p:cNvPr id="2" name="TextBox 1"/>
+          <p:cNvSpPr txBox="1"/>
+          <p:nvPr/>
+        </p:nvSpPr>
+        <p:spPr>
+          <a:xfrm>
+            <a:off x="914400" y="420624"/>
+            <a:ext cx="10362895" cy="274320"/>
+          </a:xfrm>
+          <a:prstGeom prst="rect">
+            <a:avLst/>
+          </a:prstGeom>
+          <a:noFill/>
+        </p:spPr>
+        <p:txBody>
+          <a:bodyPr wrap="square" anchor="t" lIns="0" rIns="0" tIns="0" bIns="0">
+            <a:spAutoFit/>
+          </a:bodyPr>
+          <a:lstStyle/>
+          <a:p>
+            <a:pPr algn="l">
+              <a:lnSpc>
+                <a:spcPct val="118000"/>
+              </a:lnSpc>
+            </a:pPr>
+            <a:r>
+              <a:rPr sz="1050" b="1">
+                <a:solidFill>
+                  <a:srgbClr val="4FD1C5"/>
+                </a:solidFill>
+                <a:latin typeface="Arial"/>
+              </a:rPr>
+              <a:t>SPONSOR · METERLESS PROVIDER</a:t>
+            </a:r>
+          </a:p>
+        </p:txBody>
+      </p:sp>
+      <p:sp>
+        <p:nvSpPr>
+          <p:cNvPr id="3" name="TextBox 2"/>
+          <p:cNvSpPr txBox="1"/>
+          <p:nvPr/>
+        </p:nvSpPr>
+        <p:spPr>
+          <a:xfrm>
+            <a:off x="914400" y="713232"/>
+            <a:ext cx="10362895" cy="914400"/>
+          </a:xfrm>
+          <a:prstGeom prst="rect">
+            <a:avLst/>
+          </a:prstGeom>
+          <a:noFill/>
+        </p:spPr>
+        <p:txBody>
+          <a:bodyPr wrap="square" anchor="t" lIns="0" rIns="0" tIns="0" bIns="0">
+            <a:spAutoFit/>
+          </a:bodyPr>
+          <a:lstStyle/>
+          <a:p>
+            <a:pPr algn="l">
+              <a:lnSpc>
+                <a:spcPct val="105000"/>
+              </a:lnSpc>
+            </a:pPr>
+            <a:r>
+              <a:rPr sz="2900" b="1">
+                <a:solidFill>
+                  <a:srgbClr val="EDEFF4"/>
+                </a:solidFill>
+                <a:latin typeface="Arial"/>
+              </a:rPr>
+              <a:t>Nightshift: wired, not yet live</a:t>
+            </a:r>
+          </a:p>
+        </p:txBody>
+      </p:sp>
+      <p:cxnSp>
+        <p:nvCxnSpPr>
+          <p:cNvPr id="4" name="Connector 3"/>
+          <p:cNvCxnSpPr/>
+          <p:nvPr/>
+        </p:nvCxnSpPr>
+        <p:spPr>
+          <a:xfrm>
+            <a:off x="914400" y="1627632"/>
+            <a:ext cx="1371600" cy="0"/>
+          </a:xfrm>
+          <a:prstGeom prst="line">
+            <a:avLst/>
+          </a:prstGeom>
+          <a:ln w="31750">
+            <a:solidFill>
+              <a:srgbClr val="4FD1C5"/>
+            </a:solidFill>
+          </a:ln>
+        </p:spPr>
+        <p:style>
+          <a:lnRef idx="2">
+            <a:schemeClr val="accent1"/>
+          </a:lnRef>
+          <a:fillRef idx="0">
+            <a:schemeClr val="accent1"/>
+          </a:fillRef>
+          <a:effectRef idx="1">
+            <a:schemeClr val="accent1"/>
+          </a:effectRef>
+          <a:fontRef idx="minor">
+            <a:schemeClr val="tx1"/>
+          </a:fontRef>
+        </p:style>
+      </p:cxnSp>
+      <p:sp>
+        <p:nvSpPr>
+          <p:cNvPr id="5" name="TextBox 4"/>
+          <p:cNvSpPr txBox="1"/>
+          <p:nvPr/>
+        </p:nvSpPr>
+        <p:spPr>
+          <a:xfrm>
+            <a:off x="914400" y="6291072"/>
+            <a:ext cx="7315200" cy="256032"/>
+          </a:xfrm>
+          <a:prstGeom prst="rect">
+            <a:avLst/>
+          </a:prstGeom>
+          <a:noFill/>
+        </p:spPr>
+        <p:txBody>
+          <a:bodyPr wrap="square" anchor="t" lIns="0" rIns="0" tIns="0" bIns="0">
+            <a:spAutoFit/>
+          </a:bodyPr>
+          <a:lstStyle/>
+          <a:p>
+            <a:pPr algn="l">
+              <a:lnSpc>
+                <a:spcPct val="118000"/>
+              </a:lnSpc>
+            </a:pPr>
+            <a:r>
+              <a:rPr sz="900" b="0">
+                <a:solidFill>
+                  <a:srgbClr val="9BA6B8"/>
+                </a:solidFill>
+                <a:latin typeface="Arial"/>
+              </a:rPr>
+              <a:t>Driftwatch  ·  Open Agent Hackathon 2026  ·  Wildcard [Tinkerer]</a:t>
+            </a:r>
+          </a:p>
+        </p:txBody>
+      </p:sp>
+      <p:sp>
+        <p:nvSpPr>
+          <p:cNvPr id="6" name="TextBox 5"/>
+          <p:cNvSpPr txBox="1"/>
+          <p:nvPr/>
+        </p:nvSpPr>
+        <p:spPr>
+          <a:xfrm>
+            <a:off x="10728655" y="6291072"/>
+            <a:ext cx="548640" cy="256032"/>
+          </a:xfrm>
+          <a:prstGeom prst="rect">
+            <a:avLst/>
+          </a:prstGeom>
+          <a:noFill/>
+        </p:spPr>
+        <p:txBody>
+          <a:bodyPr wrap="square" anchor="t" lIns="0" rIns="0" tIns="0" bIns="0">
+            <a:spAutoFit/>
+          </a:bodyPr>
+          <a:lstStyle/>
+          <a:p>
+            <a:pPr algn="r">
+              <a:lnSpc>
+                <a:spcPct val="118000"/>
+              </a:lnSpc>
+            </a:pPr>
+            <a:r>
+              <a:rPr sz="900" b="0">
+                <a:solidFill>
+                  <a:srgbClr val="9BA6B8"/>
+                </a:solidFill>
+                <a:latin typeface="Arial"/>
+              </a:rPr>
+              <a:t>6</a:t>
+            </a:r>
+          </a:p>
+        </p:txBody>
+      </p:sp>
+      <p:sp>
+        <p:nvSpPr>
+          <p:cNvPr id="7" name="TextBox 6"/>
+          <p:cNvSpPr txBox="1"/>
+          <p:nvPr/>
+        </p:nvSpPr>
+        <p:spPr>
+          <a:xfrm>
+            <a:off x="914400" y="1874519"/>
+            <a:ext cx="7223760" cy="4114800"/>
+          </a:xfrm>
+          <a:prstGeom prst="rect">
+            <a:avLst/>
+          </a:prstGeom>
+          <a:noFill/>
+        </p:spPr>
+        <p:txBody>
+          <a:bodyPr wrap="square" anchor="ctr" lIns="0" rIns="0" tIns="0" bIns="0">
+            <a:spAutoFit/>
+          </a:bodyPr>
+          <a:lstStyle/>
+          <a:p>
+            <a:pPr algn="l" marL="274320" indent="-274320">
+              <a:lnSpc>
+                <a:spcPct val="122000"/>
+              </a:lnSpc>
+              <a:spcAft>
+                <a:spcPts val="1300"/>
+              </a:spcAft>
+              <a:buFont typeface="Arial"/>
+              <a:buChar char="—"/>
+            </a:pPr>
+            <a:r>
+              <a:rPr sz="1700" b="0">
+                <a:solidFill>
+                  <a:srgbClr val="EDEFF4"/>
+                </a:solidFill>
+                <a:latin typeface="Arial"/>
+              </a:rPr>
+              <a:t>The provider implements the documented contract: bearer auth, meterless-app header, /v1/models discovery before selection, three JSON schemas, a 60-second budget.</a:t>
+            </a:r>
+          </a:p>
+          <a:p>
+            <a:pPr algn="l" marL="274320" indent="-274320">
+              <a:lnSpc>
+                <a:spcPct val="122000"/>
+              </a:lnSpc>
+              <a:spcAft>
+                <a:spcPts val="1300"/>
+              </a:spcAft>
+              <a:buFont typeface="Arial"/>
+              <a:buChar char="—"/>
+            </a:pPr>
+            <a:r>
+              <a:rPr sz="1700" b="0">
+                <a:solidFill>
+                  <a:srgbClr val="EDEFF4"/>
+                </a:solidFill>
+                <a:latin typeface="Arial"/>
+              </a:rPr>
+              <a:t>Redirects are refused, automatic POST retries are disabled, and a slow body cannot outrun the remaining audit deadline.</a:t>
+            </a:r>
+          </a:p>
+          <a:p>
+            <a:pPr algn="l" marL="274320" indent="-274320">
+              <a:lnSpc>
+                <a:spcPct val="122000"/>
+              </a:lnSpc>
+              <a:spcAft>
+                <a:spcPts val="1300"/>
+              </a:spcAft>
+              <a:buFont typeface="Arial"/>
+              <a:buChar char="—"/>
+            </a:pPr>
+            <a:r>
+              <a:rPr sz="1700" b="0">
+                <a:solidFill>
+                  <a:srgbClr val="EDEFF4"/>
+                </a:solidFill>
+                <a:latin typeface="Arial"/>
+              </a:rPr>
+              <a:t>Accounting is truthful: real attempts, real fallbacks, and zero attempts reported as not_used rather than dressed up as a success.</a:t>
+            </a:r>
+          </a:p>
+          <a:p>
+            <a:pPr algn="l" marL="274320" indent="-274320">
+              <a:lnSpc>
+                <a:spcPct val="122000"/>
+              </a:lnSpc>
+              <a:spcAft>
+                <a:spcPts val="1300"/>
+              </a:spcAft>
+              <a:buFont typeface="Arial"/>
+              <a:buChar char="—"/>
+            </a:pPr>
+            <a:r>
+              <a:rPr sz="1700" b="0">
+                <a:solidFill>
+                  <a:srgbClr val="EDEFF4"/>
+                </a:solidFill>
+                <a:latin typeface="Arial"/>
+              </a:rPr>
+              <a:t>No request has been served. The vendor’s Mac builds are ad-hoc signed and Gatekeeper rejects them; we did not bypass macOS security.</a:t>
+            </a:r>
+          </a:p>
+        </p:txBody>
+      </p:sp>
+      <p:sp>
+        <p:nvSpPr>
+          <p:cNvPr id="8" name="Rounded Rectangle 7"/>
+          <p:cNvSpPr/>
+          <p:nvPr/>
+        </p:nvSpPr>
+        <p:spPr>
+          <a:xfrm>
+            <a:off x="8549640" y="1965960"/>
+            <a:ext cx="2724912" cy="960120"/>
+          </a:xfrm>
+          <a:prstGeom prst="roundRect">
+            <a:avLst>
+              <a:gd name="adj" fmla="val 6000"/>
+            </a:avLst>
+          </a:prstGeom>
+          <a:solidFill>
+            <a:srgbClr val="1E222C"/>
+          </a:solidFill>
+          <a:ln>
+            <a:noFill/>
+          </a:ln>
+          <a:effectLst/>
+        </p:spPr>
+        <p:txBody>
+          <a:bodyPr rtlCol="0" anchor="t" wrap="square" lIns="164592" rIns="164592" tIns="91440" bIns="91440"/>
+          <a:lstStyle/>
+          <a:p>
+            <a:pPr algn="l">
+              <a:lnSpc>
+                <a:spcPct val="100000"/>
+              </a:lnSpc>
+            </a:pPr>
+            <a:r>
+              <a:rPr sz="1100" b="0">
+                <a:solidFill>
+                  <a:srgbClr val="9BA6B8"/>
+                </a:solidFill>
+                <a:latin typeface="Arial"/>
+              </a:rPr>
+              <a:t>nightshift</a:t>
+            </a:r>
+          </a:p>
+          <a:p>
+            <a:pPr algn="l">
+              <a:lnSpc>
+                <a:spcPct val="110000"/>
+              </a:lnSpc>
+            </a:pPr>
+            <a:r>
+              <a:rPr sz="2000" b="1">
+                <a:solidFill>
+                  <a:srgbClr val="F2B36B"/>
+                </a:solidFill>
+                <a:latin typeface="Arial"/>
+              </a:rPr>
+              <a:t>not_used</a:t>
+            </a:r>
+          </a:p>
+        </p:txBody>
+      </p:sp>
+      <p:sp>
+        <p:nvSpPr>
+          <p:cNvPr id="9" name="Rounded Rectangle 8"/>
+          <p:cNvSpPr/>
+          <p:nvPr/>
+        </p:nvSpPr>
+        <p:spPr>
+          <a:xfrm>
+            <a:off x="8549640" y="3063240"/>
+            <a:ext cx="2724912" cy="1481328"/>
+          </a:xfrm>
+          <a:prstGeom prst="roundRect">
+            <a:avLst>
+              <a:gd name="adj" fmla="val 6000"/>
+            </a:avLst>
+          </a:prstGeom>
+          <a:solidFill>
+            <a:srgbClr val="1E222C"/>
+          </a:solidFill>
+          <a:ln>
+            <a:noFill/>
+          </a:ln>
+          <a:effectLst/>
+        </p:spPr>
+        <p:txBody>
+          <a:bodyPr rtlCol="0" anchor="t" wrap="square" lIns="164592" rIns="164592" tIns="91440" bIns="91440"/>
+          <a:lstStyle/>
+          <a:p>
+            <a:pPr algn="l">
+              <a:lnSpc>
+                <a:spcPct val="135000"/>
+              </a:lnSpc>
+              <a:spcAft>
+                <a:spcPts val="300"/>
+              </a:spcAft>
+            </a:pPr>
+            <a:r>
+              <a:rPr sz="1200" b="0">
+                <a:solidFill>
+                  <a:srgbClr val="9BA6B8"/>
+                </a:solidFill>
+                <a:latin typeface="Menlo"/>
+              </a:rPr>
+              <a:t>attempts   0</a:t>
+            </a:r>
+          </a:p>
+          <a:p>
+            <a:pPr algn="l">
+              <a:lnSpc>
+                <a:spcPct val="135000"/>
+              </a:lnSpc>
+              <a:spcAft>
+                <a:spcPts val="300"/>
+              </a:spcAft>
+            </a:pPr>
+            <a:r>
+              <a:rPr sz="1200" b="0">
+                <a:solidFill>
+                  <a:srgbClr val="9BA6B8"/>
+                </a:solidFill>
+                <a:latin typeface="Menlo"/>
+              </a:rPr>
+              <a:t>successes  0</a:t>
+            </a:r>
+          </a:p>
+          <a:p>
+            <a:pPr algn="l">
+              <a:lnSpc>
+                <a:spcPct val="135000"/>
+              </a:lnSpc>
+              <a:spcAft>
+                <a:spcPts val="300"/>
+              </a:spcAft>
+            </a:pPr>
+            <a:r>
+              <a:rPr sz="1200" b="0">
+                <a:solidFill>
+                  <a:srgbClr val="9BA6B8"/>
+                </a:solidFill>
+                <a:latin typeface="Menlo"/>
+              </a:rPr>
+              <a:t>fallbacks  0</a:t>
             </a:r>
           </a:p>
         </p:txBody>
@@ -5015,6 +7563,14 @@
 <file path=ppt/slides/slide7.xml><?xml version="1.0" encoding="utf-8"?>
 <p:sld xmlns:a="http://schemas.openxmlformats.org/drawingml/2006/main" xmlns:p="http://schemas.openxmlformats.org/presentationml/2006/main" xmlns:r="http://schemas.openxmlformats.org/officeDocument/2006/relationships">
   <p:cSld>
+    <p:bg>
+      <p:bgPr>
+        <a:solidFill>
+          <a:srgbClr val="14161C"/>
+        </a:solidFill>
+        <a:effectLst/>
+      </p:bgPr>
+    </p:bg>
     <p:spTree>
       <p:nvGrpSpPr>
         <p:cNvPr id="1" name=""/>
@@ -5022,393 +7578,868 @@
         <p:nvPr/>
       </p:nvGrpSpPr>
       <p:grpSpPr/>
-      <p:pic>
-        <p:nvPicPr>
-          <p:cNvPr id="2" name="Picture 1" descr="hero-frame.png"/>
-          <p:cNvPicPr>
-            <a:picLocks noChangeAspect="1"/>
-          </p:cNvPicPr>
+      <p:sp>
+        <p:nvSpPr>
+          <p:cNvPr id="2" name="TextBox 1"/>
+          <p:cNvSpPr txBox="1"/>
           <p:nvPr/>
-        </p:nvPicPr>
-        <p:blipFill>
-          <a:blip r:embed="rId2"/>
-          <a:stretch>
-            <a:fillRect/>
-          </a:stretch>
-        </p:blipFill>
-        <p:spPr>
-          <a:xfrm>
-            <a:off x="5989320" y="822960"/>
-            <a:ext cx="5669280" cy="4039182"/>
+        </p:nvSpPr>
+        <p:spPr>
+          <a:xfrm>
+            <a:off x="914400" y="420624"/>
+            <a:ext cx="10362895" cy="274320"/>
           </a:xfrm>
           <a:prstGeom prst="rect">
             <a:avLst/>
           </a:prstGeom>
-        </p:spPr>
-      </p:pic>
+          <a:noFill/>
+        </p:spPr>
+        <p:txBody>
+          <a:bodyPr wrap="square" anchor="t" lIns="0" rIns="0" tIns="0" bIns="0">
+            <a:spAutoFit/>
+          </a:bodyPr>
+          <a:lstStyle/>
+          <a:p>
+            <a:pPr algn="l">
+              <a:lnSpc>
+                <a:spcPct val="118000"/>
+              </a:lnSpc>
+            </a:pPr>
+            <a:r>
+              <a:rPr sz="1050" b="1">
+                <a:solidFill>
+                  <a:srgbClr val="4FD1C5"/>
+                </a:solidFill>
+                <a:latin typeface="Arial"/>
+              </a:rPr>
+              <a:t>EVIDENCE</a:t>
+            </a:r>
+          </a:p>
+        </p:txBody>
+      </p:sp>
+      <p:sp>
+        <p:nvSpPr>
+          <p:cNvPr id="3" name="TextBox 2"/>
+          <p:cNvSpPr txBox="1"/>
+          <p:nvPr/>
+        </p:nvSpPr>
+        <p:spPr>
+          <a:xfrm>
+            <a:off x="914400" y="713232"/>
+            <a:ext cx="10362895" cy="914400"/>
+          </a:xfrm>
+          <a:prstGeom prst="rect">
+            <a:avLst/>
+          </a:prstGeom>
+          <a:noFill/>
+        </p:spPr>
+        <p:txBody>
+          <a:bodyPr wrap="square" anchor="t" lIns="0" rIns="0" tIns="0" bIns="0">
+            <a:spAutoFit/>
+          </a:bodyPr>
+          <a:lstStyle/>
+          <a:p>
+            <a:pPr algn="l">
+              <a:lnSpc>
+                <a:spcPct val="105000"/>
+              </a:lnSpc>
+            </a:pPr>
+            <a:r>
+              <a:rPr sz="2900" b="1">
+                <a:solidFill>
+                  <a:srgbClr val="EDEFF4"/>
+                </a:solidFill>
+                <a:latin typeface="Arial"/>
+              </a:rPr>
+              <a:t>The causal experiment — not a demo branch</a:t>
+            </a:r>
+          </a:p>
+        </p:txBody>
+      </p:sp>
+      <p:cxnSp>
+        <p:nvCxnSpPr>
+          <p:cNvPr id="4" name="Connector 3"/>
+          <p:cNvCxnSpPr/>
+          <p:nvPr/>
+        </p:nvCxnSpPr>
+        <p:spPr>
+          <a:xfrm>
+            <a:off x="914400" y="1627632"/>
+            <a:ext cx="1371600" cy="0"/>
+          </a:xfrm>
+          <a:prstGeom prst="line">
+            <a:avLst/>
+          </a:prstGeom>
+          <a:ln w="31750">
+            <a:solidFill>
+              <a:srgbClr val="4FD1C5"/>
+            </a:solidFill>
+          </a:ln>
+        </p:spPr>
+        <p:style>
+          <a:lnRef idx="2">
+            <a:schemeClr val="accent1"/>
+          </a:lnRef>
+          <a:fillRef idx="0">
+            <a:schemeClr val="accent1"/>
+          </a:fillRef>
+          <a:effectRef idx="1">
+            <a:schemeClr val="accent1"/>
+          </a:effectRef>
+          <a:fontRef idx="minor">
+            <a:schemeClr val="tx1"/>
+          </a:fontRef>
+        </p:style>
+      </p:cxnSp>
+      <p:sp>
+        <p:nvSpPr>
+          <p:cNvPr id="5" name="TextBox 4"/>
+          <p:cNvSpPr txBox="1"/>
+          <p:nvPr/>
+        </p:nvSpPr>
+        <p:spPr>
+          <a:xfrm>
+            <a:off x="914400" y="6291072"/>
+            <a:ext cx="7315200" cy="256032"/>
+          </a:xfrm>
+          <a:prstGeom prst="rect">
+            <a:avLst/>
+          </a:prstGeom>
+          <a:noFill/>
+        </p:spPr>
+        <p:txBody>
+          <a:bodyPr wrap="square" anchor="t" lIns="0" rIns="0" tIns="0" bIns="0">
+            <a:spAutoFit/>
+          </a:bodyPr>
+          <a:lstStyle/>
+          <a:p>
+            <a:pPr algn="l">
+              <a:lnSpc>
+                <a:spcPct val="118000"/>
+              </a:lnSpc>
+            </a:pPr>
+            <a:r>
+              <a:rPr sz="900" b="0">
+                <a:solidFill>
+                  <a:srgbClr val="9BA6B8"/>
+                </a:solidFill>
+                <a:latin typeface="Arial"/>
+              </a:rPr>
+              <a:t>Driftwatch  ·  Open Agent Hackathon 2026  ·  Wildcard [Tinkerer]</a:t>
+            </a:r>
+          </a:p>
+        </p:txBody>
+      </p:sp>
+      <p:sp>
+        <p:nvSpPr>
+          <p:cNvPr id="6" name="TextBox 5"/>
+          <p:cNvSpPr txBox="1"/>
+          <p:nvPr/>
+        </p:nvSpPr>
+        <p:spPr>
+          <a:xfrm>
+            <a:off x="10728655" y="6291072"/>
+            <a:ext cx="548640" cy="256032"/>
+          </a:xfrm>
+          <a:prstGeom prst="rect">
+            <a:avLst/>
+          </a:prstGeom>
+          <a:noFill/>
+        </p:spPr>
+        <p:txBody>
+          <a:bodyPr wrap="square" anchor="t" lIns="0" rIns="0" tIns="0" bIns="0">
+            <a:spAutoFit/>
+          </a:bodyPr>
+          <a:lstStyle/>
+          <a:p>
+            <a:pPr algn="r">
+              <a:lnSpc>
+                <a:spcPct val="118000"/>
+              </a:lnSpc>
+            </a:pPr>
+            <a:r>
+              <a:rPr sz="900" b="0">
+                <a:solidFill>
+                  <a:srgbClr val="9BA6B8"/>
+                </a:solidFill>
+                <a:latin typeface="Arial"/>
+              </a:rPr>
+              <a:t>7</a:t>
+            </a:r>
+          </a:p>
+        </p:txBody>
+      </p:sp>
+      <p:sp>
+        <p:nvSpPr>
+          <p:cNvPr id="7" name="TextBox 6"/>
+          <p:cNvSpPr txBox="1"/>
+          <p:nvPr/>
+        </p:nvSpPr>
+        <p:spPr>
+          <a:xfrm>
+            <a:off x="914400" y="1828800"/>
+            <a:ext cx="10362895" cy="365760"/>
+          </a:xfrm>
+          <a:prstGeom prst="rect">
+            <a:avLst/>
+          </a:prstGeom>
+          <a:noFill/>
+        </p:spPr>
+        <p:txBody>
+          <a:bodyPr wrap="square" anchor="t" lIns="0" rIns="0" tIns="0" bIns="0">
+            <a:spAutoFit/>
+          </a:bodyPr>
+          <a:lstStyle/>
+          <a:p>
+            <a:pPr algn="l">
+              <a:lnSpc>
+                <a:spcPct val="118000"/>
+              </a:lnSpc>
+            </a:pPr>
+            <a:r>
+              <a:rPr sz="1500" b="0">
+                <a:solidFill>
+                  <a:srgbClr val="9BA6B8"/>
+                </a:solidFill>
+                <a:latin typeface="Arial"/>
+              </a:rPr>
+              <a:t>Same scenario, same code, one rule unpublished.</a:t>
+            </a:r>
+          </a:p>
+        </p:txBody>
+      </p:sp>
       <p:graphicFrame>
         <p:nvGraphicFramePr>
-          <p:cNvPr id="3" name="Table 2"/>
+          <p:cNvPr id="8" name="Table 7"/>
           <p:cNvGraphicFramePr>
             <a:graphicFrameLocks noGrp="1"/>
           </p:cNvGraphicFramePr>
           <p:nvPr/>
         </p:nvGraphicFramePr>
         <p:xfrm>
-          <a:off x="548640" y="1188720"/>
-          <a:ext cx="5120640" cy="2011680"/>
+          <a:off x="914400" y="2395728"/>
+          <a:ext cx="10360152" cy="1417320"/>
         </p:xfrm>
         <a:graphic>
           <a:graphicData uri="http://schemas.openxmlformats.org/drawingml/2006/table">
             <a:tbl>
-              <a:tblPr firstRow="1" bandRow="1">
-                <a:tableStyleId>{5C22544A-7EE6-4342-B048-85BDC9FD1C3A}</a:tableStyleId>
-              </a:tblPr>
+              <a:tblPr firstRow="1" bandRow="1"/>
               <a:tblGrid>
-                <a:gridCol w="1280160"/>
-                <a:gridCol w="1280160"/>
-                <a:gridCol w="1280160"/>
-                <a:gridCol w="1280160"/>
+                <a:gridCol w="1828800"/>
+                <a:gridCol w="2834640"/>
+                <a:gridCol w="1188720"/>
+                <a:gridCol w="4507992"/>
               </a:tblGrid>
-              <a:tr h="502920">
+              <a:tr h="472440">
                 <a:tc>
                   <a:txBody>
-                    <a:bodyPr/>
+                    <a:bodyPr wrap="square"/>
                     <a:lstStyle/>
                     <a:p>
                       <a:r>
+                        <a:rPr sz="1100" b="1">
+                          <a:solidFill>
+                            <a:srgbClr val="9BA6B8"/>
+                          </a:solidFill>
+                          <a:latin typeface="Arial"/>
+                        </a:rPr>
                         <a:t>live run</a:t>
                       </a:r>
                     </a:p>
                   </a:txBody>
-                  <a:tcPr/>
+                  <a:tcPr marL="128016" marR="128016" anchor="ctr">
+                    <a:solidFill>
+                      <a:srgbClr val="242A36"/>
+                    </a:solidFill>
+                    <a:lnL w="9525" cap="flat" cmpd="sng" algn="ctr">
+                      <a:solidFill>
+                        <a:srgbClr val="2A3040"/>
+                      </a:solidFill>
+                    </a:lnL>
+                    <a:lnR w="9525" cap="flat" cmpd="sng" algn="ctr">
+                      <a:solidFill>
+                        <a:srgbClr val="2A3040"/>
+                      </a:solidFill>
+                    </a:lnR>
+                    <a:lnT w="9525" cap="flat" cmpd="sng" algn="ctr">
+                      <a:solidFill>
+                        <a:srgbClr val="2A3040"/>
+                      </a:solidFill>
+                    </a:lnT>
+                    <a:lnB w="9525" cap="flat" cmpd="sng" algn="ctr">
+                      <a:solidFill>
+                        <a:srgbClr val="2A3040"/>
+                      </a:solidFill>
+                    </a:lnB>
+                  </a:tcPr>
                 </a:tc>
                 <a:tc>
                   <a:txBody>
-                    <a:bodyPr/>
+                    <a:bodyPr wrap="square"/>
                     <a:lstStyle/>
                     <a:p>
                       <a:r>
+                        <a:rPr sz="1100" b="1">
+                          <a:solidFill>
+                            <a:srgbClr val="9BA6B8"/>
+                          </a:solidFill>
+                          <a:latin typeface="Arial"/>
+                        </a:rPr>
                         <a:t>policy snapshot</a:t>
                       </a:r>
                     </a:p>
                   </a:txBody>
-                  <a:tcPr/>
+                  <a:tcPr marL="128016" marR="128016" anchor="ctr">
+                    <a:solidFill>
+                      <a:srgbClr val="242A36"/>
+                    </a:solidFill>
+                    <a:lnL w="9525" cap="flat" cmpd="sng" algn="ctr">
+                      <a:solidFill>
+                        <a:srgbClr val="2A3040"/>
+                      </a:solidFill>
+                    </a:lnL>
+                    <a:lnR w="9525" cap="flat" cmpd="sng" algn="ctr">
+                      <a:solidFill>
+                        <a:srgbClr val="2A3040"/>
+                      </a:solidFill>
+                    </a:lnR>
+                    <a:lnT w="9525" cap="flat" cmpd="sng" algn="ctr">
+                      <a:solidFill>
+                        <a:srgbClr val="2A3040"/>
+                      </a:solidFill>
+                    </a:lnT>
+                    <a:lnB w="9525" cap="flat" cmpd="sng" algn="ctr">
+                      <a:solidFill>
+                        <a:srgbClr val="2A3040"/>
+                      </a:solidFill>
+                    </a:lnB>
+                  </a:tcPr>
                 </a:tc>
                 <a:tc>
                   <a:txBody>
-                    <a:bodyPr/>
+                    <a:bodyPr wrap="square"/>
                     <a:lstStyle/>
                     <a:p>
                       <a:r>
+                        <a:rPr sz="1100" b="1">
+                          <a:solidFill>
+                            <a:srgbClr val="9BA6B8"/>
+                          </a:solidFill>
+                          <a:latin typeface="Arial"/>
+                        </a:rPr>
                         <a:t>rules</a:t>
                       </a:r>
                     </a:p>
                   </a:txBody>
-                  <a:tcPr/>
+                  <a:tcPr marL="128016" marR="128016" anchor="ctr">
+                    <a:solidFill>
+                      <a:srgbClr val="242A36"/>
+                    </a:solidFill>
+                    <a:lnL w="9525" cap="flat" cmpd="sng" algn="ctr">
+                      <a:solidFill>
+                        <a:srgbClr val="2A3040"/>
+                      </a:solidFill>
+                    </a:lnL>
+                    <a:lnR w="9525" cap="flat" cmpd="sng" algn="ctr">
+                      <a:solidFill>
+                        <a:srgbClr val="2A3040"/>
+                      </a:solidFill>
+                    </a:lnR>
+                    <a:lnT w="9525" cap="flat" cmpd="sng" algn="ctr">
+                      <a:solidFill>
+                        <a:srgbClr val="2A3040"/>
+                      </a:solidFill>
+                    </a:lnT>
+                    <a:lnB w="9525" cap="flat" cmpd="sng" algn="ctr">
+                      <a:solidFill>
+                        <a:srgbClr val="2A3040"/>
+                      </a:solidFill>
+                    </a:lnB>
+                  </a:tcPr>
                 </a:tc>
                 <a:tc>
                   <a:txBody>
-                    <a:bodyPr/>
+                    <a:bodyPr wrap="square"/>
                     <a:lstStyle/>
                     <a:p>
                       <a:r>
+                        <a:rPr sz="1100" b="1">
+                          <a:solidFill>
+                            <a:srgbClr val="9BA6B8"/>
+                          </a:solidFill>
+                          <a:latin typeface="Arial"/>
+                        </a:rPr>
                         <a:t>finding from R-1</a:t>
                       </a:r>
                     </a:p>
                   </a:txBody>
-                  <a:tcPr/>
+                  <a:tcPr marL="128016" marR="128016" anchor="ctr">
+                    <a:solidFill>
+                      <a:srgbClr val="242A36"/>
+                    </a:solidFill>
+                    <a:lnL w="9525" cap="flat" cmpd="sng" algn="ctr">
+                      <a:solidFill>
+                        <a:srgbClr val="2A3040"/>
+                      </a:solidFill>
+                    </a:lnL>
+                    <a:lnR w="9525" cap="flat" cmpd="sng" algn="ctr">
+                      <a:solidFill>
+                        <a:srgbClr val="2A3040"/>
+                      </a:solidFill>
+                    </a:lnR>
+                    <a:lnT w="9525" cap="flat" cmpd="sng" algn="ctr">
+                      <a:solidFill>
+                        <a:srgbClr val="2A3040"/>
+                      </a:solidFill>
+                    </a:lnT>
+                    <a:lnB w="9525" cap="flat" cmpd="sng" algn="ctr">
+                      <a:solidFill>
+                        <a:srgbClr val="2A3040"/>
+                      </a:solidFill>
+                    </a:lnB>
+                  </a:tcPr>
                 </a:tc>
               </a:tr>
-              <a:tr h="502920">
+              <a:tr h="472440">
                 <a:tc>
                   <a:txBody>
-                    <a:bodyPr/>
+                    <a:bodyPr wrap="square"/>
                     <a:lstStyle/>
                     <a:p>
                       <a:r>
+                        <a:rPr sz="1250" b="1">
+                          <a:solidFill>
+                            <a:srgbClr val="EDEFF4"/>
+                          </a:solidFill>
+                          <a:latin typeface="Arial"/>
+                        </a:rPr>
                         <a:t>base</a:t>
                       </a:r>
                     </a:p>
                   </a:txBody>
-                  <a:tcPr/>
+                  <a:tcPr marL="128016" marR="128016" anchor="ctr">
+                    <a:solidFill>
+                      <a:srgbClr val="1E222C"/>
+                    </a:solidFill>
+                    <a:lnL w="9525" cap="flat" cmpd="sng" algn="ctr">
+                      <a:solidFill>
+                        <a:srgbClr val="2A3040"/>
+                      </a:solidFill>
+                    </a:lnL>
+                    <a:lnR w="9525" cap="flat" cmpd="sng" algn="ctr">
+                      <a:solidFill>
+                        <a:srgbClr val="2A3040"/>
+                      </a:solidFill>
+                    </a:lnR>
+                    <a:lnT w="9525" cap="flat" cmpd="sng" algn="ctr">
+                      <a:solidFill>
+                        <a:srgbClr val="2A3040"/>
+                      </a:solidFill>
+                    </a:lnT>
+                    <a:lnB w="9525" cap="flat" cmpd="sng" algn="ctr">
+                      <a:solidFill>
+                        <a:srgbClr val="2A3040"/>
+                      </a:solidFill>
+                    </a:lnB>
+                  </a:tcPr>
                 </a:tc>
                 <a:tc>
                   <a:txBody>
-                    <a:bodyPr/>
+                    <a:bodyPr wrap="square"/>
                     <a:lstStyle/>
                     <a:p>
                       <a:r>
+                        <a:rPr sz="1250" b="0">
+                          <a:solidFill>
+                            <a:srgbClr val="EDEFF4"/>
+                          </a:solidFill>
+                          <a:latin typeface="Arial"/>
+                        </a:rPr>
                         <a:t>example1_base_v2</a:t>
                       </a:r>
                     </a:p>
                   </a:txBody>
-                  <a:tcPr/>
+                  <a:tcPr marL="128016" marR="128016" anchor="ctr">
+                    <a:solidFill>
+                      <a:srgbClr val="1E222C"/>
+                    </a:solidFill>
+                    <a:lnL w="9525" cap="flat" cmpd="sng" algn="ctr">
+                      <a:solidFill>
+                        <a:srgbClr val="2A3040"/>
+                      </a:solidFill>
+                    </a:lnL>
+                    <a:lnR w="9525" cap="flat" cmpd="sng" algn="ctr">
+                      <a:solidFill>
+                        <a:srgbClr val="2A3040"/>
+                      </a:solidFill>
+                    </a:lnR>
+                    <a:lnT w="9525" cap="flat" cmpd="sng" algn="ctr">
+                      <a:solidFill>
+                        <a:srgbClr val="2A3040"/>
+                      </a:solidFill>
+                    </a:lnT>
+                    <a:lnB w="9525" cap="flat" cmpd="sng" algn="ctr">
+                      <a:solidFill>
+                        <a:srgbClr val="2A3040"/>
+                      </a:solidFill>
+                    </a:lnB>
+                  </a:tcPr>
                 </a:tc>
                 <a:tc>
                   <a:txBody>
-                    <a:bodyPr/>
+                    <a:bodyPr wrap="square"/>
                     <a:lstStyle/>
                     <a:p>
                       <a:r>
+                        <a:rPr sz="1250" b="0">
+                          <a:solidFill>
+                            <a:srgbClr val="EDEFF4"/>
+                          </a:solidFill>
+                          <a:latin typeface="Arial"/>
+                        </a:rPr>
                         <a:t>5</a:t>
                       </a:r>
                     </a:p>
                   </a:txBody>
-                  <a:tcPr/>
+                  <a:tcPr marL="128016" marR="128016" anchor="ctr">
+                    <a:solidFill>
+                      <a:srgbClr val="1E222C"/>
+                    </a:solidFill>
+                    <a:lnL w="9525" cap="flat" cmpd="sng" algn="ctr">
+                      <a:solidFill>
+                        <a:srgbClr val="2A3040"/>
+                      </a:solidFill>
+                    </a:lnL>
+                    <a:lnR w="9525" cap="flat" cmpd="sng" algn="ctr">
+                      <a:solidFill>
+                        <a:srgbClr val="2A3040"/>
+                      </a:solidFill>
+                    </a:lnR>
+                    <a:lnT w="9525" cap="flat" cmpd="sng" algn="ctr">
+                      <a:solidFill>
+                        <a:srgbClr val="2A3040"/>
+                      </a:solidFill>
+                    </a:lnT>
+                    <a:lnB w="9525" cap="flat" cmpd="sng" algn="ctr">
+                      <a:solidFill>
+                        <a:srgbClr val="2A3040"/>
+                      </a:solidFill>
+                    </a:lnB>
+                  </a:tcPr>
                 </a:tc>
                 <a:tc>
                   <a:txBody>
-                    <a:bodyPr/>
+                    <a:bodyPr wrap="square"/>
                     <a:lstStyle/>
                     <a:p>
                       <a:r>
-                        <a:t>eee5 · cost_waste · ACCEPTED</a:t>
+                        <a:rPr sz="1250" b="0">
+                          <a:solidFill>
+                            <a:srgbClr val="EDEFF4"/>
+                          </a:solidFill>
+                          <a:latin typeface="Arial"/>
+                        </a:rPr>
+                        <a:t>accepted · cost_waste</a:t>
                       </a:r>
                     </a:p>
                   </a:txBody>
-                  <a:tcPr/>
+                  <a:tcPr marL="128016" marR="128016" anchor="ctr">
+                    <a:solidFill>
+                      <a:srgbClr val="1E222C"/>
+                    </a:solidFill>
+                    <a:lnL w="9525" cap="flat" cmpd="sng" algn="ctr">
+                      <a:solidFill>
+                        <a:srgbClr val="2A3040"/>
+                      </a:solidFill>
+                    </a:lnL>
+                    <a:lnR w="9525" cap="flat" cmpd="sng" algn="ctr">
+                      <a:solidFill>
+                        <a:srgbClr val="2A3040"/>
+                      </a:solidFill>
+                    </a:lnR>
+                    <a:lnT w="9525" cap="flat" cmpd="sng" algn="ctr">
+                      <a:solidFill>
+                        <a:srgbClr val="2A3040"/>
+                      </a:solidFill>
+                    </a:lnT>
+                    <a:lnB w="9525" cap="flat" cmpd="sng" algn="ctr">
+                      <a:solidFill>
+                        <a:srgbClr val="2A3040"/>
+                      </a:solidFill>
+                    </a:lnB>
+                  </a:tcPr>
                 </a:tc>
               </a:tr>
-              <a:tr h="502920">
+              <a:tr h="472440">
                 <a:tc>
                   <a:txBody>
-                    <a:bodyPr/>
+                    <a:bodyPr wrap="square"/>
                     <a:lstStyle/>
                     <a:p>
                       <a:r>
+                        <a:rPr sz="1250" b="1">
+                          <a:solidFill>
+                            <a:srgbClr val="EDEFF4"/>
+                          </a:solidFill>
+                          <a:latin typeface="Arial"/>
+                        </a:rPr>
                         <a:t>variant</a:t>
                       </a:r>
                     </a:p>
                   </a:txBody>
-                  <a:tcPr/>
+                  <a:tcPr marL="128016" marR="128016" anchor="ctr">
+                    <a:solidFill>
+                      <a:srgbClr val="1E222C"/>
+                    </a:solidFill>
+                    <a:lnL w="9525" cap="flat" cmpd="sng" algn="ctr">
+                      <a:solidFill>
+                        <a:srgbClr val="2A3040"/>
+                      </a:solidFill>
+                    </a:lnL>
+                    <a:lnR w="9525" cap="flat" cmpd="sng" algn="ctr">
+                      <a:solidFill>
+                        <a:srgbClr val="2A3040"/>
+                      </a:solidFill>
+                    </a:lnR>
+                    <a:lnT w="9525" cap="flat" cmpd="sng" algn="ctr">
+                      <a:solidFill>
+                        <a:srgbClr val="2A3040"/>
+                      </a:solidFill>
+                    </a:lnT>
+                    <a:lnB w="9525" cap="flat" cmpd="sng" algn="ctr">
+                      <a:solidFill>
+                        <a:srgbClr val="2A3040"/>
+                      </a:solidFill>
+                    </a:lnB>
+                  </a:tcPr>
                 </a:tc>
                 <a:tc>
                   <a:txBody>
-                    <a:bodyPr/>
+                    <a:bodyPr wrap="square"/>
                     <a:lstStyle/>
                     <a:p>
                       <a:r>
+                        <a:rPr sz="1250" b="0">
+                          <a:solidFill>
+                            <a:srgbClr val="EDEFF4"/>
+                          </a:solidFill>
+                          <a:latin typeface="Arial"/>
+                        </a:rPr>
                         <a:t>example1_no_volume_v2</a:t>
                       </a:r>
                     </a:p>
                   </a:txBody>
-                  <a:tcPr/>
+                  <a:tcPr marL="128016" marR="128016" anchor="ctr">
+                    <a:solidFill>
+                      <a:srgbClr val="1E222C"/>
+                    </a:solidFill>
+                    <a:lnL w="9525" cap="flat" cmpd="sng" algn="ctr">
+                      <a:solidFill>
+                        <a:srgbClr val="2A3040"/>
+                      </a:solidFill>
+                    </a:lnL>
+                    <a:lnR w="9525" cap="flat" cmpd="sng" algn="ctr">
+                      <a:solidFill>
+                        <a:srgbClr val="2A3040"/>
+                      </a:solidFill>
+                    </a:lnR>
+                    <a:lnT w="9525" cap="flat" cmpd="sng" algn="ctr">
+                      <a:solidFill>
+                        <a:srgbClr val="2A3040"/>
+                      </a:solidFill>
+                    </a:lnT>
+                    <a:lnB w="9525" cap="flat" cmpd="sng" algn="ctr">
+                      <a:solidFill>
+                        <a:srgbClr val="2A3040"/>
+                      </a:solidFill>
+                    </a:lnB>
+                  </a:tcPr>
                 </a:tc>
                 <a:tc>
                   <a:txBody>
-                    <a:bodyPr/>
+                    <a:bodyPr wrap="square"/>
                     <a:lstStyle/>
                     <a:p>
                       <a:r>
+                        <a:rPr sz="1250" b="0">
+                          <a:solidFill>
+                            <a:srgbClr val="EDEFF4"/>
+                          </a:solidFill>
+                          <a:latin typeface="Arial"/>
+                        </a:rPr>
                         <a:t>4</a:t>
                       </a:r>
                     </a:p>
                   </a:txBody>
-                  <a:tcPr/>
+                  <a:tcPr marL="128016" marR="128016" anchor="ctr">
+                    <a:solidFill>
+                      <a:srgbClr val="1E222C"/>
+                    </a:solidFill>
+                    <a:lnL w="9525" cap="flat" cmpd="sng" algn="ctr">
+                      <a:solidFill>
+                        <a:srgbClr val="2A3040"/>
+                      </a:solidFill>
+                    </a:lnL>
+                    <a:lnR w="9525" cap="flat" cmpd="sng" algn="ctr">
+                      <a:solidFill>
+                        <a:srgbClr val="2A3040"/>
+                      </a:solidFill>
+                    </a:lnR>
+                    <a:lnT w="9525" cap="flat" cmpd="sng" algn="ctr">
+                      <a:solidFill>
+                        <a:srgbClr val="2A3040"/>
+                      </a:solidFill>
+                    </a:lnT>
+                    <a:lnB w="9525" cap="flat" cmpd="sng" algn="ctr">
+                      <a:solidFill>
+                        <a:srgbClr val="2A3040"/>
+                      </a:solidFill>
+                    </a:lnB>
+                  </a:tcPr>
                 </a:tc>
                 <a:tc>
                   <a:txBody>
-                    <a:bodyPr/>
+                    <a:bodyPr wrap="square"/>
                     <a:lstStyle/>
                     <a:p>
                       <a:r>
-                        <a:t>GONE</a:t>
+                        <a:rPr sz="1250" b="0">
+                          <a:solidFill>
+                            <a:srgbClr val="4FD1C5"/>
+                          </a:solidFill>
+                          <a:latin typeface="Arial"/>
+                        </a:rPr>
+                        <a:t>gone — and nothing else moved</a:t>
                       </a:r>
                     </a:p>
                   </a:txBody>
-                  <a:tcPr/>
-                </a:tc>
-              </a:tr>
-              <a:tr h="502920">
-                <a:tc>
-                  <a:txBody>
-                    <a:bodyPr/>
-                    <a:lstStyle/>
-                    <a:p/>
-                  </a:txBody>
-                  <a:tcPr/>
-                </a:tc>
-                <a:tc>
-                  <a:txBody>
-                    <a:bodyPr/>
-                    <a:lstStyle/>
-                    <a:p/>
-                  </a:txBody>
-                  <a:tcPr/>
-                </a:tc>
-                <a:tc>
-                  <a:txBody>
-                    <a:bodyPr/>
-                    <a:lstStyle/>
-                    <a:p/>
-                  </a:txBody>
-                  <a:tcPr/>
-                </a:tc>
-                <a:tc>
-                  <a:txBody>
-                    <a:bodyPr/>
-                    <a:lstStyle/>
-                    <a:p>
-                      <a:r>
-                        <a:t>all other findings identical</a:t>
-                      </a:r>
-                    </a:p>
-                  </a:txBody>
-                  <a:tcPr/>
+                  <a:tcPr marL="128016" marR="128016" anchor="ctr">
+                    <a:solidFill>
+                      <a:srgbClr val="1E222C"/>
+                    </a:solidFill>
+                    <a:lnL w="9525" cap="flat" cmpd="sng" algn="ctr">
+                      <a:solidFill>
+                        <a:srgbClr val="2A3040"/>
+                      </a:solidFill>
+                    </a:lnL>
+                    <a:lnR w="9525" cap="flat" cmpd="sng" algn="ctr">
+                      <a:solidFill>
+                        <a:srgbClr val="2A3040"/>
+                      </a:solidFill>
+                    </a:lnR>
+                    <a:lnT w="9525" cap="flat" cmpd="sng" algn="ctr">
+                      <a:solidFill>
+                        <a:srgbClr val="2A3040"/>
+                      </a:solidFill>
+                    </a:lnT>
+                    <a:lnB w="9525" cap="flat" cmpd="sng" algn="ctr">
+                      <a:solidFill>
+                        <a:srgbClr val="2A3040"/>
+                      </a:solidFill>
+                    </a:lnB>
+                  </a:tcPr>
                 </a:tc>
               </a:tr>
             </a:tbl>
           </a:graphicData>
         </a:graphic>
       </p:graphicFrame>
-      <p:graphicFrame>
-        <p:nvGraphicFramePr>
-          <p:cNvPr id="4" name="Table 3"/>
-          <p:cNvGraphicFramePr>
-            <a:graphicFrameLocks noGrp="1"/>
-          </p:cNvGraphicFramePr>
-          <p:nvPr/>
-        </p:nvGraphicFramePr>
-        <p:xfrm>
-          <a:off x="548640" y="3474720"/>
-          <a:ext cx="5120640" cy="1234440"/>
-        </p:xfrm>
-        <a:graphic>
-          <a:graphicData uri="http://schemas.openxmlformats.org/drawingml/2006/table">
-            <a:tbl>
-              <a:tblPr firstRow="1" bandRow="1">
-                <a:tableStyleId>{5C22544A-7EE6-4342-B048-85BDC9FD1C3A}</a:tableStyleId>
-              </a:tblPr>
-              <a:tblGrid>
-                <a:gridCol w="2560320"/>
-                <a:gridCol w="2560320"/>
-              </a:tblGrid>
-              <a:tr h="411480">
-                <a:tc>
-                  <a:txBody>
-                    <a:bodyPr/>
-                    <a:lstStyle/>
-                    <a:p>
-                      <a:r>
-                        <a:t>guard</a:t>
-                      </a:r>
-                    </a:p>
-                  </a:txBody>
-                  <a:tcPr/>
-                </a:tc>
-                <a:tc>
-                  <a:txBody>
-                    <a:bodyPr/>
-                    <a:lstStyle/>
-                    <a:p>
-                      <a:r>
-                        <a:t>what it proved</a:t>
-                      </a:r>
-                    </a:p>
-                  </a:txBody>
-                  <a:tcPr/>
-                </a:tc>
-              </a:tr>
-              <a:tr h="411480">
-                <a:tc>
-                  <a:txBody>
-                    <a:bodyPr/>
-                    <a:lstStyle/>
-                    <a:p>
-                      <a:r>
-                        <a:t>dead endpoint</a:t>
-                      </a:r>
-                    </a:p>
-                  </a:txBody>
-                  <a:tcPr/>
-                </a:tc>
-                <a:tc>
-                  <a:txBody>
-                    <a:bodyPr/>
-                    <a:lstStyle/>
-                    <a:p>
-                      <a:r>
-                        <a:t>degrades honestly — sponsor_acceptance: FALSE</a:t>
-                      </a:r>
-                    </a:p>
-                  </a:txBody>
-                  <a:tcPr/>
-                </a:tc>
-              </a:tr>
-              <a:tr h="411480">
-                <a:tc>
-                  <a:txBody>
-                    <a:bodyPr/>
-                    <a:lstStyle/>
-                    <a:p>
-                      <a:r>
-                        <a:t>tampered digest pin</a:t>
-                      </a:r>
-                    </a:p>
-                  </a:txBody>
-                  <a:tcPr/>
-                </a:tc>
-                <a:tc>
-                  <a:txBody>
-                    <a:bodyPr/>
-                    <a:lstStyle/>
-                    <a:p>
-                      <a:r>
-                        <a:t>rejected before use — zero fabricated output</a:t>
-                      </a:r>
-                    </a:p>
-                  </a:txBody>
-                  <a:tcPr/>
-                </a:tc>
-              </a:tr>
-            </a:tbl>
-          </a:graphicData>
-        </a:graphic>
-      </p:graphicFrame>
-      <p:sp>
-        <p:nvSpPr>
-          <p:cNvPr id="5" name="Rounded Rectangle 4"/>
+      <p:sp>
+        <p:nvSpPr>
+          <p:cNvPr id="9" name="Rounded Rectangle 8"/>
           <p:cNvSpPr/>
           <p:nvPr/>
         </p:nvSpPr>
         <p:spPr>
           <a:xfrm>
-            <a:off x="548640" y="685800"/>
-            <a:ext cx="5120640" cy="411480"/>
+            <a:off x="914400" y="4224528"/>
+            <a:ext cx="10362895" cy="566928"/>
           </a:xfrm>
           <a:prstGeom prst="roundRect">
-            <a:avLst/>
+            <a:avLst>
+              <a:gd name="adj" fmla="val 6000"/>
+            </a:avLst>
           </a:prstGeom>
           <a:solidFill>
-            <a:srgbClr val="0EA5E9"/>
+            <a:srgbClr val="1E222C"/>
           </a:solidFill>
-        </p:spPr>
-        <p:style>
-          <a:lnRef idx="1">
-            <a:schemeClr val="accent1"/>
-          </a:lnRef>
-          <a:fillRef idx="3">
-            <a:schemeClr val="accent1"/>
-          </a:fillRef>
-          <a:effectRef idx="2">
-            <a:schemeClr val="accent1"/>
-          </a:effectRef>
-          <a:fontRef idx="minor">
-            <a:schemeClr val="lt1"/>
-          </a:fontRef>
-        </p:style>
-        <p:txBody>
-          <a:bodyPr rtlCol="0" anchor="ctr"/>
-          <a:lstStyle/>
-          <a:p>
-            <a:r>
-              <a:rPr>
-                <a:solidFill>
-                  <a:srgbClr val="FFFFFF"/>
-                </a:solidFill>
-              </a:rPr>
-              <a:t>Same scenario, same code, one rule unpublished</a:t>
+          <a:ln>
+            <a:noFill/>
+          </a:ln>
+          <a:effectLst/>
+        </p:spPr>
+        <p:txBody>
+          <a:bodyPr rtlCol="0" anchor="ctr" wrap="square" lIns="274320" rIns="164592" tIns="91440" bIns="91440"/>
+          <a:lstStyle/>
+          <a:p>
+            <a:pPr algn="l"/>
+            <a:r>
+              <a:rPr sz="1200" b="1">
+                <a:solidFill>
+                  <a:srgbClr val="F2B36B"/>
+                </a:solidFill>
+                <a:latin typeface="Arial"/>
+              </a:rPr>
+              <a:t>dead endpoint</a:t>
+            </a:r>
+            <a:r>
+              <a:rPr sz="1200">
+                <a:solidFill>
+                  <a:srgbClr val="9BA6B8"/>
+                </a:solidFill>
+                <a:latin typeface="Arial"/>
+              </a:rPr>
+              <a:t>     degrades honestly — sponsor_acceptance: FALSE</a:t>
+            </a:r>
+          </a:p>
+        </p:txBody>
+      </p:sp>
+      <p:sp>
+        <p:nvSpPr>
+          <p:cNvPr id="10" name="Rounded Rectangle 9"/>
+          <p:cNvSpPr/>
+          <p:nvPr/>
+        </p:nvSpPr>
+        <p:spPr>
+          <a:xfrm>
+            <a:off x="914400" y="4937760"/>
+            <a:ext cx="10362895" cy="566928"/>
+          </a:xfrm>
+          <a:prstGeom prst="roundRect">
+            <a:avLst>
+              <a:gd name="adj" fmla="val 6000"/>
+            </a:avLst>
+          </a:prstGeom>
+          <a:solidFill>
+            <a:srgbClr val="1E222C"/>
+          </a:solidFill>
+          <a:ln>
+            <a:noFill/>
+          </a:ln>
+          <a:effectLst/>
+        </p:spPr>
+        <p:txBody>
+          <a:bodyPr rtlCol="0" anchor="ctr" wrap="square" lIns="274320" rIns="164592" tIns="91440" bIns="91440"/>
+          <a:lstStyle/>
+          <a:p>
+            <a:pPr algn="l"/>
+            <a:r>
+              <a:rPr sz="1200" b="1">
+                <a:solidFill>
+                  <a:srgbClr val="F2B36B"/>
+                </a:solidFill>
+                <a:latin typeface="Arial"/>
+              </a:rPr>
+              <a:t>tampered digest pin</a:t>
+            </a:r>
+            <a:r>
+              <a:rPr sz="1200">
+                <a:solidFill>
+                  <a:srgbClr val="9BA6B8"/>
+                </a:solidFill>
+                <a:latin typeface="Arial"/>
+              </a:rPr>
+              <a:t>     rejected before use — zero fabricated output</a:t>
             </a:r>
           </a:p>
         </p:txBody>
@@ -5427,7 +8458,7 @@
     <p:bg>
       <p:bgPr>
         <a:solidFill>
-          <a:srgbClr val="151A23"/>
+          <a:srgbClr val="14161C"/>
         </a:solidFill>
         <a:effectLst/>
       </p:bgPr>
@@ -5441,84 +8472,296 @@
       <p:grpSpPr/>
       <p:sp>
         <p:nvSpPr>
-          <p:cNvPr id="2" name="Title 1"/>
-          <p:cNvSpPr>
-            <a:spLocks noGrp="1"/>
-          </p:cNvSpPr>
-          <p:nvPr>
-            <p:ph type="title"/>
-          </p:nvPr>
-        </p:nvSpPr>
-        <p:spPr/>
-        <p:txBody>
-          <a:bodyPr/>
-          <a:lstStyle/>
-          <a:p>
-            <a:r>
-              <a:rPr>
-                <a:solidFill>
-                  <a:srgbClr val="E8ECF4"/>
-                </a:solidFill>
+          <p:cNvPr id="2" name="TextBox 1"/>
+          <p:cNvSpPr txBox="1"/>
+          <p:nvPr/>
+        </p:nvSpPr>
+        <p:spPr>
+          <a:xfrm>
+            <a:off x="914400" y="420624"/>
+            <a:ext cx="10362895" cy="274320"/>
+          </a:xfrm>
+          <a:prstGeom prst="rect">
+            <a:avLst/>
+          </a:prstGeom>
+          <a:noFill/>
+        </p:spPr>
+        <p:txBody>
+          <a:bodyPr wrap="square" anchor="t" lIns="0" rIns="0" tIns="0" bIns="0">
+            <a:spAutoFit/>
+          </a:bodyPr>
+          <a:lstStyle/>
+          <a:p>
+            <a:pPr algn="l">
+              <a:lnSpc>
+                <a:spcPct val="118000"/>
+              </a:lnSpc>
+            </a:pPr>
+            <a:r>
+              <a:rPr sz="1050" b="1">
+                <a:solidFill>
+                  <a:srgbClr val="4FD1C5"/>
+                </a:solidFill>
+                <a:latin typeface="Arial"/>
+              </a:rPr>
+              <a:t>WHAT WENT WRONG</a:t>
+            </a:r>
+          </a:p>
+        </p:txBody>
+      </p:sp>
+      <p:sp>
+        <p:nvSpPr>
+          <p:cNvPr id="3" name="TextBox 2"/>
+          <p:cNvSpPr txBox="1"/>
+          <p:nvPr/>
+        </p:nvSpPr>
+        <p:spPr>
+          <a:xfrm>
+            <a:off x="914400" y="713232"/>
+            <a:ext cx="10362895" cy="914400"/>
+          </a:xfrm>
+          <a:prstGeom prst="rect">
+            <a:avLst/>
+          </a:prstGeom>
+          <a:noFill/>
+        </p:spPr>
+        <p:txBody>
+          <a:bodyPr wrap="square" anchor="t" lIns="0" rIns="0" tIns="0" bIns="0">
+            <a:spAutoFit/>
+          </a:bodyPr>
+          <a:lstStyle/>
+          <a:p>
+            <a:pPr algn="l">
+              <a:lnSpc>
+                <a:spcPct val="105000"/>
+              </a:lnSpc>
+            </a:pPr>
+            <a:r>
+              <a:rPr sz="2900" b="1">
+                <a:solidFill>
+                  <a:srgbClr val="EDEFF4"/>
+                </a:solidFill>
+                <a:latin typeface="Arial"/>
               </a:rPr>
               <a:t>Our guard caught a supplier bug in production</a:t>
             </a:r>
           </a:p>
         </p:txBody>
       </p:sp>
-      <p:sp>
-        <p:nvSpPr>
-          <p:cNvPr id="3" name="Content Placeholder 2"/>
-          <p:cNvSpPr>
-            <a:spLocks noGrp="1"/>
-          </p:cNvSpPr>
-          <p:nvPr>
-            <p:ph idx="1"/>
-          </p:nvPr>
-        </p:nvSpPr>
-        <p:spPr/>
-        <p:txBody>
-          <a:bodyPr/>
-          <a:lstStyle/>
-          <a:p>
-            <a:pPr/>
-            <a:r>
-              <a:rPr sz="2000">
-                <a:solidFill>
-                  <a:srgbClr val="DDE3EC"/>
-                </a:solidFill>
-              </a:rPr>
-              <a:t>The live engine’s CSV parser silently truncates cells at embedded quotes — row counts and headers looked fine</a:t>
-            </a:r>
-          </a:p>
-          <a:p>
-            <a:pPr/>
-            <a:r>
-              <a:rPr sz="2000" b="1">
-                <a:solidFill>
-                  <a:srgbClr val="7DD3FC"/>
-                </a:solidFill>
-              </a:rPr>
-              <a:t>Our content-digest check rejected every fetch; the run degraded to fixture data honestly — no corrupted rule ever reached an agent</a:t>
-            </a:r>
-          </a:p>
-          <a:p>
-            <a:pPr/>
-            <a:r>
-              <a:rPr sz="2000">
-                <a:solidFill>
-                  <a:srgbClr val="DDE3EC"/>
-                </a:solidFill>
-              </a:rPr>
-              <a:t>Response: quote-safe re-export (digests unchanged), new immutable snapshots, v1 revoked and dropped, supplier defect report written up</a:t>
-            </a:r>
-          </a:p>
-          <a:p>
-            <a:pPr/>
-            <a:r>
-              <a:rPr sz="2000" i="1">
-                <a:solidFill>
-                  <a:srgbClr val="FBBF24"/>
-                </a:solidFill>
+      <p:cxnSp>
+        <p:nvCxnSpPr>
+          <p:cNvPr id="4" name="Connector 3"/>
+          <p:cNvCxnSpPr/>
+          <p:nvPr/>
+        </p:nvCxnSpPr>
+        <p:spPr>
+          <a:xfrm>
+            <a:off x="914400" y="1627632"/>
+            <a:ext cx="1371600" cy="0"/>
+          </a:xfrm>
+          <a:prstGeom prst="line">
+            <a:avLst/>
+          </a:prstGeom>
+          <a:ln w="31750">
+            <a:solidFill>
+              <a:srgbClr val="4FD1C5"/>
+            </a:solidFill>
+          </a:ln>
+        </p:spPr>
+        <p:style>
+          <a:lnRef idx="2">
+            <a:schemeClr val="accent1"/>
+          </a:lnRef>
+          <a:fillRef idx="0">
+            <a:schemeClr val="accent1"/>
+          </a:fillRef>
+          <a:effectRef idx="1">
+            <a:schemeClr val="accent1"/>
+          </a:effectRef>
+          <a:fontRef idx="minor">
+            <a:schemeClr val="tx1"/>
+          </a:fontRef>
+        </p:style>
+      </p:cxnSp>
+      <p:sp>
+        <p:nvSpPr>
+          <p:cNvPr id="5" name="TextBox 4"/>
+          <p:cNvSpPr txBox="1"/>
+          <p:nvPr/>
+        </p:nvSpPr>
+        <p:spPr>
+          <a:xfrm>
+            <a:off x="914400" y="6291072"/>
+            <a:ext cx="7315200" cy="256032"/>
+          </a:xfrm>
+          <a:prstGeom prst="rect">
+            <a:avLst/>
+          </a:prstGeom>
+          <a:noFill/>
+        </p:spPr>
+        <p:txBody>
+          <a:bodyPr wrap="square" anchor="t" lIns="0" rIns="0" tIns="0" bIns="0">
+            <a:spAutoFit/>
+          </a:bodyPr>
+          <a:lstStyle/>
+          <a:p>
+            <a:pPr algn="l">
+              <a:lnSpc>
+                <a:spcPct val="118000"/>
+              </a:lnSpc>
+            </a:pPr>
+            <a:r>
+              <a:rPr sz="900" b="0">
+                <a:solidFill>
+                  <a:srgbClr val="9BA6B8"/>
+                </a:solidFill>
+                <a:latin typeface="Arial"/>
+              </a:rPr>
+              <a:t>Driftwatch  ·  Open Agent Hackathon 2026  ·  Wildcard [Tinkerer]</a:t>
+            </a:r>
+          </a:p>
+        </p:txBody>
+      </p:sp>
+      <p:sp>
+        <p:nvSpPr>
+          <p:cNvPr id="6" name="TextBox 5"/>
+          <p:cNvSpPr txBox="1"/>
+          <p:nvPr/>
+        </p:nvSpPr>
+        <p:spPr>
+          <a:xfrm>
+            <a:off x="10728655" y="6291072"/>
+            <a:ext cx="548640" cy="256032"/>
+          </a:xfrm>
+          <a:prstGeom prst="rect">
+            <a:avLst/>
+          </a:prstGeom>
+          <a:noFill/>
+        </p:spPr>
+        <p:txBody>
+          <a:bodyPr wrap="square" anchor="t" lIns="0" rIns="0" tIns="0" bIns="0">
+            <a:spAutoFit/>
+          </a:bodyPr>
+          <a:lstStyle/>
+          <a:p>
+            <a:pPr algn="r">
+              <a:lnSpc>
+                <a:spcPct val="118000"/>
+              </a:lnSpc>
+            </a:pPr>
+            <a:r>
+              <a:rPr sz="900" b="0">
+                <a:solidFill>
+                  <a:srgbClr val="9BA6B8"/>
+                </a:solidFill>
+                <a:latin typeface="Arial"/>
+              </a:rPr>
+              <a:t>8</a:t>
+            </a:r>
+          </a:p>
+        </p:txBody>
+      </p:sp>
+      <p:sp>
+        <p:nvSpPr>
+          <p:cNvPr id="7" name="TextBox 6"/>
+          <p:cNvSpPr txBox="1"/>
+          <p:nvPr/>
+        </p:nvSpPr>
+        <p:spPr>
+          <a:xfrm>
+            <a:off x="914400" y="1874519"/>
+            <a:ext cx="10362895" cy="4114800"/>
+          </a:xfrm>
+          <a:prstGeom prst="rect">
+            <a:avLst/>
+          </a:prstGeom>
+          <a:noFill/>
+        </p:spPr>
+        <p:txBody>
+          <a:bodyPr wrap="square" anchor="ctr" lIns="0" rIns="0" tIns="0" bIns="0">
+            <a:spAutoFit/>
+          </a:bodyPr>
+          <a:lstStyle/>
+          <a:p>
+            <a:pPr algn="l" marL="274320" indent="-274320">
+              <a:lnSpc>
+                <a:spcPct val="122000"/>
+              </a:lnSpc>
+              <a:spcAft>
+                <a:spcPts val="1300"/>
+              </a:spcAft>
+              <a:buFont typeface="Arial"/>
+              <a:buChar char="—"/>
+            </a:pPr>
+            <a:r>
+              <a:rPr sz="1700" b="0">
+                <a:solidFill>
+                  <a:srgbClr val="EDEFF4"/>
+                </a:solidFill>
+                <a:latin typeface="Arial"/>
+              </a:rPr>
+              <a:t>The live engine’s CSV parser silently truncated cells at embedded quotes — row counts and headers still looked perfect.</a:t>
+            </a:r>
+          </a:p>
+          <a:p>
+            <a:pPr algn="l" marL="274320" indent="-274320">
+              <a:lnSpc>
+                <a:spcPct val="122000"/>
+              </a:lnSpc>
+              <a:spcAft>
+                <a:spcPts val="1300"/>
+              </a:spcAft>
+              <a:buFont typeface="Arial"/>
+              <a:buChar char="—"/>
+            </a:pPr>
+            <a:r>
+              <a:rPr sz="1700" b="0">
+                <a:solidFill>
+                  <a:srgbClr val="EDEFF4"/>
+                </a:solidFill>
+                <a:latin typeface="Arial"/>
+              </a:rPr>
+              <a:t>Our content-digest check rejected every affected fetch, so the run degraded to fixture data honestly instead of feeding corrupted rules to an agent.</a:t>
+            </a:r>
+          </a:p>
+          <a:p>
+            <a:pPr algn="l" marL="274320" indent="-274320">
+              <a:lnSpc>
+                <a:spcPct val="122000"/>
+              </a:lnSpc>
+              <a:spcAft>
+                <a:spcPts val="1300"/>
+              </a:spcAft>
+              <a:buFont typeface="Arial"/>
+              <a:buChar char="—"/>
+            </a:pPr>
+            <a:r>
+              <a:rPr sz="1700" b="0">
+                <a:solidFill>
+                  <a:srgbClr val="EDEFF4"/>
+                </a:solidFill>
+                <a:latin typeface="Arial"/>
+              </a:rPr>
+              <a:t>Response: a quote-safe re-export with unchanged digests, new immutable snapshots, and v1 revoked and dropped.</a:t>
+            </a:r>
+          </a:p>
+          <a:p>
+            <a:pPr algn="l" marL="274320" indent="-274320">
+              <a:lnSpc>
+                <a:spcPct val="122000"/>
+              </a:lnSpc>
+              <a:spcAft>
+                <a:spcPts val="1300"/>
+              </a:spcAft>
+              <a:buFont typeface="Arial"/>
+              <a:buChar char="—"/>
+            </a:pPr>
+            <a:r>
+              <a:rPr sz="1700" b="0">
+                <a:solidFill>
+                  <a:srgbClr val="EDEFF4"/>
+                </a:solidFill>
+                <a:latin typeface="Arial"/>
               </a:rPr>
               <a:t>“A connector’s happy path is not its contract — validate the payload after the wire, not just the status code.”</a:t>
             </a:r>
@@ -5539,7 +8782,7 @@
     <p:bg>
       <p:bgPr>
         <a:solidFill>
-          <a:srgbClr val="151A23"/>
+          <a:srgbClr val="14161C"/>
         </a:solidFill>
         <a:effectLst/>
       </p:bgPr>
@@ -5553,97 +8796,460 @@
       <p:grpSpPr/>
       <p:sp>
         <p:nvSpPr>
-          <p:cNvPr id="2" name="Title 1"/>
-          <p:cNvSpPr>
-            <a:spLocks noGrp="1"/>
-          </p:cNvSpPr>
-          <p:nvPr>
-            <p:ph type="title"/>
-          </p:nvPr>
-        </p:nvSpPr>
-        <p:spPr/>
-        <p:txBody>
-          <a:bodyPr/>
-          <a:lstStyle/>
-          <a:p>
-            <a:r>
-              <a:rPr>
-                <a:solidFill>
-                  <a:srgbClr val="E8ECF4"/>
-                </a:solidFill>
+          <p:cNvPr id="2" name="TextBox 1"/>
+          <p:cNvSpPr txBox="1"/>
+          <p:nvPr/>
+        </p:nvSpPr>
+        <p:spPr>
+          <a:xfrm>
+            <a:off x="914400" y="420624"/>
+            <a:ext cx="10362895" cy="274320"/>
+          </a:xfrm>
+          <a:prstGeom prst="rect">
+            <a:avLst/>
+          </a:prstGeom>
+          <a:noFill/>
+        </p:spPr>
+        <p:txBody>
+          <a:bodyPr wrap="square" anchor="t" lIns="0" rIns="0" tIns="0" bIns="0">
+            <a:spAutoFit/>
+          </a:bodyPr>
+          <a:lstStyle/>
+          <a:p>
+            <a:pPr algn="l">
+              <a:lnSpc>
+                <a:spcPct val="118000"/>
+              </a:lnSpc>
+            </a:pPr>
+            <a:r>
+              <a:rPr sz="1050" b="1">
+                <a:solidFill>
+                  <a:srgbClr val="4FD1C5"/>
+                </a:solidFill>
+                <a:latin typeface="Arial"/>
+              </a:rPr>
+              <a:t>MEASUREMENT</a:t>
+            </a:r>
+          </a:p>
+        </p:txBody>
+      </p:sp>
+      <p:sp>
+        <p:nvSpPr>
+          <p:cNvPr id="3" name="TextBox 2"/>
+          <p:cNvSpPr txBox="1"/>
+          <p:nvPr/>
+        </p:nvSpPr>
+        <p:spPr>
+          <a:xfrm>
+            <a:off x="914400" y="713232"/>
+            <a:ext cx="10362895" cy="914400"/>
+          </a:xfrm>
+          <a:prstGeom prst="rect">
+            <a:avLst/>
+          </a:prstGeom>
+          <a:noFill/>
+        </p:spPr>
+        <p:txBody>
+          <a:bodyPr wrap="square" anchor="t" lIns="0" rIns="0" tIns="0" bIns="0">
+            <a:spAutoFit/>
+          </a:bodyPr>
+          <a:lstStyle/>
+          <a:p>
+            <a:pPr algn="l">
+              <a:lnSpc>
+                <a:spcPct val="105000"/>
+              </a:lnSpc>
+            </a:pPr>
+            <a:r>
+              <a:rPr sz="2900" b="1">
+                <a:solidFill>
+                  <a:srgbClr val="EDEFF4"/>
+                </a:solidFill>
+                <a:latin typeface="Arial"/>
               </a:rPr>
               <a:t>Measured, not promised</a:t>
             </a:r>
           </a:p>
         </p:txBody>
       </p:sp>
-      <p:sp>
-        <p:nvSpPr>
-          <p:cNvPr id="3" name="Content Placeholder 2"/>
-          <p:cNvSpPr>
-            <a:spLocks noGrp="1"/>
-          </p:cNvSpPr>
-          <p:nvPr>
-            <p:ph idx="1"/>
-          </p:nvPr>
-        </p:nvSpPr>
-        <p:spPr/>
-        <p:txBody>
-          <a:bodyPr/>
-          <a:lstStyle/>
-          <a:p>
-            <a:pPr/>
-            <a:r>
-              <a:rPr sz="2000" b="1">
-                <a:solidFill>
-                  <a:srgbClr val="7DD3FC"/>
-                </a:solidFill>
-              </a:rPr>
-              <a:t>3 curated scenarios: precision 1.0 · recall 1.0 · verdict accuracy 1.0 · deterministic</a:t>
-            </a:r>
-          </a:p>
-          <a:p>
-            <a:pPr/>
-            <a:r>
-              <a:rPr sz="2000">
-                <a:solidFill>
-                  <a:srgbClr val="DDE3EC"/>
-                </a:solidFill>
-              </a:rPr>
-              <a:t>10 held-out generated tenancies: same scores — and the generator exposed two real defects the curated set missed; both fixed, both now guarded by tests</a:t>
-            </a:r>
-          </a:p>
-          <a:p>
-            <a:pPr/>
-            <a:r>
-              <a:rPr sz="2000">
-                <a:solidFill>
-                  <a:srgbClr val="DDE3EC"/>
-                </a:solidFill>
-              </a:rPr>
-              <a:t>456 tests; sample-mode isolation enforced by blocking sockets and subprocess creation with sponsor vars present and absent</a:t>
-            </a:r>
-          </a:p>
-          <a:p>
-            <a:pPr/>
-            <a:r>
-              <a:rPr sz="2000">
-                <a:solidFill>
-                  <a:srgbClr val="DDE3EC"/>
-                </a:solidFill>
-              </a:rPr>
-              <a:t>Packaging verified from fresh clone, in containers on x86 and arm64, via POST /run — JSON in, JSON out, no UI needed</a:t>
-            </a:r>
-          </a:p>
-          <a:p>
-            <a:pPr/>
-            <a:r>
-              <a:rPr sz="2000">
-                <a:solidFill>
-                  <a:srgbClr val="94A3B8"/>
-                </a:solidFill>
-              </a:rPr>
-              <a:t>Every external call has a timeout; every loop has a cap; a run finishes in minutes</a:t>
+      <p:cxnSp>
+        <p:nvCxnSpPr>
+          <p:cNvPr id="4" name="Connector 3"/>
+          <p:cNvCxnSpPr/>
+          <p:nvPr/>
+        </p:nvCxnSpPr>
+        <p:spPr>
+          <a:xfrm>
+            <a:off x="914400" y="1627632"/>
+            <a:ext cx="1371600" cy="0"/>
+          </a:xfrm>
+          <a:prstGeom prst="line">
+            <a:avLst/>
+          </a:prstGeom>
+          <a:ln w="31750">
+            <a:solidFill>
+              <a:srgbClr val="4FD1C5"/>
+            </a:solidFill>
+          </a:ln>
+        </p:spPr>
+        <p:style>
+          <a:lnRef idx="2">
+            <a:schemeClr val="accent1"/>
+          </a:lnRef>
+          <a:fillRef idx="0">
+            <a:schemeClr val="accent1"/>
+          </a:fillRef>
+          <a:effectRef idx="1">
+            <a:schemeClr val="accent1"/>
+          </a:effectRef>
+          <a:fontRef idx="minor">
+            <a:schemeClr val="tx1"/>
+          </a:fontRef>
+        </p:style>
+      </p:cxnSp>
+      <p:sp>
+        <p:nvSpPr>
+          <p:cNvPr id="5" name="TextBox 4"/>
+          <p:cNvSpPr txBox="1"/>
+          <p:nvPr/>
+        </p:nvSpPr>
+        <p:spPr>
+          <a:xfrm>
+            <a:off x="914400" y="6291072"/>
+            <a:ext cx="7315200" cy="256032"/>
+          </a:xfrm>
+          <a:prstGeom prst="rect">
+            <a:avLst/>
+          </a:prstGeom>
+          <a:noFill/>
+        </p:spPr>
+        <p:txBody>
+          <a:bodyPr wrap="square" anchor="t" lIns="0" rIns="0" tIns="0" bIns="0">
+            <a:spAutoFit/>
+          </a:bodyPr>
+          <a:lstStyle/>
+          <a:p>
+            <a:pPr algn="l">
+              <a:lnSpc>
+                <a:spcPct val="118000"/>
+              </a:lnSpc>
+            </a:pPr>
+            <a:r>
+              <a:rPr sz="900" b="0">
+                <a:solidFill>
+                  <a:srgbClr val="9BA6B8"/>
+                </a:solidFill>
+                <a:latin typeface="Arial"/>
+              </a:rPr>
+              <a:t>Driftwatch  ·  Open Agent Hackathon 2026  ·  Wildcard [Tinkerer]</a:t>
+            </a:r>
+          </a:p>
+        </p:txBody>
+      </p:sp>
+      <p:sp>
+        <p:nvSpPr>
+          <p:cNvPr id="6" name="TextBox 5"/>
+          <p:cNvSpPr txBox="1"/>
+          <p:nvPr/>
+        </p:nvSpPr>
+        <p:spPr>
+          <a:xfrm>
+            <a:off x="10728655" y="6291072"/>
+            <a:ext cx="548640" cy="256032"/>
+          </a:xfrm>
+          <a:prstGeom prst="rect">
+            <a:avLst/>
+          </a:prstGeom>
+          <a:noFill/>
+        </p:spPr>
+        <p:txBody>
+          <a:bodyPr wrap="square" anchor="t" lIns="0" rIns="0" tIns="0" bIns="0">
+            <a:spAutoFit/>
+          </a:bodyPr>
+          <a:lstStyle/>
+          <a:p>
+            <a:pPr algn="r">
+              <a:lnSpc>
+                <a:spcPct val="118000"/>
+              </a:lnSpc>
+            </a:pPr>
+            <a:r>
+              <a:rPr sz="900" b="0">
+                <a:solidFill>
+                  <a:srgbClr val="9BA6B8"/>
+                </a:solidFill>
+                <a:latin typeface="Arial"/>
+              </a:rPr>
+              <a:t>9</a:t>
+            </a:r>
+          </a:p>
+        </p:txBody>
+      </p:sp>
+      <p:sp>
+        <p:nvSpPr>
+          <p:cNvPr id="7" name="Rounded Rectangle 6"/>
+          <p:cNvSpPr/>
+          <p:nvPr/>
+        </p:nvSpPr>
+        <p:spPr>
+          <a:xfrm>
+            <a:off x="914400" y="1920240"/>
+            <a:ext cx="3246120" cy="1874519"/>
+          </a:xfrm>
+          <a:prstGeom prst="roundRect">
+            <a:avLst>
+              <a:gd name="adj" fmla="val 6000"/>
+            </a:avLst>
+          </a:prstGeom>
+          <a:solidFill>
+            <a:srgbClr val="1E222C"/>
+          </a:solidFill>
+          <a:ln>
+            <a:noFill/>
+          </a:ln>
+          <a:effectLst/>
+        </p:spPr>
+        <p:txBody>
+          <a:bodyPr rtlCol="0" anchor="t" wrap="square" lIns="164592" rIns="164592" tIns="91440" bIns="91440"/>
+          <a:lstStyle/>
+          <a:p>
+            <a:pPr algn="l">
+              <a:lnSpc>
+                <a:spcPct val="100000"/>
+              </a:lnSpc>
+            </a:pPr>
+            <a:r>
+              <a:rPr sz="3400" b="1">
+                <a:solidFill>
+                  <a:srgbClr val="4FD1C5"/>
+                </a:solidFill>
+                <a:latin typeface="Arial"/>
+              </a:rPr>
+              <a:t>3 / 3</a:t>
+            </a:r>
+          </a:p>
+          <a:p>
+            <a:pPr algn="l">
+              <a:lnSpc>
+                <a:spcPct val="120000"/>
+              </a:lnSpc>
+            </a:pPr>
+            <a:r>
+              <a:rPr sz="1150" b="0">
+                <a:solidFill>
+                  <a:srgbClr val="9BA6B8"/>
+                </a:solidFill>
+                <a:latin typeface="Arial"/>
+              </a:rPr>
+              <a:t>Curated scenarios — precision, recall and verdict accuracy all 1.0, deterministic</a:t>
+            </a:r>
+          </a:p>
+        </p:txBody>
+      </p:sp>
+      <p:sp>
+        <p:nvSpPr>
+          <p:cNvPr id="8" name="Rounded Rectangle 7"/>
+          <p:cNvSpPr/>
+          <p:nvPr/>
+        </p:nvSpPr>
+        <p:spPr>
+          <a:xfrm>
+            <a:off x="4471416" y="1920240"/>
+            <a:ext cx="3246120" cy="1874519"/>
+          </a:xfrm>
+          <a:prstGeom prst="roundRect">
+            <a:avLst>
+              <a:gd name="adj" fmla="val 6000"/>
+            </a:avLst>
+          </a:prstGeom>
+          <a:solidFill>
+            <a:srgbClr val="1E222C"/>
+          </a:solidFill>
+          <a:ln>
+            <a:noFill/>
+          </a:ln>
+          <a:effectLst/>
+        </p:spPr>
+        <p:txBody>
+          <a:bodyPr rtlCol="0" anchor="t" wrap="square" lIns="164592" rIns="164592" tIns="91440" bIns="91440"/>
+          <a:lstStyle/>
+          <a:p>
+            <a:pPr algn="l">
+              <a:lnSpc>
+                <a:spcPct val="100000"/>
+              </a:lnSpc>
+            </a:pPr>
+            <a:r>
+              <a:rPr sz="3400" b="1">
+                <a:solidFill>
+                  <a:srgbClr val="4FD1C5"/>
+                </a:solidFill>
+                <a:latin typeface="Arial"/>
+              </a:rPr>
+              <a:t>10</a:t>
+            </a:r>
+          </a:p>
+          <a:p>
+            <a:pPr algn="l">
+              <a:lnSpc>
+                <a:spcPct val="120000"/>
+              </a:lnSpc>
+            </a:pPr>
+            <a:r>
+              <a:rPr sz="1150" b="0">
+                <a:solidFill>
+                  <a:srgbClr val="9BA6B8"/>
+                </a:solidFill>
+                <a:latin typeface="Arial"/>
+              </a:rPr>
+              <a:t>Held-out generated tenancies, same scores; the generator exposed two defects the curated set missed</a:t>
+            </a:r>
+          </a:p>
+        </p:txBody>
+      </p:sp>
+      <p:sp>
+        <p:nvSpPr>
+          <p:cNvPr id="9" name="Rounded Rectangle 8"/>
+          <p:cNvSpPr/>
+          <p:nvPr/>
+        </p:nvSpPr>
+        <p:spPr>
+          <a:xfrm>
+            <a:off x="8028431" y="1920240"/>
+            <a:ext cx="3246120" cy="1874519"/>
+          </a:xfrm>
+          <a:prstGeom prst="roundRect">
+            <a:avLst>
+              <a:gd name="adj" fmla="val 6000"/>
+            </a:avLst>
+          </a:prstGeom>
+          <a:solidFill>
+            <a:srgbClr val="1E222C"/>
+          </a:solidFill>
+          <a:ln>
+            <a:noFill/>
+          </a:ln>
+          <a:effectLst/>
+        </p:spPr>
+        <p:txBody>
+          <a:bodyPr rtlCol="0" anchor="t" wrap="square" lIns="164592" rIns="164592" tIns="91440" bIns="91440"/>
+          <a:lstStyle/>
+          <a:p>
+            <a:pPr algn="l">
+              <a:lnSpc>
+                <a:spcPct val="100000"/>
+              </a:lnSpc>
+            </a:pPr>
+            <a:r>
+              <a:rPr sz="3400" b="1">
+                <a:solidFill>
+                  <a:srgbClr val="F2B36B"/>
+                </a:solidFill>
+                <a:latin typeface="Arial"/>
+              </a:rPr>
+              <a:t>465</a:t>
+            </a:r>
+          </a:p>
+          <a:p>
+            <a:pPr algn="l">
+              <a:lnSpc>
+                <a:spcPct val="120000"/>
+              </a:lnSpc>
+            </a:pPr>
+            <a:r>
+              <a:rPr sz="1150" b="0">
+                <a:solidFill>
+                  <a:srgbClr val="9BA6B8"/>
+                </a:solidFill>
+                <a:latin typeface="Arial"/>
+              </a:rPr>
+              <a:t>Tests, including sample-mode isolation enforced by blocking sockets and subprocess creation</a:t>
+            </a:r>
+          </a:p>
+        </p:txBody>
+      </p:sp>
+      <p:sp>
+        <p:nvSpPr>
+          <p:cNvPr id="10" name="TextBox 9"/>
+          <p:cNvSpPr txBox="1"/>
+          <p:nvPr/>
+        </p:nvSpPr>
+        <p:spPr>
+          <a:xfrm>
+            <a:off x="914400" y="4069080"/>
+            <a:ext cx="10362895" cy="1920239"/>
+          </a:xfrm>
+          <a:prstGeom prst="rect">
+            <a:avLst/>
+          </a:prstGeom>
+          <a:noFill/>
+        </p:spPr>
+        <p:txBody>
+          <a:bodyPr wrap="square" anchor="ctr" lIns="0" rIns="0" tIns="0" bIns="0">
+            <a:spAutoFit/>
+          </a:bodyPr>
+          <a:lstStyle/>
+          <a:p>
+            <a:pPr algn="l" marL="274320" indent="-274320">
+              <a:lnSpc>
+                <a:spcPct val="122000"/>
+              </a:lnSpc>
+              <a:spcAft>
+                <a:spcPts val="800"/>
+              </a:spcAft>
+              <a:buFont typeface="Arial"/>
+              <a:buChar char="—"/>
+            </a:pPr>
+            <a:r>
+              <a:rPr sz="1450" b="0">
+                <a:solidFill>
+                  <a:srgbClr val="EDEFF4"/>
+                </a:solidFill>
+                <a:latin typeface="Arial"/>
+              </a:rPr>
+              <a:t>Undefined metrics stay n/a rather than being scored as perfect; a clean tenancy must produce no findings at all.</a:t>
+            </a:r>
+          </a:p>
+          <a:p>
+            <a:pPr algn="l" marL="274320" indent="-274320">
+              <a:lnSpc>
+                <a:spcPct val="122000"/>
+              </a:lnSpc>
+              <a:spcAft>
+                <a:spcPts val="800"/>
+              </a:spcAft>
+              <a:buFont typeface="Arial"/>
+              <a:buChar char="—"/>
+            </a:pPr>
+            <a:r>
+              <a:rPr sz="1450" b="0">
+                <a:solidFill>
+                  <a:srgbClr val="EDEFF4"/>
+                </a:solidFill>
+                <a:latin typeface="Arial"/>
+              </a:rPr>
+              <a:t>Every external call has a timeout, every loop has a cap, and a run finishes in minutes.</a:t>
+            </a:r>
+          </a:p>
+          <a:p>
+            <a:pPr algn="l" marL="274320" indent="-274320">
+              <a:lnSpc>
+                <a:spcPct val="122000"/>
+              </a:lnSpc>
+              <a:spcAft>
+                <a:spcPts val="800"/>
+              </a:spcAft>
+              <a:buFont typeface="Arial"/>
+              <a:buChar char="—"/>
+            </a:pPr>
+            <a:r>
+              <a:rPr sz="1450" b="0">
+                <a:solidFill>
+                  <a:srgbClr val="EDEFF4"/>
+                </a:solidFill>
+                <a:latin typeface="Arial"/>
+              </a:rPr>
+              <a:t>Packaging verified from a fresh public clone, and the offline path re-run with network and DNS denied.</a:t>
             </a:r>
           </a:p>
         </p:txBody>

--- a/docs/demo/driftwatch-deck.pptx
+++ b/docs/demo/driftwatch-deck.pptx
@@ -16,6 +16,7 @@
     <p:sldId id="264" r:id="rId16"/>
     <p:sldId id="265" r:id="rId17"/>
     <p:sldId id="266" r:id="rId18"/>
+    <p:sldId id="267" r:id="rId19"/>
   </p:sldIdLst>
   <p:sldSz cx="12191695" cy="6858000" type="screen4x3"/>
   <p:notesSz cx="6858000" cy="9144000"/>
@@ -582,7 +583,7 @@
           <a:lstStyle/>
           <a:p>
             <a:r>
-              <a:t>Attribution is a rule, not a courtesy. This slide lists what each tool actually did.</a:t>
+              <a:t>Numbers on a slide are cheap. These are the ones the repo can reproduce, including the two defects the held-out generator found.</a:t>
             </a:r>
           </a:p>
         </p:txBody>
@@ -652,6 +653,76 @@
           <a:lstStyle/>
           <a:p>
             <a:r>
+              <a:t>Attribution is a rule, not a courtesy. This slide lists what each tool actually did.</a:t>
+            </a:r>
+          </a:p>
+        </p:txBody>
+      </p:sp>
+      <p:sp>
+        <p:nvSpPr>
+          <p:cNvPr id="4" name="Slide Number Placeholder 3"/>
+          <p:cNvSpPr>
+            <a:spLocks noGrp="1"/>
+          </p:cNvSpPr>
+          <p:nvPr>
+            <p:ph type="sldNum" idx="5" sz="quarter"/>
+          </p:nvPr>
+        </p:nvSpPr>
+        <p:spPr/>
+      </p:sp>
+    </p:spTree>
+  </p:cSld>
+  <p:clrMapOvr>
+    <a:masterClrMapping/>
+  </p:clrMapOvr>
+</p:notes>
+</file>
+
+<file path=ppt/notesSlides/notesSlide12.xml><?xml version="1.0" encoding="utf-8"?>
+<p:notes xmlns:a="http://schemas.openxmlformats.org/drawingml/2006/main" xmlns:p="http://schemas.openxmlformats.org/presentationml/2006/main" xmlns:r="http://schemas.openxmlformats.org/officeDocument/2006/relationships">
+  <p:cSld>
+    <p:spTree>
+      <p:nvGrpSpPr>
+        <p:cNvPr id="1" name=""/>
+        <p:cNvGrpSpPr/>
+        <p:nvPr/>
+      </p:nvGrpSpPr>
+      <p:grpSpPr>
+        <a:xfrm>
+          <a:off x="0" y="0"/>
+          <a:ext cx="0" cy="0"/>
+          <a:chOff x="0" y="0"/>
+          <a:chExt cx="0" cy="0"/>
+        </a:xfrm>
+      </p:grpSpPr>
+      <p:sp>
+        <p:nvSpPr>
+          <p:cNvPr id="2" name="Slide Image Placeholder 1"/>
+          <p:cNvSpPr>
+            <a:spLocks noGrp="1"/>
+          </p:cNvSpPr>
+          <p:nvPr>
+            <p:ph type="sldImg" idx="2"/>
+          </p:nvPr>
+        </p:nvSpPr>
+        <p:spPr/>
+      </p:sp>
+      <p:sp>
+        <p:nvSpPr>
+          <p:cNvPr id="3" name="Notes Placeholder 2"/>
+          <p:cNvSpPr>
+            <a:spLocks noGrp="1"/>
+          </p:cNvSpPr>
+          <p:nvPr>
+            <p:ph type="body" idx="3" sz="quarter"/>
+          </p:nvPr>
+        </p:nvSpPr>
+        <p:spPr/>
+        <p:txBody>
+          <a:bodyPr/>
+          <a:lstStyle/>
+          <a:p>
+            <a:r>
               <a:t>A judge can clone and run this in two commands. Nothing installs at run time.</a:t>
             </a:r>
           </a:p>
@@ -1142,7 +1213,7 @@
           <a:lstStyle/>
           <a:p>
             <a:r>
-              <a:t>This is the credibility slide: the guard that was built to catch our own bad data caught the vendor's.</a:t>
+              <a:t>The screenshot is the actual terminal output of the Zetaris acceptance run that the evidence directory records. It is here so a judge can read the diff without leaving the deck.</a:t>
             </a:r>
           </a:p>
         </p:txBody>
@@ -1212,7 +1283,7 @@
           <a:lstStyle/>
           <a:p>
             <a:r>
-              <a:t>Numbers on a slide are cheap. These are the ones the repo can reproduce, including the two defects the held-out generator found.</a:t>
+              <a:t>This is the credibility slide: the guard that was built to catch our own bad data caught the vendor's.</a:t>
             </a:r>
           </a:p>
         </p:txBody>
@@ -4572,7 +4643,7 @@
                 </a:solidFill>
                 <a:latin typeface="Arial"/>
               </a:rPr>
-              <a:t>DISCLOSURE</a:t>
+              <a:t>MEASUREMENT</a:t>
             </a:r>
           </a:p>
         </p:txBody>
@@ -4611,7 +4682,7 @@
                 </a:solidFill>
                 <a:latin typeface="Arial"/>
               </a:rPr>
-              <a:t>How it was built — attributed honestly</a:t>
+              <a:t>Measured, not promised</a:t>
             </a:r>
           </a:p>
         </p:txBody>
@@ -4731,14 +4802,197 @@
       </p:sp>
       <p:sp>
         <p:nvSpPr>
-          <p:cNvPr id="7" name="TextBox 6"/>
+          <p:cNvPr id="7" name="Rounded Rectangle 6"/>
+          <p:cNvSpPr/>
+          <p:nvPr/>
+        </p:nvSpPr>
+        <p:spPr>
+          <a:xfrm>
+            <a:off x="914400" y="1920240"/>
+            <a:ext cx="3246120" cy="1874519"/>
+          </a:xfrm>
+          <a:prstGeom prst="roundRect">
+            <a:avLst>
+              <a:gd name="adj" fmla="val 6000"/>
+            </a:avLst>
+          </a:prstGeom>
+          <a:solidFill>
+            <a:srgbClr val="1E222C"/>
+          </a:solidFill>
+          <a:ln>
+            <a:noFill/>
+          </a:ln>
+          <a:effectLst/>
+        </p:spPr>
+        <p:txBody>
+          <a:bodyPr rtlCol="0" anchor="t" wrap="square" lIns="164592" rIns="164592" tIns="91440" bIns="91440"/>
+          <a:lstStyle/>
+          <a:p>
+            <a:pPr algn="l">
+              <a:lnSpc>
+                <a:spcPct val="100000"/>
+              </a:lnSpc>
+            </a:pPr>
+            <a:r>
+              <a:rPr sz="3400" b="1">
+                <a:solidFill>
+                  <a:srgbClr val="4FD1C5"/>
+                </a:solidFill>
+                <a:latin typeface="Arial"/>
+              </a:rPr>
+              <a:t>3 / 3</a:t>
+            </a:r>
+          </a:p>
+          <a:p>
+            <a:pPr algn="l">
+              <a:lnSpc>
+                <a:spcPct val="120000"/>
+              </a:lnSpc>
+            </a:pPr>
+            <a:r>
+              <a:rPr sz="1150" b="0">
+                <a:solidFill>
+                  <a:srgbClr val="9BA6B8"/>
+                </a:solidFill>
+                <a:latin typeface="Arial"/>
+              </a:rPr>
+              <a:t>Curated scenarios — precision, recall and verdict accuracy all 1.0, deterministic</a:t>
+            </a:r>
+          </a:p>
+        </p:txBody>
+      </p:sp>
+      <p:sp>
+        <p:nvSpPr>
+          <p:cNvPr id="8" name="Rounded Rectangle 7"/>
+          <p:cNvSpPr/>
+          <p:nvPr/>
+        </p:nvSpPr>
+        <p:spPr>
+          <a:xfrm>
+            <a:off x="4471416" y="1920240"/>
+            <a:ext cx="3246120" cy="1874519"/>
+          </a:xfrm>
+          <a:prstGeom prst="roundRect">
+            <a:avLst>
+              <a:gd name="adj" fmla="val 6000"/>
+            </a:avLst>
+          </a:prstGeom>
+          <a:solidFill>
+            <a:srgbClr val="1E222C"/>
+          </a:solidFill>
+          <a:ln>
+            <a:noFill/>
+          </a:ln>
+          <a:effectLst/>
+        </p:spPr>
+        <p:txBody>
+          <a:bodyPr rtlCol="0" anchor="t" wrap="square" lIns="164592" rIns="164592" tIns="91440" bIns="91440"/>
+          <a:lstStyle/>
+          <a:p>
+            <a:pPr algn="l">
+              <a:lnSpc>
+                <a:spcPct val="100000"/>
+              </a:lnSpc>
+            </a:pPr>
+            <a:r>
+              <a:rPr sz="3400" b="1">
+                <a:solidFill>
+                  <a:srgbClr val="4FD1C5"/>
+                </a:solidFill>
+                <a:latin typeface="Arial"/>
+              </a:rPr>
+              <a:t>10</a:t>
+            </a:r>
+          </a:p>
+          <a:p>
+            <a:pPr algn="l">
+              <a:lnSpc>
+                <a:spcPct val="120000"/>
+              </a:lnSpc>
+            </a:pPr>
+            <a:r>
+              <a:rPr sz="1150" b="0">
+                <a:solidFill>
+                  <a:srgbClr val="9BA6B8"/>
+                </a:solidFill>
+                <a:latin typeface="Arial"/>
+              </a:rPr>
+              <a:t>Held-out generated tenancies, same scores; the generator exposed two defects the curated set missed</a:t>
+            </a:r>
+          </a:p>
+        </p:txBody>
+      </p:sp>
+      <p:sp>
+        <p:nvSpPr>
+          <p:cNvPr id="9" name="Rounded Rectangle 8"/>
+          <p:cNvSpPr/>
+          <p:nvPr/>
+        </p:nvSpPr>
+        <p:spPr>
+          <a:xfrm>
+            <a:off x="8028431" y="1920240"/>
+            <a:ext cx="3246120" cy="1874519"/>
+          </a:xfrm>
+          <a:prstGeom prst="roundRect">
+            <a:avLst>
+              <a:gd name="adj" fmla="val 6000"/>
+            </a:avLst>
+          </a:prstGeom>
+          <a:solidFill>
+            <a:srgbClr val="1E222C"/>
+          </a:solidFill>
+          <a:ln>
+            <a:noFill/>
+          </a:ln>
+          <a:effectLst/>
+        </p:spPr>
+        <p:txBody>
+          <a:bodyPr rtlCol="0" anchor="t" wrap="square" lIns="164592" rIns="164592" tIns="91440" bIns="91440"/>
+          <a:lstStyle/>
+          <a:p>
+            <a:pPr algn="l">
+              <a:lnSpc>
+                <a:spcPct val="100000"/>
+              </a:lnSpc>
+            </a:pPr>
+            <a:r>
+              <a:rPr sz="3400" b="1">
+                <a:solidFill>
+                  <a:srgbClr val="F2B36B"/>
+                </a:solidFill>
+                <a:latin typeface="Arial"/>
+              </a:rPr>
+              <a:t>465</a:t>
+            </a:r>
+          </a:p>
+          <a:p>
+            <a:pPr algn="l">
+              <a:lnSpc>
+                <a:spcPct val="120000"/>
+              </a:lnSpc>
+            </a:pPr>
+            <a:r>
+              <a:rPr sz="1150" b="0">
+                <a:solidFill>
+                  <a:srgbClr val="9BA6B8"/>
+                </a:solidFill>
+                <a:latin typeface="Arial"/>
+              </a:rPr>
+              <a:t>Tests, including sample-mode isolation enforced by blocking sockets and subprocess creation</a:t>
+            </a:r>
+          </a:p>
+        </p:txBody>
+      </p:sp>
+      <p:sp>
+        <p:nvSpPr>
+          <p:cNvPr id="10" name="TextBox 9"/>
           <p:cNvSpPr txBox="1"/>
           <p:nvPr/>
         </p:nvSpPr>
         <p:spPr>
           <a:xfrm>
-            <a:off x="914400" y="1874519"/>
-            <a:ext cx="10362895" cy="4114800"/>
+            <a:off x="914400" y="4069080"/>
+            <a:ext cx="10362895" cy="1920239"/>
           </a:xfrm>
           <a:prstGeom prst="rect">
             <a:avLst/>
@@ -4756,19 +5010,19 @@
                 <a:spcPct val="122000"/>
               </a:lnSpc>
               <a:spcAft>
-                <a:spcPts val="1300"/>
+                <a:spcPts val="800"/>
               </a:spcAft>
               <a:buFont typeface="Arial"/>
               <a:buChar char="—"/>
             </a:pPr>
             <a:r>
-              <a:rPr sz="1700" b="0">
+              <a:rPr sz="1450" b="0">
                 <a:solidFill>
                   <a:srgbClr val="EDEFF4"/>
                 </a:solidFill>
                 <a:latin typeface="Arial"/>
               </a:rPr>
-              <a:t>Cursor drove the first two tasks before its free-tier quota ran out; the blocker was posted and the sessions are retained.</a:t>
+              <a:t>Undefined metrics stay n/a rather than being scored as perfect; a clean tenancy must produce no findings at all.</a:t>
             </a:r>
           </a:p>
           <a:p>
@@ -4777,19 +5031,19 @@
                 <a:spcPct val="122000"/>
               </a:lnSpc>
               <a:spcAft>
-                <a:spcPts val="1300"/>
+                <a:spcPts val="800"/>
               </a:spcAft>
               <a:buFont typeface="Arial"/>
               <a:buChar char="—"/>
             </a:pPr>
             <a:r>
-              <a:rPr sz="1700" b="0">
+              <a:rPr sz="1450" b="0">
                 <a:solidFill>
                   <a:srgbClr val="EDEFF4"/>
                 </a:solidFill>
                 <a:latin typeface="Arial"/>
               </a:rPr>
-              <a:t>Hermes drove the remaining tasks with tests first; per-task attribution lives in the committed build log.</a:t>
+              <a:t>Every external call has a timeout, every loop has a cap, and a run finishes in minutes.</a:t>
             </a:r>
           </a:p>
           <a:p>
@@ -4798,40 +5052,19 @@
                 <a:spcPct val="122000"/>
               </a:lnSpc>
               <a:spcAft>
-                <a:spcPts val="1300"/>
+                <a:spcPts val="800"/>
               </a:spcAft>
               <a:buFont typeface="Arial"/>
               <a:buChar char="—"/>
             </a:pPr>
             <a:r>
-              <a:rPr sz="1700" b="0">
+              <a:rPr sz="1450" b="0">
                 <a:solidFill>
                   <a:srgbClr val="EDEFF4"/>
                 </a:solidFill>
                 <a:latin typeface="Arial"/>
               </a:rPr>
-              <a:t>Every mutating step on the live Zetaris instance went through a dry-run approval package first — recorded in decisions.md.</a:t>
-            </a:r>
-          </a:p>
-          <a:p>
-            <a:pPr algn="l" marL="274320" indent="-274320">
-              <a:lnSpc>
-                <a:spcPct val="122000"/>
-              </a:lnSpc>
-              <a:spcAft>
-                <a:spcPts val="1300"/>
-              </a:spcAft>
-              <a:buFont typeface="Arial"/>
-              <a:buChar char="—"/>
-            </a:pPr>
-            <a:r>
-              <a:rPr sz="1700" b="0">
-                <a:solidFill>
-                  <a:srgbClr val="EDEFF4"/>
-                </a:solidFill>
-                <a:latin typeface="Arial"/>
-              </a:rPr>
-              <a:t>Pre-existing components are declared in the submission form; the build window work is scored separately.</a:t>
+              <a:t>Packaging verified from a fresh public clone, and the offline path re-run with network and DNS denied.</a:t>
             </a:r>
           </a:p>
         </p:txBody>
@@ -4896,7 +5129,7 @@
                 </a:solidFill>
                 <a:latin typeface="Arial"/>
               </a:rPr>
-              <a:t>REPRODUCE</a:t>
+              <a:t>DISCLOSURE</a:t>
             </a:r>
           </a:p>
         </p:txBody>
@@ -4935,7 +5168,7 @@
                 </a:solidFill>
                 <a:latin typeface="Arial"/>
               </a:rPr>
-              <a:t>Run it yourself — no keys required</a:t>
+              <a:t>How it was built — attributed honestly</a:t>
             </a:r>
           </a:p>
         </p:txBody>
@@ -5049,6 +5282,330 @@
                 <a:latin typeface="Arial"/>
               </a:rPr>
               <a:t>11</a:t>
+            </a:r>
+          </a:p>
+        </p:txBody>
+      </p:sp>
+      <p:sp>
+        <p:nvSpPr>
+          <p:cNvPr id="7" name="TextBox 6"/>
+          <p:cNvSpPr txBox="1"/>
+          <p:nvPr/>
+        </p:nvSpPr>
+        <p:spPr>
+          <a:xfrm>
+            <a:off x="914400" y="1874519"/>
+            <a:ext cx="10362895" cy="4114800"/>
+          </a:xfrm>
+          <a:prstGeom prst="rect">
+            <a:avLst/>
+          </a:prstGeom>
+          <a:noFill/>
+        </p:spPr>
+        <p:txBody>
+          <a:bodyPr wrap="square" anchor="ctr" lIns="0" rIns="0" tIns="0" bIns="0">
+            <a:spAutoFit/>
+          </a:bodyPr>
+          <a:lstStyle/>
+          <a:p>
+            <a:pPr algn="l" marL="274320" indent="-274320">
+              <a:lnSpc>
+                <a:spcPct val="122000"/>
+              </a:lnSpc>
+              <a:spcAft>
+                <a:spcPts val="1300"/>
+              </a:spcAft>
+              <a:buFont typeface="Arial"/>
+              <a:buChar char="—"/>
+            </a:pPr>
+            <a:r>
+              <a:rPr sz="1700" b="0">
+                <a:solidFill>
+                  <a:srgbClr val="EDEFF4"/>
+                </a:solidFill>
+                <a:latin typeface="Arial"/>
+              </a:rPr>
+              <a:t>Cursor drove the first two tasks before its free-tier quota ran out; the blocker was posted and the sessions are retained.</a:t>
+            </a:r>
+          </a:p>
+          <a:p>
+            <a:pPr algn="l" marL="274320" indent="-274320">
+              <a:lnSpc>
+                <a:spcPct val="122000"/>
+              </a:lnSpc>
+              <a:spcAft>
+                <a:spcPts val="1300"/>
+              </a:spcAft>
+              <a:buFont typeface="Arial"/>
+              <a:buChar char="—"/>
+            </a:pPr>
+            <a:r>
+              <a:rPr sz="1700" b="0">
+                <a:solidFill>
+                  <a:srgbClr val="EDEFF4"/>
+                </a:solidFill>
+                <a:latin typeface="Arial"/>
+              </a:rPr>
+              <a:t>Hermes drove the remaining tasks with tests first; per-task attribution lives in the committed build log.</a:t>
+            </a:r>
+          </a:p>
+          <a:p>
+            <a:pPr algn="l" marL="274320" indent="-274320">
+              <a:lnSpc>
+                <a:spcPct val="122000"/>
+              </a:lnSpc>
+              <a:spcAft>
+                <a:spcPts val="1300"/>
+              </a:spcAft>
+              <a:buFont typeface="Arial"/>
+              <a:buChar char="—"/>
+            </a:pPr>
+            <a:r>
+              <a:rPr sz="1700" b="0">
+                <a:solidFill>
+                  <a:srgbClr val="EDEFF4"/>
+                </a:solidFill>
+                <a:latin typeface="Arial"/>
+              </a:rPr>
+              <a:t>Every mutating step on the live Zetaris instance went through a dry-run approval package first — recorded in decisions.md.</a:t>
+            </a:r>
+          </a:p>
+          <a:p>
+            <a:pPr algn="l" marL="274320" indent="-274320">
+              <a:lnSpc>
+                <a:spcPct val="122000"/>
+              </a:lnSpc>
+              <a:spcAft>
+                <a:spcPts val="1300"/>
+              </a:spcAft>
+              <a:buFont typeface="Arial"/>
+              <a:buChar char="—"/>
+            </a:pPr>
+            <a:r>
+              <a:rPr sz="1700" b="0">
+                <a:solidFill>
+                  <a:srgbClr val="EDEFF4"/>
+                </a:solidFill>
+                <a:latin typeface="Arial"/>
+              </a:rPr>
+              <a:t>Pre-existing components are declared in the submission form; the build window work is scored separately.</a:t>
+            </a:r>
+          </a:p>
+        </p:txBody>
+      </p:sp>
+    </p:spTree>
+  </p:cSld>
+  <p:clrMapOvr>
+    <a:masterClrMapping/>
+  </p:clrMapOvr>
+</p:sld>
+</file>
+
+<file path=ppt/slides/slide12.xml><?xml version="1.0" encoding="utf-8"?>
+<p:sld xmlns:a="http://schemas.openxmlformats.org/drawingml/2006/main" xmlns:p="http://schemas.openxmlformats.org/presentationml/2006/main" xmlns:r="http://schemas.openxmlformats.org/officeDocument/2006/relationships">
+  <p:cSld>
+    <p:bg>
+      <p:bgPr>
+        <a:solidFill>
+          <a:srgbClr val="14161C"/>
+        </a:solidFill>
+        <a:effectLst/>
+      </p:bgPr>
+    </p:bg>
+    <p:spTree>
+      <p:nvGrpSpPr>
+        <p:cNvPr id="1" name=""/>
+        <p:cNvGrpSpPr/>
+        <p:nvPr/>
+      </p:nvGrpSpPr>
+      <p:grpSpPr/>
+      <p:sp>
+        <p:nvSpPr>
+          <p:cNvPr id="2" name="TextBox 1"/>
+          <p:cNvSpPr txBox="1"/>
+          <p:nvPr/>
+        </p:nvSpPr>
+        <p:spPr>
+          <a:xfrm>
+            <a:off x="914400" y="420624"/>
+            <a:ext cx="10362895" cy="274320"/>
+          </a:xfrm>
+          <a:prstGeom prst="rect">
+            <a:avLst/>
+          </a:prstGeom>
+          <a:noFill/>
+        </p:spPr>
+        <p:txBody>
+          <a:bodyPr wrap="square" anchor="t" lIns="0" rIns="0" tIns="0" bIns="0">
+            <a:spAutoFit/>
+          </a:bodyPr>
+          <a:lstStyle/>
+          <a:p>
+            <a:pPr algn="l">
+              <a:lnSpc>
+                <a:spcPct val="118000"/>
+              </a:lnSpc>
+            </a:pPr>
+            <a:r>
+              <a:rPr sz="1050" b="1">
+                <a:solidFill>
+                  <a:srgbClr val="4FD1C5"/>
+                </a:solidFill>
+                <a:latin typeface="Arial"/>
+              </a:rPr>
+              <a:t>REPRODUCE</a:t>
+            </a:r>
+          </a:p>
+        </p:txBody>
+      </p:sp>
+      <p:sp>
+        <p:nvSpPr>
+          <p:cNvPr id="3" name="TextBox 2"/>
+          <p:cNvSpPr txBox="1"/>
+          <p:nvPr/>
+        </p:nvSpPr>
+        <p:spPr>
+          <a:xfrm>
+            <a:off x="914400" y="713232"/>
+            <a:ext cx="10362895" cy="914400"/>
+          </a:xfrm>
+          <a:prstGeom prst="rect">
+            <a:avLst/>
+          </a:prstGeom>
+          <a:noFill/>
+        </p:spPr>
+        <p:txBody>
+          <a:bodyPr wrap="square" anchor="t" lIns="0" rIns="0" tIns="0" bIns="0">
+            <a:spAutoFit/>
+          </a:bodyPr>
+          <a:lstStyle/>
+          <a:p>
+            <a:pPr algn="l">
+              <a:lnSpc>
+                <a:spcPct val="105000"/>
+              </a:lnSpc>
+            </a:pPr>
+            <a:r>
+              <a:rPr sz="2900" b="1">
+                <a:solidFill>
+                  <a:srgbClr val="EDEFF4"/>
+                </a:solidFill>
+                <a:latin typeface="Arial"/>
+              </a:rPr>
+              <a:t>Run it yourself — no keys required</a:t>
+            </a:r>
+          </a:p>
+        </p:txBody>
+      </p:sp>
+      <p:cxnSp>
+        <p:nvCxnSpPr>
+          <p:cNvPr id="4" name="Connector 3"/>
+          <p:cNvCxnSpPr/>
+          <p:nvPr/>
+        </p:nvCxnSpPr>
+        <p:spPr>
+          <a:xfrm>
+            <a:off x="914400" y="1627632"/>
+            <a:ext cx="1371600" cy="0"/>
+          </a:xfrm>
+          <a:prstGeom prst="line">
+            <a:avLst/>
+          </a:prstGeom>
+          <a:ln w="31750">
+            <a:solidFill>
+              <a:srgbClr val="4FD1C5"/>
+            </a:solidFill>
+          </a:ln>
+        </p:spPr>
+        <p:style>
+          <a:lnRef idx="2">
+            <a:schemeClr val="accent1"/>
+          </a:lnRef>
+          <a:fillRef idx="0">
+            <a:schemeClr val="accent1"/>
+          </a:fillRef>
+          <a:effectRef idx="1">
+            <a:schemeClr val="accent1"/>
+          </a:effectRef>
+          <a:fontRef idx="minor">
+            <a:schemeClr val="tx1"/>
+          </a:fontRef>
+        </p:style>
+      </p:cxnSp>
+      <p:sp>
+        <p:nvSpPr>
+          <p:cNvPr id="5" name="TextBox 4"/>
+          <p:cNvSpPr txBox="1"/>
+          <p:nvPr/>
+        </p:nvSpPr>
+        <p:spPr>
+          <a:xfrm>
+            <a:off x="914400" y="6291072"/>
+            <a:ext cx="7315200" cy="256032"/>
+          </a:xfrm>
+          <a:prstGeom prst="rect">
+            <a:avLst/>
+          </a:prstGeom>
+          <a:noFill/>
+        </p:spPr>
+        <p:txBody>
+          <a:bodyPr wrap="square" anchor="t" lIns="0" rIns="0" tIns="0" bIns="0">
+            <a:spAutoFit/>
+          </a:bodyPr>
+          <a:lstStyle/>
+          <a:p>
+            <a:pPr algn="l">
+              <a:lnSpc>
+                <a:spcPct val="118000"/>
+              </a:lnSpc>
+            </a:pPr>
+            <a:r>
+              <a:rPr sz="900" b="0">
+                <a:solidFill>
+                  <a:srgbClr val="9BA6B8"/>
+                </a:solidFill>
+                <a:latin typeface="Arial"/>
+              </a:rPr>
+              <a:t>Driftwatch  ·  Open Agent Hackathon 2026  ·  Wildcard [Tinkerer]</a:t>
+            </a:r>
+          </a:p>
+        </p:txBody>
+      </p:sp>
+      <p:sp>
+        <p:nvSpPr>
+          <p:cNvPr id="6" name="TextBox 5"/>
+          <p:cNvSpPr txBox="1"/>
+          <p:nvPr/>
+        </p:nvSpPr>
+        <p:spPr>
+          <a:xfrm>
+            <a:off x="10728655" y="6291072"/>
+            <a:ext cx="548640" cy="256032"/>
+          </a:xfrm>
+          <a:prstGeom prst="rect">
+            <a:avLst/>
+          </a:prstGeom>
+          <a:noFill/>
+        </p:spPr>
+        <p:txBody>
+          <a:bodyPr wrap="square" anchor="t" lIns="0" rIns="0" tIns="0" bIns="0">
+            <a:spAutoFit/>
+          </a:bodyPr>
+          <a:lstStyle/>
+          <a:p>
+            <a:pPr algn="r">
+              <a:lnSpc>
+                <a:spcPct val="118000"/>
+              </a:lnSpc>
+            </a:pPr>
+            <a:r>
+              <a:rPr sz="900" b="0">
+                <a:solidFill>
+                  <a:srgbClr val="9BA6B8"/>
+                </a:solidFill>
+                <a:latin typeface="Arial"/>
+              </a:rPr>
+              <a:t>12</a:t>
             </a:r>
           </a:p>
         </p:txBody>
@@ -8504,7 +9061,7 @@
                 </a:solidFill>
                 <a:latin typeface="Arial"/>
               </a:rPr>
-              <a:t>WHAT WENT WRONG</a:t>
+              <a:t>EVIDENCE · ZETARIS ACCEPTANCE</a:t>
             </a:r>
           </a:p>
         </p:txBody>
@@ -8543,7 +9100,7 @@
                 </a:solidFill>
                 <a:latin typeface="Arial"/>
               </a:rPr>
-              <a:t>Our guard caught a supplier bug in production</a:t>
+              <a:t>The acceptance run, as it printed</a:t>
             </a:r>
           </a:p>
         </p:txBody>
@@ -8670,7 +9227,7 @@
         <p:spPr>
           <a:xfrm>
             <a:off x="914400" y="1874519"/>
-            <a:ext cx="10362895" cy="4114800"/>
+            <a:ext cx="4160520" cy="4114800"/>
           </a:xfrm>
           <a:prstGeom prst="rect">
             <a:avLst/>
@@ -8688,19 +9245,19 @@
                 <a:spcPct val="122000"/>
               </a:lnSpc>
               <a:spcAft>
-                <a:spcPts val="1300"/>
+                <a:spcPts val="1200"/>
               </a:spcAft>
               <a:buFont typeface="Arial"/>
               <a:buChar char="—"/>
             </a:pPr>
             <a:r>
-              <a:rPr sz="1700" b="0">
+              <a:rPr sz="1450" b="0">
                 <a:solidFill>
                   <a:srgbClr val="EDEFF4"/>
                 </a:solidFill>
                 <a:latin typeface="Arial"/>
               </a:rPr>
-              <a:t>The live engine’s CSV parser silently truncated cells at embedded quotes — row counts and headers still looked perfect.</a:t>
+              <a:t>One command re-publishes the policy without rule R-1 and diffs the resulting findings against the base snapshot.</a:t>
             </a:r>
           </a:p>
           <a:p>
@@ -8709,19 +9266,19 @@
                 <a:spcPct val="122000"/>
               </a:lnSpc>
               <a:spcAft>
-                <a:spcPts val="1300"/>
+                <a:spcPts val="1200"/>
               </a:spcAft>
               <a:buFont typeface="Arial"/>
               <a:buChar char="—"/>
             </a:pPr>
             <a:r>
-              <a:rPr sz="1700" b="0">
+              <a:rPr sz="1450" b="0">
                 <a:solidFill>
                   <a:srgbClr val="EDEFF4"/>
                 </a:solidFill>
                 <a:latin typeface="Arial"/>
               </a:rPr>
-              <a:t>Our content-digest check rejected every affected fetch, so the run degraded to fixture data honestly instead of feeding corrupted rules to an agent.</a:t>
+              <a:t>only_in_base carries exactly one entry — the detached-volume finding R-1 produced; only_in_variant is empty.</a:t>
             </a:r>
           </a:p>
           <a:p>
@@ -8730,19 +9287,19 @@
                 <a:spcPct val="122000"/>
               </a:lnSpc>
               <a:spcAft>
-                <a:spcPts val="1300"/>
+                <a:spcPts val="1200"/>
               </a:spcAft>
               <a:buFont typeface="Arial"/>
               <a:buChar char="—"/>
             </a:pPr>
             <a:r>
-              <a:rPr sz="1700" b="0">
+              <a:rPr sz="1450" b="0">
                 <a:solidFill>
                   <a:srgbClr val="EDEFF4"/>
                 </a:solidFill>
                 <a:latin typeface="Arial"/>
               </a:rPr>
-              <a:t>Response: a quote-safe re-export with unchanged digests, new immutable snapshots, and v1 revoked and dropped.</a:t>
+              <a:t>The tool reports its own verdict: effect_observed true, sponsor_acceptance true.</a:t>
             </a:r>
           </a:p>
           <a:p>
@@ -8751,23 +9308,48 @@
                 <a:spcPct val="122000"/>
               </a:lnSpc>
               <a:spcAft>
-                <a:spcPts val="1300"/>
+                <a:spcPts val="1200"/>
               </a:spcAft>
               <a:buFont typeface="Arial"/>
               <a:buChar char="—"/>
             </a:pPr>
             <a:r>
-              <a:rPr sz="1700" b="0">
+              <a:rPr sz="1450" b="0">
                 <a:solidFill>
                   <a:srgbClr val="EDEFF4"/>
                 </a:solidFill>
                 <a:latin typeface="Arial"/>
               </a:rPr>
-              <a:t>“A connector’s happy path is not its contract — validate the payload after the wire, not just the status code.”</a:t>
-            </a:r>
-          </a:p>
-        </p:txBody>
-      </p:sp>
+              <a:t>This is the program's output, not a rendering of it.</a:t>
+            </a:r>
+          </a:p>
+        </p:txBody>
+      </p:sp>
+      <p:pic>
+        <p:nvPicPr>
+          <p:cNvPr id="8" name="Picture 7" descr="hero-frame.png"/>
+          <p:cNvPicPr>
+            <a:picLocks noChangeAspect="1"/>
+          </p:cNvPicPr>
+          <p:nvPr/>
+        </p:nvPicPr>
+        <p:blipFill>
+          <a:blip r:embed="rId2"/>
+          <a:srcRect l="382" r="382" t="536" b="536"/>
+          <a:stretch>
+            <a:fillRect/>
+          </a:stretch>
+        </p:blipFill>
+        <p:spPr>
+          <a:xfrm>
+            <a:off x="5349240" y="1874519"/>
+            <a:ext cx="5897880" cy="4202052"/>
+          </a:xfrm>
+          <a:prstGeom prst="rect">
+            <a:avLst/>
+          </a:prstGeom>
+        </p:spPr>
+      </p:pic>
     </p:spTree>
   </p:cSld>
   <p:clrMapOvr>
@@ -8828,7 +9410,7 @@
                 </a:solidFill>
                 <a:latin typeface="Arial"/>
               </a:rPr>
-              <a:t>MEASUREMENT</a:t>
+              <a:t>WHAT WENT WRONG</a:t>
             </a:r>
           </a:p>
         </p:txBody>
@@ -8867,7 +9449,7 @@
                 </a:solidFill>
                 <a:latin typeface="Arial"/>
               </a:rPr>
-              <a:t>Measured, not promised</a:t>
+              <a:t>Our guard caught a supplier bug in production</a:t>
             </a:r>
           </a:p>
         </p:txBody>
@@ -8987,197 +9569,14 @@
       </p:sp>
       <p:sp>
         <p:nvSpPr>
-          <p:cNvPr id="7" name="Rounded Rectangle 6"/>
-          <p:cNvSpPr/>
-          <p:nvPr/>
-        </p:nvSpPr>
-        <p:spPr>
-          <a:xfrm>
-            <a:off x="914400" y="1920240"/>
-            <a:ext cx="3246120" cy="1874519"/>
-          </a:xfrm>
-          <a:prstGeom prst="roundRect">
-            <a:avLst>
-              <a:gd name="adj" fmla="val 6000"/>
-            </a:avLst>
-          </a:prstGeom>
-          <a:solidFill>
-            <a:srgbClr val="1E222C"/>
-          </a:solidFill>
-          <a:ln>
-            <a:noFill/>
-          </a:ln>
-          <a:effectLst/>
-        </p:spPr>
-        <p:txBody>
-          <a:bodyPr rtlCol="0" anchor="t" wrap="square" lIns="164592" rIns="164592" tIns="91440" bIns="91440"/>
-          <a:lstStyle/>
-          <a:p>
-            <a:pPr algn="l">
-              <a:lnSpc>
-                <a:spcPct val="100000"/>
-              </a:lnSpc>
-            </a:pPr>
-            <a:r>
-              <a:rPr sz="3400" b="1">
-                <a:solidFill>
-                  <a:srgbClr val="4FD1C5"/>
-                </a:solidFill>
-                <a:latin typeface="Arial"/>
-              </a:rPr>
-              <a:t>3 / 3</a:t>
-            </a:r>
-          </a:p>
-          <a:p>
-            <a:pPr algn="l">
-              <a:lnSpc>
-                <a:spcPct val="120000"/>
-              </a:lnSpc>
-            </a:pPr>
-            <a:r>
-              <a:rPr sz="1150" b="0">
-                <a:solidFill>
-                  <a:srgbClr val="9BA6B8"/>
-                </a:solidFill>
-                <a:latin typeface="Arial"/>
-              </a:rPr>
-              <a:t>Curated scenarios — precision, recall and verdict accuracy all 1.0, deterministic</a:t>
-            </a:r>
-          </a:p>
-        </p:txBody>
-      </p:sp>
-      <p:sp>
-        <p:nvSpPr>
-          <p:cNvPr id="8" name="Rounded Rectangle 7"/>
-          <p:cNvSpPr/>
-          <p:nvPr/>
-        </p:nvSpPr>
-        <p:spPr>
-          <a:xfrm>
-            <a:off x="4471416" y="1920240"/>
-            <a:ext cx="3246120" cy="1874519"/>
-          </a:xfrm>
-          <a:prstGeom prst="roundRect">
-            <a:avLst>
-              <a:gd name="adj" fmla="val 6000"/>
-            </a:avLst>
-          </a:prstGeom>
-          <a:solidFill>
-            <a:srgbClr val="1E222C"/>
-          </a:solidFill>
-          <a:ln>
-            <a:noFill/>
-          </a:ln>
-          <a:effectLst/>
-        </p:spPr>
-        <p:txBody>
-          <a:bodyPr rtlCol="0" anchor="t" wrap="square" lIns="164592" rIns="164592" tIns="91440" bIns="91440"/>
-          <a:lstStyle/>
-          <a:p>
-            <a:pPr algn="l">
-              <a:lnSpc>
-                <a:spcPct val="100000"/>
-              </a:lnSpc>
-            </a:pPr>
-            <a:r>
-              <a:rPr sz="3400" b="1">
-                <a:solidFill>
-                  <a:srgbClr val="4FD1C5"/>
-                </a:solidFill>
-                <a:latin typeface="Arial"/>
-              </a:rPr>
-              <a:t>10</a:t>
-            </a:r>
-          </a:p>
-          <a:p>
-            <a:pPr algn="l">
-              <a:lnSpc>
-                <a:spcPct val="120000"/>
-              </a:lnSpc>
-            </a:pPr>
-            <a:r>
-              <a:rPr sz="1150" b="0">
-                <a:solidFill>
-                  <a:srgbClr val="9BA6B8"/>
-                </a:solidFill>
-                <a:latin typeface="Arial"/>
-              </a:rPr>
-              <a:t>Held-out generated tenancies, same scores; the generator exposed two defects the curated set missed</a:t>
-            </a:r>
-          </a:p>
-        </p:txBody>
-      </p:sp>
-      <p:sp>
-        <p:nvSpPr>
-          <p:cNvPr id="9" name="Rounded Rectangle 8"/>
-          <p:cNvSpPr/>
-          <p:nvPr/>
-        </p:nvSpPr>
-        <p:spPr>
-          <a:xfrm>
-            <a:off x="8028431" y="1920240"/>
-            <a:ext cx="3246120" cy="1874519"/>
-          </a:xfrm>
-          <a:prstGeom prst="roundRect">
-            <a:avLst>
-              <a:gd name="adj" fmla="val 6000"/>
-            </a:avLst>
-          </a:prstGeom>
-          <a:solidFill>
-            <a:srgbClr val="1E222C"/>
-          </a:solidFill>
-          <a:ln>
-            <a:noFill/>
-          </a:ln>
-          <a:effectLst/>
-        </p:spPr>
-        <p:txBody>
-          <a:bodyPr rtlCol="0" anchor="t" wrap="square" lIns="164592" rIns="164592" tIns="91440" bIns="91440"/>
-          <a:lstStyle/>
-          <a:p>
-            <a:pPr algn="l">
-              <a:lnSpc>
-                <a:spcPct val="100000"/>
-              </a:lnSpc>
-            </a:pPr>
-            <a:r>
-              <a:rPr sz="3400" b="1">
-                <a:solidFill>
-                  <a:srgbClr val="F2B36B"/>
-                </a:solidFill>
-                <a:latin typeface="Arial"/>
-              </a:rPr>
-              <a:t>465</a:t>
-            </a:r>
-          </a:p>
-          <a:p>
-            <a:pPr algn="l">
-              <a:lnSpc>
-                <a:spcPct val="120000"/>
-              </a:lnSpc>
-            </a:pPr>
-            <a:r>
-              <a:rPr sz="1150" b="0">
-                <a:solidFill>
-                  <a:srgbClr val="9BA6B8"/>
-                </a:solidFill>
-                <a:latin typeface="Arial"/>
-              </a:rPr>
-              <a:t>Tests, including sample-mode isolation enforced by blocking sockets and subprocess creation</a:t>
-            </a:r>
-          </a:p>
-        </p:txBody>
-      </p:sp>
-      <p:sp>
-        <p:nvSpPr>
-          <p:cNvPr id="10" name="TextBox 9"/>
+          <p:cNvPr id="7" name="TextBox 6"/>
           <p:cNvSpPr txBox="1"/>
           <p:nvPr/>
         </p:nvSpPr>
         <p:spPr>
           <a:xfrm>
-            <a:off x="914400" y="4069080"/>
-            <a:ext cx="10362895" cy="1920239"/>
+            <a:off x="914400" y="1874519"/>
+            <a:ext cx="10362895" cy="4114800"/>
           </a:xfrm>
           <a:prstGeom prst="rect">
             <a:avLst/>
@@ -9195,19 +9594,19 @@
                 <a:spcPct val="122000"/>
               </a:lnSpc>
               <a:spcAft>
-                <a:spcPts val="800"/>
+                <a:spcPts val="1300"/>
               </a:spcAft>
               <a:buFont typeface="Arial"/>
               <a:buChar char="—"/>
             </a:pPr>
             <a:r>
-              <a:rPr sz="1450" b="0">
+              <a:rPr sz="1700" b="0">
                 <a:solidFill>
                   <a:srgbClr val="EDEFF4"/>
                 </a:solidFill>
                 <a:latin typeface="Arial"/>
               </a:rPr>
-              <a:t>Undefined metrics stay n/a rather than being scored as perfect; a clean tenancy must produce no findings at all.</a:t>
+              <a:t>The live engine’s CSV parser silently truncated cells at embedded quotes — row counts and headers still looked perfect.</a:t>
             </a:r>
           </a:p>
           <a:p>
@@ -9216,19 +9615,19 @@
                 <a:spcPct val="122000"/>
               </a:lnSpc>
               <a:spcAft>
-                <a:spcPts val="800"/>
+                <a:spcPts val="1300"/>
               </a:spcAft>
               <a:buFont typeface="Arial"/>
               <a:buChar char="—"/>
             </a:pPr>
             <a:r>
-              <a:rPr sz="1450" b="0">
+              <a:rPr sz="1700" b="0">
                 <a:solidFill>
                   <a:srgbClr val="EDEFF4"/>
                 </a:solidFill>
                 <a:latin typeface="Arial"/>
               </a:rPr>
-              <a:t>Every external call has a timeout, every loop has a cap, and a run finishes in minutes.</a:t>
+              <a:t>Our content-digest check rejected every affected fetch, so the run degraded to fixture data honestly instead of feeding corrupted rules to an agent.</a:t>
             </a:r>
           </a:p>
           <a:p>
@@ -9237,19 +9636,40 @@
                 <a:spcPct val="122000"/>
               </a:lnSpc>
               <a:spcAft>
-                <a:spcPts val="800"/>
+                <a:spcPts val="1300"/>
               </a:spcAft>
               <a:buFont typeface="Arial"/>
               <a:buChar char="—"/>
             </a:pPr>
             <a:r>
-              <a:rPr sz="1450" b="0">
+              <a:rPr sz="1700" b="0">
                 <a:solidFill>
                   <a:srgbClr val="EDEFF4"/>
                 </a:solidFill>
                 <a:latin typeface="Arial"/>
               </a:rPr>
-              <a:t>Packaging verified from a fresh public clone, and the offline path re-run with network and DNS denied.</a:t>
+              <a:t>Response: a quote-safe re-export with unchanged digests, new immutable snapshots, and v1 revoked and dropped.</a:t>
+            </a:r>
+          </a:p>
+          <a:p>
+            <a:pPr algn="l" marL="274320" indent="-274320">
+              <a:lnSpc>
+                <a:spcPct val="122000"/>
+              </a:lnSpc>
+              <a:spcAft>
+                <a:spcPts val="1300"/>
+              </a:spcAft>
+              <a:buFont typeface="Arial"/>
+              <a:buChar char="—"/>
+            </a:pPr>
+            <a:r>
+              <a:rPr sz="1700" b="0">
+                <a:solidFill>
+                  <a:srgbClr val="EDEFF4"/>
+                </a:solidFill>
+                <a:latin typeface="Arial"/>
+              </a:rPr>
+              <a:t>“A connector’s happy path is not its contract — validate the payload after the wire, not just the status code.”</a:t>
             </a:r>
           </a:p>
         </p:txBody>
